--- a/Visión computacional/PPTXs/vision-computacional.pptx
+++ b/Visión computacional/PPTXs/vision-computacional.pptx
@@ -5,26 +5,21 @@
     <p:sldMasterId id="2147483648" r:id="rId1"/>
   </p:sldMasterIdLst>
   <p:sldIdLst>
-    <p:sldId id="256" r:id="rId7"/>
-    <p:sldId id="257" r:id="rId8"/>
-    <p:sldId id="258" r:id="rId9"/>
-    <p:sldId id="259" r:id="rId10"/>
-    <p:sldId id="260" r:id="rId11"/>
-    <p:sldId id="261" r:id="rId12"/>
-    <p:sldId id="262" r:id="rId13"/>
-    <p:sldId id="263" r:id="rId14"/>
-    <p:sldId id="264" r:id="rId15"/>
-    <p:sldId id="265" r:id="rId16"/>
-    <p:sldId id="266" r:id="rId17"/>
-    <p:sldId id="267" r:id="rId18"/>
-    <p:sldId id="268" r:id="rId19"/>
-    <p:sldId id="269" r:id="rId20"/>
-    <p:sldId id="270" r:id="rId21"/>
-    <p:sldId id="271" r:id="rId22"/>
-    <p:sldId id="272" r:id="rId23"/>
-    <p:sldId id="273" r:id="rId24"/>
+    <p:sldId id="256" r:id="rId2"/>
+    <p:sldId id="257" r:id="rId3"/>
+    <p:sldId id="258" r:id="rId4"/>
+    <p:sldId id="259" r:id="rId5"/>
+    <p:sldId id="260" r:id="rId6"/>
+    <p:sldId id="261" r:id="rId7"/>
+    <p:sldId id="262" r:id="rId8"/>
+    <p:sldId id="263" r:id="rId9"/>
+    <p:sldId id="264" r:id="rId10"/>
+    <p:sldId id="265" r:id="rId11"/>
+    <p:sldId id="266" r:id="rId12"/>
+    <p:sldId id="267" r:id="rId13"/>
+    <p:sldId id="269" r:id="rId14"/>
   </p:sldIdLst>
-  <p:sldSz cx="12191999" cy="6858000" type="screen4x3"/>
+  <p:sldSz cx="12192000" cy="6858000"/>
   <p:notesSz cx="6858000" cy="9144000"/>
   <p:defaultTextStyle>
     <a:defPPr>
@@ -121,6 +116,22 @@
       </a:defRPr>
     </a:lvl9pPr>
   </p:defaultTextStyle>
+  <p:extLst>
+    <p:ext uri="{EFAFB233-063F-42B5-8137-9DF3F51BA10A}">
+      <p15:sldGuideLst xmlns:p15="http://schemas.microsoft.com/office/powerpoint/2012/main">
+        <p15:guide id="1" orient="horz" pos="2160">
+          <p15:clr>
+            <a:srgbClr val="A4A3A4"/>
+          </p15:clr>
+        </p15:guide>
+        <p15:guide id="2" pos="2880">
+          <p15:clr>
+            <a:srgbClr val="A4A3A4"/>
+          </p15:clr>
+        </p15:guide>
+      </p15:sldGuideLst>
+    </p:ext>
+  </p:extLst>
 </p:presentation>
 </file>
 
@@ -162,10 +173,9 @@
           <a:lstStyle/>
           <a:p>
             <a:r>
-              <a:rPr lang="en-US" smtClean="0"/>
+              <a:rPr lang="en-US"/>
               <a:t>Click to edit Master title style</a:t>
             </a:r>
-            <a:endParaRPr lang="en-US"/>
           </a:p>
         </p:txBody>
       </p:sp>
@@ -281,10 +291,9 @@
           </a:lstStyle>
           <a:p>
             <a:r>
-              <a:rPr lang="en-US" smtClean="0"/>
+              <a:rPr lang="en-US"/>
               <a:t>Click to edit Master subtitle style</a:t>
             </a:r>
-            <a:endParaRPr lang="en-US"/>
           </a:p>
         </p:txBody>
       </p:sp>
@@ -305,7 +314,7 @@
           <a:p>
             <a:fld id="{5BCAD085-E8A6-8845-BD4E-CB4CCA059FC4}" type="datetimeFigureOut">
               <a:rPr lang="en-US" smtClean="0"/>
-              <a:t>1/27/13</a:t>
+              <a:t>9/4/26</a:t>
             </a:fld>
             <a:endParaRPr lang="en-US"/>
           </a:p>
@@ -347,7 +356,7 @@
           <a:p>
             <a:fld id="{C1FF6DA9-008F-8B48-92A6-B652298478BF}" type="slidenum">
               <a:rPr lang="en-US" smtClean="0"/>
-              <a:t>‹#›</a:t>
+              <a:t>‹Nº›</a:t>
             </a:fld>
             <a:endParaRPr lang="en-US"/>
           </a:p>
@@ -399,10 +408,9 @@
           <a:lstStyle/>
           <a:p>
             <a:r>
-              <a:rPr lang="en-US" smtClean="0"/>
+              <a:rPr lang="en-US"/>
               <a:t>Click to edit Master title style</a:t>
             </a:r>
-            <a:endParaRPr lang="en-US"/>
           </a:p>
         </p:txBody>
       </p:sp>
@@ -423,38 +431,37 @@
           <a:p>
             <a:pPr lvl="0"/>
             <a:r>
-              <a:rPr lang="en-US" smtClean="0"/>
+              <a:rPr lang="en-US"/>
               <a:t>Click to edit Master text styles</a:t>
             </a:r>
           </a:p>
           <a:p>
             <a:pPr lvl="1"/>
             <a:r>
-              <a:rPr lang="en-US" smtClean="0"/>
+              <a:rPr lang="en-US"/>
               <a:t>Second level</a:t>
             </a:r>
           </a:p>
           <a:p>
             <a:pPr lvl="2"/>
             <a:r>
-              <a:rPr lang="en-US" smtClean="0"/>
+              <a:rPr lang="en-US"/>
               <a:t>Third level</a:t>
             </a:r>
           </a:p>
           <a:p>
             <a:pPr lvl="3"/>
             <a:r>
-              <a:rPr lang="en-US" smtClean="0"/>
+              <a:rPr lang="en-US"/>
               <a:t>Fourth level</a:t>
             </a:r>
           </a:p>
           <a:p>
             <a:pPr lvl="4"/>
             <a:r>
-              <a:rPr lang="en-US" smtClean="0"/>
+              <a:rPr lang="en-US"/>
               <a:t>Fifth level</a:t>
             </a:r>
-            <a:endParaRPr lang="en-US"/>
           </a:p>
         </p:txBody>
       </p:sp>
@@ -475,7 +482,7 @@
           <a:p>
             <a:fld id="{5BCAD085-E8A6-8845-BD4E-CB4CCA059FC4}" type="datetimeFigureOut">
               <a:rPr lang="en-US" smtClean="0"/>
-              <a:t>1/27/13</a:t>
+              <a:t>9/4/26</a:t>
             </a:fld>
             <a:endParaRPr lang="en-US"/>
           </a:p>
@@ -517,7 +524,7 @@
           <a:p>
             <a:fld id="{C1FF6DA9-008F-8B48-92A6-B652298478BF}" type="slidenum">
               <a:rPr lang="en-US" smtClean="0"/>
-              <a:t>‹#›</a:t>
+              <a:t>‹Nº›</a:t>
             </a:fld>
             <a:endParaRPr lang="en-US"/>
           </a:p>
@@ -574,10 +581,9 @@
           <a:lstStyle/>
           <a:p>
             <a:r>
-              <a:rPr lang="en-US" smtClean="0"/>
+              <a:rPr lang="en-US"/>
               <a:t>Click to edit Master title style</a:t>
             </a:r>
-            <a:endParaRPr lang="en-US"/>
           </a:p>
         </p:txBody>
       </p:sp>
@@ -603,38 +609,37 @@
           <a:p>
             <a:pPr lvl="0"/>
             <a:r>
-              <a:rPr lang="en-US" smtClean="0"/>
+              <a:rPr lang="en-US"/>
               <a:t>Click to edit Master text styles</a:t>
             </a:r>
           </a:p>
           <a:p>
             <a:pPr lvl="1"/>
             <a:r>
-              <a:rPr lang="en-US" smtClean="0"/>
+              <a:rPr lang="en-US"/>
               <a:t>Second level</a:t>
             </a:r>
           </a:p>
           <a:p>
             <a:pPr lvl="2"/>
             <a:r>
-              <a:rPr lang="en-US" smtClean="0"/>
+              <a:rPr lang="en-US"/>
               <a:t>Third level</a:t>
             </a:r>
           </a:p>
           <a:p>
             <a:pPr lvl="3"/>
             <a:r>
-              <a:rPr lang="en-US" smtClean="0"/>
+              <a:rPr lang="en-US"/>
               <a:t>Fourth level</a:t>
             </a:r>
           </a:p>
           <a:p>
             <a:pPr lvl="4"/>
             <a:r>
-              <a:rPr lang="en-US" smtClean="0"/>
+              <a:rPr lang="en-US"/>
               <a:t>Fifth level</a:t>
             </a:r>
-            <a:endParaRPr lang="en-US"/>
           </a:p>
         </p:txBody>
       </p:sp>
@@ -655,7 +660,7 @@
           <a:p>
             <a:fld id="{5BCAD085-E8A6-8845-BD4E-CB4CCA059FC4}" type="datetimeFigureOut">
               <a:rPr lang="en-US" smtClean="0"/>
-              <a:t>1/27/13</a:t>
+              <a:t>9/4/26</a:t>
             </a:fld>
             <a:endParaRPr lang="en-US"/>
           </a:p>
@@ -697,7 +702,7 @@
           <a:p>
             <a:fld id="{C1FF6DA9-008F-8B48-92A6-B652298478BF}" type="slidenum">
               <a:rPr lang="en-US" smtClean="0"/>
-              <a:t>‹#›</a:t>
+              <a:t>‹Nº›</a:t>
             </a:fld>
             <a:endParaRPr lang="en-US"/>
           </a:p>
@@ -749,10 +754,9 @@
           <a:lstStyle/>
           <a:p>
             <a:r>
-              <a:rPr lang="en-US" smtClean="0"/>
+              <a:rPr lang="en-US"/>
               <a:t>Click to edit Master title style</a:t>
             </a:r>
-            <a:endParaRPr lang="en-US"/>
           </a:p>
         </p:txBody>
       </p:sp>
@@ -773,38 +777,37 @@
           <a:p>
             <a:pPr lvl="0"/>
             <a:r>
-              <a:rPr lang="en-US" smtClean="0"/>
+              <a:rPr lang="en-US"/>
               <a:t>Click to edit Master text styles</a:t>
             </a:r>
           </a:p>
           <a:p>
             <a:pPr lvl="1"/>
             <a:r>
-              <a:rPr lang="en-US" smtClean="0"/>
+              <a:rPr lang="en-US"/>
               <a:t>Second level</a:t>
             </a:r>
           </a:p>
           <a:p>
             <a:pPr lvl="2"/>
             <a:r>
-              <a:rPr lang="en-US" smtClean="0"/>
+              <a:rPr lang="en-US"/>
               <a:t>Third level</a:t>
             </a:r>
           </a:p>
           <a:p>
             <a:pPr lvl="3"/>
             <a:r>
-              <a:rPr lang="en-US" smtClean="0"/>
+              <a:rPr lang="en-US"/>
               <a:t>Fourth level</a:t>
             </a:r>
           </a:p>
           <a:p>
             <a:pPr lvl="4"/>
             <a:r>
-              <a:rPr lang="en-US" smtClean="0"/>
+              <a:rPr lang="en-US"/>
               <a:t>Fifth level</a:t>
             </a:r>
-            <a:endParaRPr lang="en-US"/>
           </a:p>
         </p:txBody>
       </p:sp>
@@ -825,7 +828,7 @@
           <a:p>
             <a:fld id="{5BCAD085-E8A6-8845-BD4E-CB4CCA059FC4}" type="datetimeFigureOut">
               <a:rPr lang="en-US" smtClean="0"/>
-              <a:t>1/27/13</a:t>
+              <a:t>9/4/26</a:t>
             </a:fld>
             <a:endParaRPr lang="en-US"/>
           </a:p>
@@ -867,7 +870,7 @@
           <a:p>
             <a:fld id="{C1FF6DA9-008F-8B48-92A6-B652298478BF}" type="slidenum">
               <a:rPr lang="en-US" smtClean="0"/>
-              <a:t>‹#›</a:t>
+              <a:t>‹Nº›</a:t>
             </a:fld>
             <a:endParaRPr lang="en-US"/>
           </a:p>
@@ -928,10 +931,9 @@
           </a:lstStyle>
           <a:p>
             <a:r>
-              <a:rPr lang="en-US" smtClean="0"/>
+              <a:rPr lang="en-US"/>
               <a:t>Click to edit Master title style</a:t>
             </a:r>
-            <a:endParaRPr lang="en-US"/>
           </a:p>
         </p:txBody>
       </p:sp>
@@ -1048,7 +1050,7 @@
           <a:p>
             <a:pPr lvl="0"/>
             <a:r>
-              <a:rPr lang="en-US" smtClean="0"/>
+              <a:rPr lang="en-US"/>
               <a:t>Click to edit Master text styles</a:t>
             </a:r>
           </a:p>
@@ -1071,7 +1073,7 @@
           <a:p>
             <a:fld id="{5BCAD085-E8A6-8845-BD4E-CB4CCA059FC4}" type="datetimeFigureOut">
               <a:rPr lang="en-US" smtClean="0"/>
-              <a:t>1/27/13</a:t>
+              <a:t>9/4/26</a:t>
             </a:fld>
             <a:endParaRPr lang="en-US"/>
           </a:p>
@@ -1113,7 +1115,7 @@
           <a:p>
             <a:fld id="{C1FF6DA9-008F-8B48-92A6-B652298478BF}" type="slidenum">
               <a:rPr lang="en-US" smtClean="0"/>
-              <a:t>‹#›</a:t>
+              <a:t>‹Nº›</a:t>
             </a:fld>
             <a:endParaRPr lang="en-US"/>
           </a:p>
@@ -1165,10 +1167,9 @@
           <a:lstStyle/>
           <a:p>
             <a:r>
-              <a:rPr lang="en-US" smtClean="0"/>
+              <a:rPr lang="en-US"/>
               <a:t>Click to edit Master title style</a:t>
             </a:r>
-            <a:endParaRPr lang="en-US"/>
           </a:p>
         </p:txBody>
       </p:sp>
@@ -1222,38 +1223,37 @@
           <a:p>
             <a:pPr lvl="0"/>
             <a:r>
-              <a:rPr lang="en-US" smtClean="0"/>
+              <a:rPr lang="en-US"/>
               <a:t>Click to edit Master text styles</a:t>
             </a:r>
           </a:p>
           <a:p>
             <a:pPr lvl="1"/>
             <a:r>
-              <a:rPr lang="en-US" smtClean="0"/>
+              <a:rPr lang="en-US"/>
               <a:t>Second level</a:t>
             </a:r>
           </a:p>
           <a:p>
             <a:pPr lvl="2"/>
             <a:r>
-              <a:rPr lang="en-US" smtClean="0"/>
+              <a:rPr lang="en-US"/>
               <a:t>Third level</a:t>
             </a:r>
           </a:p>
           <a:p>
             <a:pPr lvl="3"/>
             <a:r>
-              <a:rPr lang="en-US" smtClean="0"/>
+              <a:rPr lang="en-US"/>
               <a:t>Fourth level</a:t>
             </a:r>
           </a:p>
           <a:p>
             <a:pPr lvl="4"/>
             <a:r>
-              <a:rPr lang="en-US" smtClean="0"/>
+              <a:rPr lang="en-US"/>
               <a:t>Fifth level</a:t>
             </a:r>
-            <a:endParaRPr lang="en-US"/>
           </a:p>
         </p:txBody>
       </p:sp>
@@ -1307,38 +1307,37 @@
           <a:p>
             <a:pPr lvl="0"/>
             <a:r>
-              <a:rPr lang="en-US" smtClean="0"/>
+              <a:rPr lang="en-US"/>
               <a:t>Click to edit Master text styles</a:t>
             </a:r>
           </a:p>
           <a:p>
             <a:pPr lvl="1"/>
             <a:r>
-              <a:rPr lang="en-US" smtClean="0"/>
+              <a:rPr lang="en-US"/>
               <a:t>Second level</a:t>
             </a:r>
           </a:p>
           <a:p>
             <a:pPr lvl="2"/>
             <a:r>
-              <a:rPr lang="en-US" smtClean="0"/>
+              <a:rPr lang="en-US"/>
               <a:t>Third level</a:t>
             </a:r>
           </a:p>
           <a:p>
             <a:pPr lvl="3"/>
             <a:r>
-              <a:rPr lang="en-US" smtClean="0"/>
+              <a:rPr lang="en-US"/>
               <a:t>Fourth level</a:t>
             </a:r>
           </a:p>
           <a:p>
             <a:pPr lvl="4"/>
             <a:r>
-              <a:rPr lang="en-US" smtClean="0"/>
+              <a:rPr lang="en-US"/>
               <a:t>Fifth level</a:t>
             </a:r>
-            <a:endParaRPr lang="en-US"/>
           </a:p>
         </p:txBody>
       </p:sp>
@@ -1359,7 +1358,7 @@
           <a:p>
             <a:fld id="{5BCAD085-E8A6-8845-BD4E-CB4CCA059FC4}" type="datetimeFigureOut">
               <a:rPr lang="en-US" smtClean="0"/>
-              <a:t>1/27/13</a:t>
+              <a:t>9/4/26</a:t>
             </a:fld>
             <a:endParaRPr lang="en-US"/>
           </a:p>
@@ -1401,7 +1400,7 @@
           <a:p>
             <a:fld id="{C1FF6DA9-008F-8B48-92A6-B652298478BF}" type="slidenum">
               <a:rPr lang="en-US" smtClean="0"/>
-              <a:t>‹#›</a:t>
+              <a:t>‹Nº›</a:t>
             </a:fld>
             <a:endParaRPr lang="en-US"/>
           </a:p>
@@ -1457,10 +1456,9 @@
           </a:lstStyle>
           <a:p>
             <a:r>
-              <a:rPr lang="en-US" smtClean="0"/>
+              <a:rPr lang="en-US"/>
               <a:t>Click to edit Master title style</a:t>
             </a:r>
-            <a:endParaRPr lang="en-US"/>
           </a:p>
         </p:txBody>
       </p:sp>
@@ -1523,7 +1521,7 @@
           <a:p>
             <a:pPr lvl="0"/>
             <a:r>
-              <a:rPr lang="en-US" smtClean="0"/>
+              <a:rPr lang="en-US"/>
               <a:t>Click to edit Master text styles</a:t>
             </a:r>
           </a:p>
@@ -1579,38 +1577,37 @@
           <a:p>
             <a:pPr lvl="0"/>
             <a:r>
-              <a:rPr lang="en-US" smtClean="0"/>
+              <a:rPr lang="en-US"/>
               <a:t>Click to edit Master text styles</a:t>
             </a:r>
           </a:p>
           <a:p>
             <a:pPr lvl="1"/>
             <a:r>
-              <a:rPr lang="en-US" smtClean="0"/>
+              <a:rPr lang="en-US"/>
               <a:t>Second level</a:t>
             </a:r>
           </a:p>
           <a:p>
             <a:pPr lvl="2"/>
             <a:r>
-              <a:rPr lang="en-US" smtClean="0"/>
+              <a:rPr lang="en-US"/>
               <a:t>Third level</a:t>
             </a:r>
           </a:p>
           <a:p>
             <a:pPr lvl="3"/>
             <a:r>
-              <a:rPr lang="en-US" smtClean="0"/>
+              <a:rPr lang="en-US"/>
               <a:t>Fourth level</a:t>
             </a:r>
           </a:p>
           <a:p>
             <a:pPr lvl="4"/>
             <a:r>
-              <a:rPr lang="en-US" smtClean="0"/>
+              <a:rPr lang="en-US"/>
               <a:t>Fifth level</a:t>
             </a:r>
-            <a:endParaRPr lang="en-US"/>
           </a:p>
         </p:txBody>
       </p:sp>
@@ -1673,7 +1670,7 @@
           <a:p>
             <a:pPr lvl="0"/>
             <a:r>
-              <a:rPr lang="en-US" smtClean="0"/>
+              <a:rPr lang="en-US"/>
               <a:t>Click to edit Master text styles</a:t>
             </a:r>
           </a:p>
@@ -1729,38 +1726,37 @@
           <a:p>
             <a:pPr lvl="0"/>
             <a:r>
-              <a:rPr lang="en-US" smtClean="0"/>
+              <a:rPr lang="en-US"/>
               <a:t>Click to edit Master text styles</a:t>
             </a:r>
           </a:p>
           <a:p>
             <a:pPr lvl="1"/>
             <a:r>
-              <a:rPr lang="en-US" smtClean="0"/>
+              <a:rPr lang="en-US"/>
               <a:t>Second level</a:t>
             </a:r>
           </a:p>
           <a:p>
             <a:pPr lvl="2"/>
             <a:r>
-              <a:rPr lang="en-US" smtClean="0"/>
+              <a:rPr lang="en-US"/>
               <a:t>Third level</a:t>
             </a:r>
           </a:p>
           <a:p>
             <a:pPr lvl="3"/>
             <a:r>
-              <a:rPr lang="en-US" smtClean="0"/>
+              <a:rPr lang="en-US"/>
               <a:t>Fourth level</a:t>
             </a:r>
           </a:p>
           <a:p>
             <a:pPr lvl="4"/>
             <a:r>
-              <a:rPr lang="en-US" smtClean="0"/>
+              <a:rPr lang="en-US"/>
               <a:t>Fifth level</a:t>
             </a:r>
-            <a:endParaRPr lang="en-US"/>
           </a:p>
         </p:txBody>
       </p:sp>
@@ -1781,7 +1777,7 @@
           <a:p>
             <a:fld id="{5BCAD085-E8A6-8845-BD4E-CB4CCA059FC4}" type="datetimeFigureOut">
               <a:rPr lang="en-US" smtClean="0"/>
-              <a:t>1/27/13</a:t>
+              <a:t>9/4/26</a:t>
             </a:fld>
             <a:endParaRPr lang="en-US"/>
           </a:p>
@@ -1823,7 +1819,7 @@
           <a:p>
             <a:fld id="{C1FF6DA9-008F-8B48-92A6-B652298478BF}" type="slidenum">
               <a:rPr lang="en-US" smtClean="0"/>
-              <a:t>‹#›</a:t>
+              <a:t>‹Nº›</a:t>
             </a:fld>
             <a:endParaRPr lang="en-US"/>
           </a:p>
@@ -1875,10 +1871,9 @@
           <a:lstStyle/>
           <a:p>
             <a:r>
-              <a:rPr lang="en-US" smtClean="0"/>
+              <a:rPr lang="en-US"/>
               <a:t>Click to edit Master title style</a:t>
             </a:r>
-            <a:endParaRPr lang="en-US"/>
           </a:p>
         </p:txBody>
       </p:sp>
@@ -1899,7 +1894,7 @@
           <a:p>
             <a:fld id="{5BCAD085-E8A6-8845-BD4E-CB4CCA059FC4}" type="datetimeFigureOut">
               <a:rPr lang="en-US" smtClean="0"/>
-              <a:t>1/27/13</a:t>
+              <a:t>9/4/26</a:t>
             </a:fld>
             <a:endParaRPr lang="en-US"/>
           </a:p>
@@ -1941,7 +1936,7 @@
           <a:p>
             <a:fld id="{C1FF6DA9-008F-8B48-92A6-B652298478BF}" type="slidenum">
               <a:rPr lang="en-US" smtClean="0"/>
-              <a:t>‹#›</a:t>
+              <a:t>‹Nº›</a:t>
             </a:fld>
             <a:endParaRPr lang="en-US"/>
           </a:p>
@@ -1994,7 +1989,7 @@
           <a:p>
             <a:fld id="{5BCAD085-E8A6-8845-BD4E-CB4CCA059FC4}" type="datetimeFigureOut">
               <a:rPr lang="en-US" smtClean="0"/>
-              <a:t>1/27/13</a:t>
+              <a:t>9/4/26</a:t>
             </a:fld>
             <a:endParaRPr lang="en-US"/>
           </a:p>
@@ -2036,7 +2031,7 @@
           <a:p>
             <a:fld id="{C1FF6DA9-008F-8B48-92A6-B652298478BF}" type="slidenum">
               <a:rPr lang="en-US" smtClean="0"/>
-              <a:t>‹#›</a:t>
+              <a:t>‹Nº›</a:t>
             </a:fld>
             <a:endParaRPr lang="en-US"/>
           </a:p>
@@ -2097,10 +2092,9 @@
           </a:lstStyle>
           <a:p>
             <a:r>
-              <a:rPr lang="en-US" smtClean="0"/>
+              <a:rPr lang="en-US"/>
               <a:t>Click to edit Master title style</a:t>
             </a:r>
-            <a:endParaRPr lang="en-US"/>
           </a:p>
         </p:txBody>
       </p:sp>
@@ -2154,38 +2148,37 @@
           <a:p>
             <a:pPr lvl="0"/>
             <a:r>
-              <a:rPr lang="en-US" smtClean="0"/>
+              <a:rPr lang="en-US"/>
               <a:t>Click to edit Master text styles</a:t>
             </a:r>
           </a:p>
           <a:p>
             <a:pPr lvl="1"/>
             <a:r>
-              <a:rPr lang="en-US" smtClean="0"/>
+              <a:rPr lang="en-US"/>
               <a:t>Second level</a:t>
             </a:r>
           </a:p>
           <a:p>
             <a:pPr lvl="2"/>
             <a:r>
-              <a:rPr lang="en-US" smtClean="0"/>
+              <a:rPr lang="en-US"/>
               <a:t>Third level</a:t>
             </a:r>
           </a:p>
           <a:p>
             <a:pPr lvl="3"/>
             <a:r>
-              <a:rPr lang="en-US" smtClean="0"/>
+              <a:rPr lang="en-US"/>
               <a:t>Fourth level</a:t>
             </a:r>
           </a:p>
           <a:p>
             <a:pPr lvl="4"/>
             <a:r>
-              <a:rPr lang="en-US" smtClean="0"/>
+              <a:rPr lang="en-US"/>
               <a:t>Fifth level</a:t>
             </a:r>
-            <a:endParaRPr lang="en-US"/>
           </a:p>
         </p:txBody>
       </p:sp>
@@ -2248,7 +2241,7 @@
           <a:p>
             <a:pPr lvl="0"/>
             <a:r>
-              <a:rPr lang="en-US" smtClean="0"/>
+              <a:rPr lang="en-US"/>
               <a:t>Click to edit Master text styles</a:t>
             </a:r>
           </a:p>
@@ -2271,7 +2264,7 @@
           <a:p>
             <a:fld id="{5BCAD085-E8A6-8845-BD4E-CB4CCA059FC4}" type="datetimeFigureOut">
               <a:rPr lang="en-US" smtClean="0"/>
-              <a:t>1/27/13</a:t>
+              <a:t>9/4/26</a:t>
             </a:fld>
             <a:endParaRPr lang="en-US"/>
           </a:p>
@@ -2313,7 +2306,7 @@
           <a:p>
             <a:fld id="{C1FF6DA9-008F-8B48-92A6-B652298478BF}" type="slidenum">
               <a:rPr lang="en-US" smtClean="0"/>
-              <a:t>‹#›</a:t>
+              <a:t>‹Nº›</a:t>
             </a:fld>
             <a:endParaRPr lang="en-US"/>
           </a:p>
@@ -2374,10 +2367,9 @@
           </a:lstStyle>
           <a:p>
             <a:r>
-              <a:rPr lang="en-US" smtClean="0"/>
+              <a:rPr lang="en-US"/>
               <a:t>Click to edit Master title style</a:t>
             </a:r>
-            <a:endParaRPr lang="en-US"/>
           </a:p>
         </p:txBody>
       </p:sp>
@@ -2501,7 +2493,7 @@
           <a:p>
             <a:pPr lvl="0"/>
             <a:r>
-              <a:rPr lang="en-US" smtClean="0"/>
+              <a:rPr lang="en-US"/>
               <a:t>Click to edit Master text styles</a:t>
             </a:r>
           </a:p>
@@ -2524,7 +2516,7 @@
           <a:p>
             <a:fld id="{5BCAD085-E8A6-8845-BD4E-CB4CCA059FC4}" type="datetimeFigureOut">
               <a:rPr lang="en-US" smtClean="0"/>
-              <a:t>1/27/13</a:t>
+              <a:t>9/4/26</a:t>
             </a:fld>
             <a:endParaRPr lang="en-US"/>
           </a:p>
@@ -2566,7 +2558,7 @@
           <a:p>
             <a:fld id="{C1FF6DA9-008F-8B48-92A6-B652298478BF}" type="slidenum">
               <a:rPr lang="en-US" smtClean="0"/>
-              <a:t>‹#›</a:t>
+              <a:t>‹Nº›</a:t>
             </a:fld>
             <a:endParaRPr lang="en-US"/>
           </a:p>
@@ -2633,10 +2625,9 @@
           <a:lstStyle/>
           <a:p>
             <a:r>
-              <a:rPr lang="en-US" smtClean="0"/>
+              <a:rPr lang="en-US"/>
               <a:t>Click to edit Master title style</a:t>
             </a:r>
-            <a:endParaRPr lang="en-US"/>
           </a:p>
         </p:txBody>
       </p:sp>
@@ -2667,38 +2658,37 @@
           <a:p>
             <a:pPr lvl="0"/>
             <a:r>
-              <a:rPr lang="en-US" smtClean="0"/>
+              <a:rPr lang="en-US"/>
               <a:t>Click to edit Master text styles</a:t>
             </a:r>
           </a:p>
           <a:p>
             <a:pPr lvl="1"/>
             <a:r>
-              <a:rPr lang="en-US" smtClean="0"/>
+              <a:rPr lang="en-US"/>
               <a:t>Second level</a:t>
             </a:r>
           </a:p>
           <a:p>
             <a:pPr lvl="2"/>
             <a:r>
-              <a:rPr lang="en-US" smtClean="0"/>
+              <a:rPr lang="en-US"/>
               <a:t>Third level</a:t>
             </a:r>
           </a:p>
           <a:p>
             <a:pPr lvl="3"/>
             <a:r>
-              <a:rPr lang="en-US" smtClean="0"/>
+              <a:rPr lang="en-US"/>
               <a:t>Fourth level</a:t>
             </a:r>
           </a:p>
           <a:p>
             <a:pPr lvl="4"/>
             <a:r>
-              <a:rPr lang="en-US" smtClean="0"/>
+              <a:rPr lang="en-US"/>
               <a:t>Fifth level</a:t>
             </a:r>
-            <a:endParaRPr lang="en-US"/>
           </a:p>
         </p:txBody>
       </p:sp>
@@ -2737,7 +2727,7 @@
           <a:p>
             <a:fld id="{5BCAD085-E8A6-8845-BD4E-CB4CCA059FC4}" type="datetimeFigureOut">
               <a:rPr lang="en-US" smtClean="0"/>
-              <a:t>1/27/13</a:t>
+              <a:t>9/4/26</a:t>
             </a:fld>
             <a:endParaRPr lang="en-US"/>
           </a:p>
@@ -2815,7 +2805,7 @@
           <a:p>
             <a:fld id="{C1FF6DA9-008F-8B48-92A6-B652298478BF}" type="slidenum">
               <a:rPr lang="en-US" smtClean="0"/>
-              <a:t>‹#›</a:t>
+              <a:t>‹Nº›</a:t>
             </a:fld>
             <a:endParaRPr lang="en-US"/>
           </a:p>
@@ -3096,7 +3086,7 @@
 </file>
 
 <file path=ppt/slides/slide1.xml><?xml version="1.0" encoding="utf-8"?>
-<p:sld xmlns:a="http://schemas.openxmlformats.org/drawingml/2006/main" xmlns:p="http://schemas.openxmlformats.org/presentationml/2006/main" xmlns:r="http://schemas.openxmlformats.org/officeDocument/2006/relationships">
+<p:sld xmlns:a="http://schemas.openxmlformats.org/drawingml/2006/main" xmlns:r="http://schemas.openxmlformats.org/officeDocument/2006/relationships" xmlns:p="http://schemas.openxmlformats.org/presentationml/2006/main">
   <p:cSld>
     <p:spTree>
       <p:nvGrpSpPr>
@@ -3104,7 +3094,14 @@
         <p:cNvGrpSpPr/>
         <p:nvPr/>
       </p:nvGrpSpPr>
-      <p:grpSpPr/>
+      <p:grpSpPr>
+        <a:xfrm>
+          <a:off x="0" y="0"/>
+          <a:ext cx="0" cy="0"/>
+          <a:chOff x="0" y="0"/>
+          <a:chExt cx="0" cy="0"/>
+        </a:xfrm>
+      </p:grpSpPr>
       <p:sp>
         <p:nvSpPr>
           <p:cNvPr id="2" name="Rectangle 1"/>
@@ -3145,6 +3142,7 @@
           <a:lstStyle/>
           <a:p>
             <a:pPr algn="ctr"/>
+            <a:endParaRPr/>
           </a:p>
         </p:txBody>
       </p:sp>
@@ -3188,6 +3186,7 @@
           <a:lstStyle/>
           <a:p>
             <a:pPr algn="ctr"/>
+            <a:endParaRPr/>
           </a:p>
         </p:txBody>
       </p:sp>
@@ -3341,7 +3340,7 @@
 </file>
 
 <file path=ppt/slides/slide10.xml><?xml version="1.0" encoding="utf-8"?>
-<p:sld xmlns:a="http://schemas.openxmlformats.org/drawingml/2006/main" xmlns:p="http://schemas.openxmlformats.org/presentationml/2006/main" xmlns:r="http://schemas.openxmlformats.org/officeDocument/2006/relationships">
+<p:sld xmlns:a="http://schemas.openxmlformats.org/drawingml/2006/main" xmlns:r="http://schemas.openxmlformats.org/officeDocument/2006/relationships" xmlns:p="http://schemas.openxmlformats.org/presentationml/2006/main">
   <p:cSld>
     <p:spTree>
       <p:nvGrpSpPr>
@@ -3349,7 +3348,14 @@
         <p:cNvGrpSpPr/>
         <p:nvPr/>
       </p:nvGrpSpPr>
-      <p:grpSpPr/>
+      <p:grpSpPr>
+        <a:xfrm>
+          <a:off x="0" y="0"/>
+          <a:ext cx="0" cy="0"/>
+          <a:chOff x="0" y="0"/>
+          <a:chExt cx="0" cy="0"/>
+        </a:xfrm>
+      </p:grpSpPr>
       <p:sp>
         <p:nvSpPr>
           <p:cNvPr id="2" name="Rectangle 1"/>
@@ -3390,6 +3396,7 @@
           <a:lstStyle/>
           <a:p>
             <a:pPr algn="ctr"/>
+            <a:endParaRPr/>
           </a:p>
         </p:txBody>
       </p:sp>
@@ -3433,6 +3440,7 @@
           <a:lstStyle/>
           <a:p>
             <a:pPr algn="ctr"/>
+            <a:endParaRPr/>
           </a:p>
         </p:txBody>
       </p:sp>
@@ -3476,6 +3484,7 @@
           <a:lstStyle/>
           <a:p>
             <a:pPr algn="ctr"/>
+            <a:endParaRPr/>
           </a:p>
         </p:txBody>
       </p:sp>
@@ -3522,8 +3531,8 @@
         </p:nvSpPr>
         <p:spPr>
           <a:xfrm>
-            <a:off x="10378440" y="6528816"/>
-            <a:ext cx="1371600" cy="292608"/>
+            <a:off x="10378440" y="6544315"/>
+            <a:ext cx="1371600" cy="261610"/>
           </a:xfrm>
           <a:prstGeom prst="rect">
             <a:avLst/>
@@ -3538,14 +3547,29 @@
           <a:p>
             <a:pPr algn="r"/>
             <a:r>
-              <a:rPr sz="1100" b="0">
+              <a:rPr sz="1100" b="0" dirty="0">
                 <a:solidFill>
                   <a:srgbClr val="FFFFFF"/>
                 </a:solidFill>
                 <a:latin typeface="Calibri"/>
               </a:rPr>
-              <a:t>10 / 18</a:t>
-            </a:r>
+              <a:t>10 / 1</a:t>
+            </a:r>
+            <a:r>
+              <a:rPr lang="es-419" sz="1100" b="0" dirty="0">
+                <a:solidFill>
+                  <a:srgbClr val="FFFFFF"/>
+                </a:solidFill>
+                <a:latin typeface="Calibri"/>
+              </a:rPr>
+              <a:t>3</a:t>
+            </a:r>
+            <a:endParaRPr sz="1100" b="0" dirty="0">
+              <a:solidFill>
+                <a:srgbClr val="FFFFFF"/>
+              </a:solidFill>
+              <a:latin typeface="Calibri"/>
+            </a:endParaRPr>
           </a:p>
         </p:txBody>
       </p:sp>
@@ -3624,6 +3648,7 @@
           <a:lstStyle/>
           <a:p>
             <a:pPr algn="ctr"/>
+            <a:endParaRPr/>
           </a:p>
         </p:txBody>
       </p:sp>
@@ -3730,7 +3755,7 @@
 </file>
 
 <file path=ppt/slides/slide11.xml><?xml version="1.0" encoding="utf-8"?>
-<p:sld xmlns:a="http://schemas.openxmlformats.org/drawingml/2006/main" xmlns:p="http://schemas.openxmlformats.org/presentationml/2006/main" xmlns:r="http://schemas.openxmlformats.org/officeDocument/2006/relationships">
+<p:sld xmlns:a="http://schemas.openxmlformats.org/drawingml/2006/main" xmlns:r="http://schemas.openxmlformats.org/officeDocument/2006/relationships" xmlns:p="http://schemas.openxmlformats.org/presentationml/2006/main">
   <p:cSld>
     <p:spTree>
       <p:nvGrpSpPr>
@@ -3738,7 +3763,14 @@
         <p:cNvGrpSpPr/>
         <p:nvPr/>
       </p:nvGrpSpPr>
-      <p:grpSpPr/>
+      <p:grpSpPr>
+        <a:xfrm>
+          <a:off x="0" y="0"/>
+          <a:ext cx="0" cy="0"/>
+          <a:chOff x="0" y="0"/>
+          <a:chExt cx="0" cy="0"/>
+        </a:xfrm>
+      </p:grpSpPr>
       <p:sp>
         <p:nvSpPr>
           <p:cNvPr id="2" name="Rectangle 1"/>
@@ -3779,6 +3811,7 @@
           <a:lstStyle/>
           <a:p>
             <a:pPr algn="ctr"/>
+            <a:endParaRPr/>
           </a:p>
         </p:txBody>
       </p:sp>
@@ -3822,6 +3855,7 @@
           <a:lstStyle/>
           <a:p>
             <a:pPr algn="ctr"/>
+            <a:endParaRPr/>
           </a:p>
         </p:txBody>
       </p:sp>
@@ -3865,6 +3899,7 @@
           <a:lstStyle/>
           <a:p>
             <a:pPr algn="ctr"/>
+            <a:endParaRPr/>
           </a:p>
         </p:txBody>
       </p:sp>
@@ -3911,8 +3946,8 @@
         </p:nvSpPr>
         <p:spPr>
           <a:xfrm>
-            <a:off x="10378440" y="6528816"/>
-            <a:ext cx="1371600" cy="292608"/>
+            <a:off x="10378440" y="6544315"/>
+            <a:ext cx="1371600" cy="261610"/>
           </a:xfrm>
           <a:prstGeom prst="rect">
             <a:avLst/>
@@ -3927,14 +3962,29 @@
           <a:p>
             <a:pPr algn="r"/>
             <a:r>
-              <a:rPr sz="1100" b="0">
+              <a:rPr sz="1100" b="0" dirty="0">
                 <a:solidFill>
                   <a:srgbClr val="FFFFFF"/>
                 </a:solidFill>
                 <a:latin typeface="Calibri"/>
               </a:rPr>
-              <a:t>11 / 18</a:t>
-            </a:r>
+              <a:t>11 / 1</a:t>
+            </a:r>
+            <a:r>
+              <a:rPr lang="es-419" sz="1100" b="0" dirty="0">
+                <a:solidFill>
+                  <a:srgbClr val="FFFFFF"/>
+                </a:solidFill>
+                <a:latin typeface="Calibri"/>
+              </a:rPr>
+              <a:t>3</a:t>
+            </a:r>
+            <a:endParaRPr sz="1100" b="0" dirty="0">
+              <a:solidFill>
+                <a:srgbClr val="FFFFFF"/>
+              </a:solidFill>
+              <a:latin typeface="Calibri"/>
+            </a:endParaRPr>
           </a:p>
         </p:txBody>
       </p:sp>
@@ -4013,6 +4063,7 @@
           <a:lstStyle/>
           <a:p>
             <a:pPr algn="ctr"/>
+            <a:endParaRPr/>
           </a:p>
         </p:txBody>
       </p:sp>
@@ -4119,6 +4170,7 @@
           <a:lstStyle/>
           <a:p>
             <a:pPr algn="ctr"/>
+            <a:endParaRPr/>
           </a:p>
         </p:txBody>
       </p:sp>
@@ -4234,7 +4286,7 @@
 </file>
 
 <file path=ppt/slides/slide12.xml><?xml version="1.0" encoding="utf-8"?>
-<p:sld xmlns:a="http://schemas.openxmlformats.org/drawingml/2006/main" xmlns:p="http://schemas.openxmlformats.org/presentationml/2006/main" xmlns:r="http://schemas.openxmlformats.org/officeDocument/2006/relationships">
+<p:sld xmlns:a="http://schemas.openxmlformats.org/drawingml/2006/main" xmlns:r="http://schemas.openxmlformats.org/officeDocument/2006/relationships" xmlns:p="http://schemas.openxmlformats.org/presentationml/2006/main">
   <p:cSld>
     <p:spTree>
       <p:nvGrpSpPr>
@@ -4242,7 +4294,14 @@
         <p:cNvGrpSpPr/>
         <p:nvPr/>
       </p:nvGrpSpPr>
-      <p:grpSpPr/>
+      <p:grpSpPr>
+        <a:xfrm>
+          <a:off x="0" y="0"/>
+          <a:ext cx="0" cy="0"/>
+          <a:chOff x="0" y="0"/>
+          <a:chExt cx="0" cy="0"/>
+        </a:xfrm>
+      </p:grpSpPr>
       <p:sp>
         <p:nvSpPr>
           <p:cNvPr id="2" name="Rectangle 1"/>
@@ -4283,6 +4342,7 @@
           <a:lstStyle/>
           <a:p>
             <a:pPr algn="ctr"/>
+            <a:endParaRPr/>
           </a:p>
         </p:txBody>
       </p:sp>
@@ -4326,6 +4386,7 @@
           <a:lstStyle/>
           <a:p>
             <a:pPr algn="ctr"/>
+            <a:endParaRPr/>
           </a:p>
         </p:txBody>
       </p:sp>
@@ -4369,6 +4430,7 @@
           <a:lstStyle/>
           <a:p>
             <a:pPr algn="ctr"/>
+            <a:endParaRPr/>
           </a:p>
         </p:txBody>
       </p:sp>
@@ -4415,8 +4477,8 @@
         </p:nvSpPr>
         <p:spPr>
           <a:xfrm>
-            <a:off x="10378440" y="6528816"/>
-            <a:ext cx="1371600" cy="292608"/>
+            <a:off x="10378440" y="6544315"/>
+            <a:ext cx="1371600" cy="261610"/>
           </a:xfrm>
           <a:prstGeom prst="rect">
             <a:avLst/>
@@ -4431,14 +4493,29 @@
           <a:p>
             <a:pPr algn="r"/>
             <a:r>
-              <a:rPr sz="1100" b="0">
+              <a:rPr sz="1100" b="0" dirty="0">
                 <a:solidFill>
                   <a:srgbClr val="FFFFFF"/>
                 </a:solidFill>
                 <a:latin typeface="Calibri"/>
               </a:rPr>
-              <a:t>12 / 18</a:t>
-            </a:r>
+              <a:t>12 / 1</a:t>
+            </a:r>
+            <a:r>
+              <a:rPr lang="es-419" sz="1100" b="0" dirty="0">
+                <a:solidFill>
+                  <a:srgbClr val="FFFFFF"/>
+                </a:solidFill>
+                <a:latin typeface="Calibri"/>
+              </a:rPr>
+              <a:t>3</a:t>
+            </a:r>
+            <a:endParaRPr sz="1100" b="0" dirty="0">
+              <a:solidFill>
+                <a:srgbClr val="FFFFFF"/>
+              </a:solidFill>
+              <a:latin typeface="Calibri"/>
+            </a:endParaRPr>
           </a:p>
         </p:txBody>
       </p:sp>
@@ -4517,6 +4594,7 @@
           <a:lstStyle/>
           <a:p>
             <a:pPr algn="ctr"/>
+            <a:endParaRPr/>
           </a:p>
         </p:txBody>
       </p:sp>
@@ -4623,6 +4701,7 @@
           <a:lstStyle/>
           <a:p>
             <a:pPr algn="ctr"/>
+            <a:endParaRPr/>
           </a:p>
         </p:txBody>
       </p:sp>
@@ -4882,7 +4961,7 @@
 </file>
 
 <file path=ppt/slides/slide13.xml><?xml version="1.0" encoding="utf-8"?>
-<p:sld xmlns:a="http://schemas.openxmlformats.org/drawingml/2006/main" xmlns:p="http://schemas.openxmlformats.org/presentationml/2006/main" xmlns:r="http://schemas.openxmlformats.org/officeDocument/2006/relationships">
+<p:sld xmlns:a="http://schemas.openxmlformats.org/drawingml/2006/main" xmlns:r="http://schemas.openxmlformats.org/officeDocument/2006/relationships" xmlns:p="http://schemas.openxmlformats.org/presentationml/2006/main">
   <p:cSld>
     <p:spTree>
       <p:nvGrpSpPr>
@@ -4890,7 +4969,14 @@
         <p:cNvGrpSpPr/>
         <p:nvPr/>
       </p:nvGrpSpPr>
-      <p:grpSpPr/>
+      <p:grpSpPr>
+        <a:xfrm>
+          <a:off x="0" y="0"/>
+          <a:ext cx="0" cy="0"/>
+          <a:chOff x="0" y="0"/>
+          <a:chExt cx="0" cy="0"/>
+        </a:xfrm>
+      </p:grpSpPr>
       <p:sp>
         <p:nvSpPr>
           <p:cNvPr id="2" name="Rectangle 1"/>
@@ -4931,6 +5017,7 @@
           <a:lstStyle/>
           <a:p>
             <a:pPr algn="ctr"/>
+            <a:endParaRPr/>
           </a:p>
         </p:txBody>
       </p:sp>
@@ -4974,6 +5061,7 @@
           <a:lstStyle/>
           <a:p>
             <a:pPr algn="ctr"/>
+            <a:endParaRPr/>
           </a:p>
         </p:txBody>
       </p:sp>
@@ -5017,6 +5105,7 @@
           <a:lstStyle/>
           <a:p>
             <a:pPr algn="ctr"/>
+            <a:endParaRPr/>
           </a:p>
         </p:txBody>
       </p:sp>
@@ -5063,8 +5152,8 @@
         </p:nvSpPr>
         <p:spPr>
           <a:xfrm>
-            <a:off x="10378440" y="6528816"/>
-            <a:ext cx="1371600" cy="292608"/>
+            <a:off x="10378440" y="6544315"/>
+            <a:ext cx="1371600" cy="261610"/>
           </a:xfrm>
           <a:prstGeom prst="rect">
             <a:avLst/>
@@ -5079,14 +5168,47 @@
           <a:p>
             <a:pPr algn="r"/>
             <a:r>
-              <a:rPr sz="1100" b="0">
+              <a:rPr sz="1100" b="0" dirty="0">
                 <a:solidFill>
                   <a:srgbClr val="FFFFFF"/>
                 </a:solidFill>
                 <a:latin typeface="Calibri"/>
               </a:rPr>
-              <a:t>13 / 18</a:t>
-            </a:r>
+              <a:t>1</a:t>
+            </a:r>
+            <a:r>
+              <a:rPr lang="es-419" sz="1100" b="0" dirty="0">
+                <a:solidFill>
+                  <a:srgbClr val="FFFFFF"/>
+                </a:solidFill>
+                <a:latin typeface="Calibri"/>
+              </a:rPr>
+              <a:t>3</a:t>
+            </a:r>
+            <a:r>
+              <a:rPr sz="1100" b="0" dirty="0">
+                <a:solidFill>
+                  <a:srgbClr val="FFFFFF"/>
+                </a:solidFill>
+                <a:latin typeface="Calibri"/>
+              </a:rPr>
+              <a:t> / 1</a:t>
+            </a:r>
+            <a:r>
+              <a:rPr lang="es-419" sz="1100" dirty="0">
+                <a:solidFill>
+                  <a:srgbClr val="FFFFFF"/>
+                </a:solidFill>
+                <a:latin typeface="Calibri"/>
+              </a:rPr>
+              <a:t>3</a:t>
+            </a:r>
+            <a:endParaRPr sz="1100" b="0" dirty="0">
+              <a:solidFill>
+                <a:srgbClr val="FFFFFF"/>
+              </a:solidFill>
+              <a:latin typeface="Calibri"/>
+            </a:endParaRPr>
           </a:p>
         </p:txBody>
       </p:sp>
@@ -5120,7 +5242,7 @@
                 </a:solidFill>
                 <a:latin typeface="Calibri"/>
               </a:rPr>
-              <a:t>Sobel a mano en el escalón</a:t>
+              <a:t>De magnitud a «sí / no»</a:t>
             </a:r>
           </a:p>
         </p:txBody>
@@ -5165,6 +5287,7 @@
           <a:lstStyle/>
           <a:p>
             <a:pPr algn="ctr"/>
+            <a:endParaRPr/>
           </a:p>
         </p:txBody>
       </p:sp>
@@ -5198,21 +5321,45 @@
                 </a:solidFill>
                 <a:latin typeface="Calibri"/>
               </a:rPr>
-              <a:t>Mismo I de la media. Gx en el centro del salto (fila 2, col 2)</a:t>
-            </a:r>
-          </a:p>
-        </p:txBody>
-      </p:sp>
-      <p:sp>
-        <p:nvSpPr>
-          <p:cNvPr id="10" name="Rounded Rectangle 9"/>
+              <a:t>Un umbral τ: si la magnitud de Sobel supera τ, marcamos borde. Demasiado bajo = ruido; demasiado alto = agujeros</a:t>
+            </a:r>
+          </a:p>
+        </p:txBody>
+      </p:sp>
+      <p:pic>
+        <p:nvPicPr>
+          <p:cNvPr id="10" name="Picture 9" descr="thresh.png"/>
+          <p:cNvPicPr>
+            <a:picLocks noChangeAspect="1"/>
+          </p:cNvPicPr>
+          <p:nvPr/>
+        </p:nvPicPr>
+        <p:blipFill>
+          <a:blip r:embed="rId2"/>
+          <a:stretch>
+            <a:fillRect/>
+          </a:stretch>
+        </p:blipFill>
+        <p:spPr>
+          <a:xfrm>
+            <a:off x="411480" y="1298448"/>
+            <a:ext cx="4507090" cy="4754880"/>
+          </a:xfrm>
+          <a:prstGeom prst="rect">
+            <a:avLst/>
+          </a:prstGeom>
+        </p:spPr>
+      </p:pic>
+      <p:sp>
+        <p:nvSpPr>
+          <p:cNvPr id="11" name="Rounded Rectangle 10"/>
           <p:cNvSpPr/>
           <p:nvPr/>
         </p:nvSpPr>
         <p:spPr>
           <a:xfrm>
-            <a:off x="502920" y="1353312"/>
-            <a:ext cx="11155680" cy="2148840"/>
+            <a:off x="6263640" y="1371600"/>
+            <a:ext cx="5349240" cy="4663440"/>
           </a:xfrm>
           <a:prstGeom prst="roundRect">
             <a:avLst>
@@ -5247,795 +5394,7 @@
           <a:lstStyle/>
           <a:p>
             <a:pPr algn="ctr"/>
-          </a:p>
-        </p:txBody>
-      </p:sp>
-      <p:sp>
-        <p:nvSpPr>
-          <p:cNvPr id="11" name="TextBox 10"/>
-          <p:cNvSpPr txBox="1"/>
-          <p:nvPr/>
-        </p:nvSpPr>
-        <p:spPr>
-          <a:xfrm>
-            <a:off x="731520" y="1508760"/>
-            <a:ext cx="10698480" cy="1874519"/>
-          </a:xfrm>
-          <a:prstGeom prst="rect">
-            <a:avLst/>
-          </a:prstGeom>
-          <a:noFill/>
-        </p:spPr>
-        <p:txBody>
-          <a:bodyPr wrap="square" anchor="ctr">
-            <a:spAutoFit/>
-          </a:bodyPr>
-          <a:lstStyle/>
-          <a:p>
-            <a:pPr algn="ctr"/>
-            <a:r>
-              <a:rPr sz="1800" b="1">
-                <a:solidFill>
-                  <a:srgbClr val="0F2C59"/>
-                </a:solidFill>
-                <a:latin typeface="Calibri"/>
-              </a:rPr>
-              <a:t>vecindario:   0 0 9     Gx:  (−1)(0)+(0)(0)+(+1)(9)
-              0 0 9          +(−2)(0)+(0)(0)+(+2)(9)
-              0 0 9          +(−1)(0)+(0)(0)+(+1)(9)   =  9+18+9  =  36</a:t>
-            </a:r>
-          </a:p>
-        </p:txBody>
-      </p:sp>
-      <p:sp>
-        <p:nvSpPr>
-          <p:cNvPr id="12" name="Rounded Rectangle 11"/>
-          <p:cNvSpPr/>
-          <p:nvPr/>
-        </p:nvSpPr>
-        <p:spPr>
-          <a:xfrm>
-            <a:off x="502920" y="3703320"/>
-            <a:ext cx="3611880" cy="2331720"/>
-          </a:xfrm>
-          <a:prstGeom prst="roundRect">
-            <a:avLst>
-              <a:gd name="adj" fmla="val 10000"/>
-            </a:avLst>
-          </a:prstGeom>
-          <a:solidFill>
-            <a:srgbClr val="F6F8FB"/>
-          </a:solidFill>
-          <a:ln w="15875">
-            <a:solidFill>
-              <a:srgbClr val="D5DEE8"/>
-            </a:solidFill>
-          </a:ln>
-        </p:spPr>
-        <p:style>
-          <a:lnRef idx="1">
-            <a:schemeClr val="accent1"/>
-          </a:lnRef>
-          <a:fillRef idx="3">
-            <a:schemeClr val="accent1"/>
-          </a:fillRef>
-          <a:effectRef idx="2">
-            <a:schemeClr val="accent1"/>
-          </a:effectRef>
-          <a:fontRef idx="minor">
-            <a:schemeClr val="lt1"/>
-          </a:fontRef>
-        </p:style>
-        <p:txBody>
-          <a:bodyPr rtlCol="0" anchor="ctr"/>
-          <a:lstStyle/>
-          <a:p>
-            <a:pPr algn="ctr"/>
-          </a:p>
-        </p:txBody>
-      </p:sp>
-      <p:sp>
-        <p:nvSpPr>
-          <p:cNvPr id="13" name="TextBox 12"/>
-          <p:cNvSpPr txBox="1"/>
-          <p:nvPr/>
-        </p:nvSpPr>
-        <p:spPr>
-          <a:xfrm>
-            <a:off x="704088" y="3886200"/>
-            <a:ext cx="3200400" cy="411480"/>
-          </a:xfrm>
-          <a:prstGeom prst="rect">
-            <a:avLst/>
-          </a:prstGeom>
-          <a:noFill/>
-        </p:spPr>
-        <p:txBody>
-          <a:bodyPr wrap="square" anchor="t">
-            <a:spAutoFit/>
-          </a:bodyPr>
-          <a:lstStyle/>
-          <a:p>
-            <a:pPr algn="l"/>
-            <a:r>
-              <a:rPr sz="1800" b="1">
-                <a:solidFill>
-                  <a:srgbClr val="0F2C59"/>
-                </a:solidFill>
-                <a:latin typeface="Calibri"/>
-              </a:rPr>
-              <a:t>Dentro del 0</a:t>
-            </a:r>
-          </a:p>
-        </p:txBody>
-      </p:sp>
-      <p:sp>
-        <p:nvSpPr>
-          <p:cNvPr id="14" name="TextBox 13"/>
-          <p:cNvSpPr txBox="1"/>
-          <p:nvPr/>
-        </p:nvSpPr>
-        <p:spPr>
-          <a:xfrm>
-            <a:off x="704088" y="4389120"/>
-            <a:ext cx="3200400" cy="1371600"/>
-          </a:xfrm>
-          <a:prstGeom prst="rect">
-            <a:avLst/>
-          </a:prstGeom>
-          <a:noFill/>
-        </p:spPr>
-        <p:txBody>
-          <a:bodyPr wrap="square" anchor="t">
-            <a:spAutoFit/>
-          </a:bodyPr>
-          <a:lstStyle/>
-          <a:p>
-            <a:pPr algn="l"/>
-            <a:r>
-              <a:rPr sz="1500" b="0">
-                <a:solidFill>
-                  <a:srgbClr val="2C3E50"/>
-                </a:solidFill>
-                <a:latin typeface="Calibri"/>
-              </a:rPr>
-              <a:t>El vecindario es todo 0. Gx = 0. No hay borde.</a:t>
-            </a:r>
-          </a:p>
-        </p:txBody>
-      </p:sp>
-      <p:sp>
-        <p:nvSpPr>
-          <p:cNvPr id="15" name="Rounded Rectangle 14"/>
-          <p:cNvSpPr/>
-          <p:nvPr/>
-        </p:nvSpPr>
-        <p:spPr>
-          <a:xfrm>
-            <a:off x="4343400" y="3703320"/>
-            <a:ext cx="3611880" cy="2331720"/>
-          </a:xfrm>
-          <a:prstGeom prst="roundRect">
-            <a:avLst>
-              <a:gd name="adj" fmla="val 10000"/>
-            </a:avLst>
-          </a:prstGeom>
-          <a:solidFill>
-            <a:srgbClr val="F6F8FB"/>
-          </a:solidFill>
-          <a:ln w="15875">
-            <a:solidFill>
-              <a:srgbClr val="D5DEE8"/>
-            </a:solidFill>
-          </a:ln>
-        </p:spPr>
-        <p:style>
-          <a:lnRef idx="1">
-            <a:schemeClr val="accent1"/>
-          </a:lnRef>
-          <a:fillRef idx="3">
-            <a:schemeClr val="accent1"/>
-          </a:fillRef>
-          <a:effectRef idx="2">
-            <a:schemeClr val="accent1"/>
-          </a:effectRef>
-          <a:fontRef idx="minor">
-            <a:schemeClr val="lt1"/>
-          </a:fontRef>
-        </p:style>
-        <p:txBody>
-          <a:bodyPr rtlCol="0" anchor="ctr"/>
-          <a:lstStyle/>
-          <a:p>
-            <a:pPr algn="ctr"/>
-          </a:p>
-        </p:txBody>
-      </p:sp>
-      <p:sp>
-        <p:nvSpPr>
-          <p:cNvPr id="16" name="TextBox 15"/>
-          <p:cNvSpPr txBox="1"/>
-          <p:nvPr/>
-        </p:nvSpPr>
-        <p:spPr>
-          <a:xfrm>
-            <a:off x="4544568" y="3886200"/>
-            <a:ext cx="3200400" cy="411480"/>
-          </a:xfrm>
-          <a:prstGeom prst="rect">
-            <a:avLst/>
-          </a:prstGeom>
-          <a:noFill/>
-        </p:spPr>
-        <p:txBody>
-          <a:bodyPr wrap="square" anchor="t">
-            <a:spAutoFit/>
-          </a:bodyPr>
-          <a:lstStyle/>
-          <a:p>
-            <a:pPr algn="l"/>
-            <a:r>
-              <a:rPr sz="1800" b="1">
-                <a:solidFill>
-                  <a:srgbClr val="0F2C59"/>
-                </a:solidFill>
-                <a:latin typeface="Calibri"/>
-              </a:rPr>
-              <a:t>En el salto</a:t>
-            </a:r>
-          </a:p>
-        </p:txBody>
-      </p:sp>
-      <p:sp>
-        <p:nvSpPr>
-          <p:cNvPr id="17" name="TextBox 16"/>
-          <p:cNvSpPr txBox="1"/>
-          <p:nvPr/>
-        </p:nvSpPr>
-        <p:spPr>
-          <a:xfrm>
-            <a:off x="4544568" y="4389120"/>
-            <a:ext cx="3200400" cy="1371600"/>
-          </a:xfrm>
-          <a:prstGeom prst="rect">
-            <a:avLst/>
-          </a:prstGeom>
-          <a:noFill/>
-        </p:spPr>
-        <p:txBody>
-          <a:bodyPr wrap="square" anchor="t">
-            <a:spAutoFit/>
-          </a:bodyPr>
-          <a:lstStyle/>
-          <a:p>
-            <a:pPr algn="l"/>
-            <a:r>
-              <a:rPr sz="1500" b="0">
-                <a:solidFill>
-                  <a:srgbClr val="2C3E50"/>
-                </a:solidFill>
-                <a:latin typeface="Calibri"/>
-              </a:rPr>
-              <a:t>Gx = 36 (grande). El detector «ve» la pared vertical.</a:t>
-            </a:r>
-          </a:p>
-        </p:txBody>
-      </p:sp>
-      <p:sp>
-        <p:nvSpPr>
-          <p:cNvPr id="18" name="Rounded Rectangle 17"/>
-          <p:cNvSpPr/>
-          <p:nvPr/>
-        </p:nvSpPr>
-        <p:spPr>
-          <a:xfrm>
-            <a:off x="8183880" y="3703320"/>
-            <a:ext cx="3611880" cy="2331720"/>
-          </a:xfrm>
-          <a:prstGeom prst="roundRect">
-            <a:avLst>
-              <a:gd name="adj" fmla="val 10000"/>
-            </a:avLst>
-          </a:prstGeom>
-          <a:solidFill>
-            <a:srgbClr val="F6F8FB"/>
-          </a:solidFill>
-          <a:ln w="15875">
-            <a:solidFill>
-              <a:srgbClr val="D5DEE8"/>
-            </a:solidFill>
-          </a:ln>
-        </p:spPr>
-        <p:style>
-          <a:lnRef idx="1">
-            <a:schemeClr val="accent1"/>
-          </a:lnRef>
-          <a:fillRef idx="3">
-            <a:schemeClr val="accent1"/>
-          </a:fillRef>
-          <a:effectRef idx="2">
-            <a:schemeClr val="accent1"/>
-          </a:effectRef>
-          <a:fontRef idx="minor">
-            <a:schemeClr val="lt1"/>
-          </a:fontRef>
-        </p:style>
-        <p:txBody>
-          <a:bodyPr rtlCol="0" anchor="ctr"/>
-          <a:lstStyle/>
-          <a:p>
-            <a:pPr algn="ctr"/>
-          </a:p>
-        </p:txBody>
-      </p:sp>
-      <p:sp>
-        <p:nvSpPr>
-          <p:cNvPr id="19" name="TextBox 18"/>
-          <p:cNvSpPr txBox="1"/>
-          <p:nvPr/>
-        </p:nvSpPr>
-        <p:spPr>
-          <a:xfrm>
-            <a:off x="8385048" y="3886200"/>
-            <a:ext cx="3200400" cy="411480"/>
-          </a:xfrm>
-          <a:prstGeom prst="rect">
-            <a:avLst/>
-          </a:prstGeom>
-          <a:noFill/>
-        </p:spPr>
-        <p:txBody>
-          <a:bodyPr wrap="square" anchor="t">
-            <a:spAutoFit/>
-          </a:bodyPr>
-          <a:lstStyle/>
-          <a:p>
-            <a:pPr algn="l"/>
-            <a:r>
-              <a:rPr sz="1800" b="1">
-                <a:solidFill>
-                  <a:srgbClr val="0F2C59"/>
-                </a:solidFill>
-                <a:latin typeface="Calibri"/>
-              </a:rPr>
-              <a:t>Gy aquí</a:t>
-            </a:r>
-          </a:p>
-        </p:txBody>
-      </p:sp>
-      <p:sp>
-        <p:nvSpPr>
-          <p:cNvPr id="20" name="TextBox 19"/>
-          <p:cNvSpPr txBox="1"/>
-          <p:nvPr/>
-        </p:nvSpPr>
-        <p:spPr>
-          <a:xfrm>
-            <a:off x="8385048" y="4389120"/>
-            <a:ext cx="3200400" cy="1371600"/>
-          </a:xfrm>
-          <a:prstGeom prst="rect">
-            <a:avLst/>
-          </a:prstGeom>
-          <a:noFill/>
-        </p:spPr>
-        <p:txBody>
-          <a:bodyPr wrap="square" anchor="t">
-            <a:spAutoFit/>
-          </a:bodyPr>
-          <a:lstStyle/>
-          <a:p>
-            <a:pPr algn="l"/>
-            <a:r>
-              <a:rPr sz="1500" b="0">
-                <a:solidFill>
-                  <a:srgbClr val="2C3E50"/>
-                </a:solidFill>
-                <a:latin typeface="Calibri"/>
-              </a:rPr>
-              <a:t>Filas iguales: Gy = 0. El borde es vertical, no horizontal.</a:t>
-            </a:r>
-          </a:p>
-        </p:txBody>
-      </p:sp>
-    </p:spTree>
-  </p:cSld>
-  <p:clrMapOvr>
-    <a:masterClrMapping/>
-  </p:clrMapOvr>
-</p:sld>
-</file>
-
-<file path=ppt/slides/slide14.xml><?xml version="1.0" encoding="utf-8"?>
-<p:sld xmlns:a="http://schemas.openxmlformats.org/drawingml/2006/main" xmlns:p="http://schemas.openxmlformats.org/presentationml/2006/main" xmlns:r="http://schemas.openxmlformats.org/officeDocument/2006/relationships">
-  <p:cSld>
-    <p:spTree>
-      <p:nvGrpSpPr>
-        <p:cNvPr id="1" name=""/>
-        <p:cNvGrpSpPr/>
-        <p:nvPr/>
-      </p:nvGrpSpPr>
-      <p:grpSpPr/>
-      <p:sp>
-        <p:nvSpPr>
-          <p:cNvPr id="2" name="Rectangle 1"/>
-          <p:cNvSpPr/>
-          <p:nvPr/>
-        </p:nvSpPr>
-        <p:spPr>
-          <a:xfrm>
-            <a:off x="0" y="0"/>
-            <a:ext cx="12191999" cy="6858000"/>
-          </a:xfrm>
-          <a:prstGeom prst="rect">
-            <a:avLst/>
-          </a:prstGeom>
-          <a:solidFill>
-            <a:srgbClr val="FFFFFF"/>
-          </a:solidFill>
-          <a:ln>
-            <a:noFill/>
-          </a:ln>
-        </p:spPr>
-        <p:style>
-          <a:lnRef idx="1">
-            <a:schemeClr val="accent1"/>
-          </a:lnRef>
-          <a:fillRef idx="3">
-            <a:schemeClr val="accent1"/>
-          </a:fillRef>
-          <a:effectRef idx="2">
-            <a:schemeClr val="accent1"/>
-          </a:effectRef>
-          <a:fontRef idx="minor">
-            <a:schemeClr val="lt1"/>
-          </a:fontRef>
-        </p:style>
-        <p:txBody>
-          <a:bodyPr rtlCol="0" anchor="ctr"/>
-          <a:lstStyle/>
-          <a:p>
-            <a:pPr algn="ctr"/>
-          </a:p>
-        </p:txBody>
-      </p:sp>
-      <p:sp>
-        <p:nvSpPr>
-          <p:cNvPr id="3" name="Rectangle 2"/>
-          <p:cNvSpPr/>
-          <p:nvPr/>
-        </p:nvSpPr>
-        <p:spPr>
-          <a:xfrm>
-            <a:off x="0" y="0"/>
-            <a:ext cx="109728" cy="6858000"/>
-          </a:xfrm>
-          <a:prstGeom prst="rect">
-            <a:avLst/>
-          </a:prstGeom>
-          <a:solidFill>
-            <a:srgbClr val="E8B93A"/>
-          </a:solidFill>
-          <a:ln>
-            <a:noFill/>
-          </a:ln>
-        </p:spPr>
-        <p:style>
-          <a:lnRef idx="1">
-            <a:schemeClr val="accent1"/>
-          </a:lnRef>
-          <a:fillRef idx="3">
-            <a:schemeClr val="accent1"/>
-          </a:fillRef>
-          <a:effectRef idx="2">
-            <a:schemeClr val="accent1"/>
-          </a:effectRef>
-          <a:fontRef idx="minor">
-            <a:schemeClr val="lt1"/>
-          </a:fontRef>
-        </p:style>
-        <p:txBody>
-          <a:bodyPr rtlCol="0" anchor="ctr"/>
-          <a:lstStyle/>
-          <a:p>
-            <a:pPr algn="ctr"/>
-          </a:p>
-        </p:txBody>
-      </p:sp>
-      <p:sp>
-        <p:nvSpPr>
-          <p:cNvPr id="4" name="Rectangle 3"/>
-          <p:cNvSpPr/>
-          <p:nvPr/>
-        </p:nvSpPr>
-        <p:spPr>
-          <a:xfrm>
-            <a:off x="0" y="6510528"/>
-            <a:ext cx="12191999" cy="347472"/>
-          </a:xfrm>
-          <a:prstGeom prst="rect">
-            <a:avLst/>
-          </a:prstGeom>
-          <a:solidFill>
-            <a:srgbClr val="0F2C59"/>
-          </a:solidFill>
-          <a:ln>
-            <a:noFill/>
-          </a:ln>
-        </p:spPr>
-        <p:style>
-          <a:lnRef idx="1">
-            <a:schemeClr val="accent1"/>
-          </a:lnRef>
-          <a:fillRef idx="3">
-            <a:schemeClr val="accent1"/>
-          </a:fillRef>
-          <a:effectRef idx="2">
-            <a:schemeClr val="accent1"/>
-          </a:effectRef>
-          <a:fontRef idx="minor">
-            <a:schemeClr val="lt1"/>
-          </a:fontRef>
-        </p:style>
-        <p:txBody>
-          <a:bodyPr rtlCol="0" anchor="ctr"/>
-          <a:lstStyle/>
-          <a:p>
-            <a:pPr algn="ctr"/>
-          </a:p>
-        </p:txBody>
-      </p:sp>
-      <p:sp>
-        <p:nvSpPr>
-          <p:cNvPr id="5" name="TextBox 4"/>
-          <p:cNvSpPr txBox="1"/>
-          <p:nvPr/>
-        </p:nvSpPr>
-        <p:spPr>
-          <a:xfrm>
-            <a:off x="457200" y="6528816"/>
-            <a:ext cx="9144000" cy="292608"/>
-          </a:xfrm>
-          <a:prstGeom prst="rect">
-            <a:avLst/>
-          </a:prstGeom>
-          <a:noFill/>
-        </p:spPr>
-        <p:txBody>
-          <a:bodyPr wrap="square" anchor="ctr">
-            <a:spAutoFit/>
-          </a:bodyPr>
-          <a:lstStyle/>
-          <a:p>
-            <a:pPr algn="l"/>
-            <a:r>
-              <a:rPr sz="1100" b="0">
-                <a:solidFill>
-                  <a:srgbClr val="FFFFFF"/>
-                </a:solidFill>
-                <a:latin typeface="Calibri"/>
-              </a:rPr>
-              <a:t>Curso de Inteligencia Artificial  ·  Visión computacional</a:t>
-            </a:r>
-          </a:p>
-        </p:txBody>
-      </p:sp>
-      <p:sp>
-        <p:nvSpPr>
-          <p:cNvPr id="6" name="TextBox 5"/>
-          <p:cNvSpPr txBox="1"/>
-          <p:nvPr/>
-        </p:nvSpPr>
-        <p:spPr>
-          <a:xfrm>
-            <a:off x="10378440" y="6528816"/>
-            <a:ext cx="1371600" cy="292608"/>
-          </a:xfrm>
-          <a:prstGeom prst="rect">
-            <a:avLst/>
-          </a:prstGeom>
-          <a:noFill/>
-        </p:spPr>
-        <p:txBody>
-          <a:bodyPr wrap="square" anchor="ctr">
-            <a:spAutoFit/>
-          </a:bodyPr>
-          <a:lstStyle/>
-          <a:p>
-            <a:pPr algn="r"/>
-            <a:r>
-              <a:rPr sz="1100" b="0">
-                <a:solidFill>
-                  <a:srgbClr val="FFFFFF"/>
-                </a:solidFill>
-                <a:latin typeface="Calibri"/>
-              </a:rPr>
-              <a:t>14 / 18</a:t>
-            </a:r>
-          </a:p>
-        </p:txBody>
-      </p:sp>
-      <p:sp>
-        <p:nvSpPr>
-          <p:cNvPr id="7" name="TextBox 6"/>
-          <p:cNvSpPr txBox="1"/>
-          <p:nvPr/>
-        </p:nvSpPr>
-        <p:spPr>
-          <a:xfrm>
-            <a:off x="502920" y="256032"/>
-            <a:ext cx="11155680" cy="502920"/>
-          </a:xfrm>
-          <a:prstGeom prst="rect">
-            <a:avLst/>
-          </a:prstGeom>
-          <a:noFill/>
-        </p:spPr>
-        <p:txBody>
-          <a:bodyPr wrap="square" anchor="ctr">
-            <a:spAutoFit/>
-          </a:bodyPr>
-          <a:lstStyle/>
-          <a:p>
-            <a:pPr algn="l"/>
-            <a:r>
-              <a:rPr sz="2800" b="1">
-                <a:solidFill>
-                  <a:srgbClr val="0F2C59"/>
-                </a:solidFill>
-                <a:latin typeface="Calibri"/>
-              </a:rPr>
-              <a:t>De magnitud a «sí / no»</a:t>
-            </a:r>
-          </a:p>
-        </p:txBody>
-      </p:sp>
-      <p:sp>
-        <p:nvSpPr>
-          <p:cNvPr id="8" name="Rectangle 7"/>
-          <p:cNvSpPr/>
-          <p:nvPr/>
-        </p:nvSpPr>
-        <p:spPr>
-          <a:xfrm>
-            <a:off x="502920" y="804672"/>
-            <a:ext cx="1280160" cy="54864"/>
-          </a:xfrm>
-          <a:prstGeom prst="rect">
-            <a:avLst/>
-          </a:prstGeom>
-          <a:solidFill>
-            <a:srgbClr val="E8B93A"/>
-          </a:solidFill>
-          <a:ln>
-            <a:noFill/>
-          </a:ln>
-        </p:spPr>
-        <p:style>
-          <a:lnRef idx="1">
-            <a:schemeClr val="accent1"/>
-          </a:lnRef>
-          <a:fillRef idx="3">
-            <a:schemeClr val="accent1"/>
-          </a:fillRef>
-          <a:effectRef idx="2">
-            <a:schemeClr val="accent1"/>
-          </a:effectRef>
-          <a:fontRef idx="minor">
-            <a:schemeClr val="lt1"/>
-          </a:fontRef>
-        </p:style>
-        <p:txBody>
-          <a:bodyPr rtlCol="0" anchor="ctr"/>
-          <a:lstStyle/>
-          <a:p>
-            <a:pPr algn="ctr"/>
-          </a:p>
-        </p:txBody>
-      </p:sp>
-      <p:sp>
-        <p:nvSpPr>
-          <p:cNvPr id="9" name="TextBox 8"/>
-          <p:cNvSpPr txBox="1"/>
-          <p:nvPr/>
-        </p:nvSpPr>
-        <p:spPr>
-          <a:xfrm>
-            <a:off x="502920" y="932688"/>
-            <a:ext cx="11155680" cy="365760"/>
-          </a:xfrm>
-          <a:prstGeom prst="rect">
-            <a:avLst/>
-          </a:prstGeom>
-          <a:noFill/>
-        </p:spPr>
-        <p:txBody>
-          <a:bodyPr wrap="square" anchor="ctr">
-            <a:spAutoFit/>
-          </a:bodyPr>
-          <a:lstStyle/>
-          <a:p>
-            <a:pPr algn="l"/>
-            <a:r>
-              <a:rPr sz="1600" b="0">
-                <a:solidFill>
-                  <a:srgbClr val="5D6D7E"/>
-                </a:solidFill>
-                <a:latin typeface="Calibri"/>
-              </a:rPr>
-              <a:t>Un umbral τ: si la magnitud de Sobel supera τ, marcamos borde. Demasiado bajo = ruido; demasiado alto = agujeros</a:t>
-            </a:r>
-          </a:p>
-        </p:txBody>
-      </p:sp>
-      <p:pic>
-        <p:nvPicPr>
-          <p:cNvPr id="10" name="Picture 9" descr="thresh.png"/>
-          <p:cNvPicPr>
-            <a:picLocks noChangeAspect="1"/>
-          </p:cNvPicPr>
-          <p:nvPr/>
-        </p:nvPicPr>
-        <p:blipFill>
-          <a:blip r:embed="rId2"/>
-          <a:stretch>
-            <a:fillRect/>
-          </a:stretch>
-        </p:blipFill>
-        <p:spPr>
-          <a:xfrm>
-            <a:off x="411480" y="1298448"/>
-            <a:ext cx="4507090" cy="4754880"/>
-          </a:xfrm>
-          <a:prstGeom prst="rect">
-            <a:avLst/>
-          </a:prstGeom>
-        </p:spPr>
-      </p:pic>
-      <p:sp>
-        <p:nvSpPr>
-          <p:cNvPr id="11" name="Rounded Rectangle 10"/>
-          <p:cNvSpPr/>
-          <p:nvPr/>
-        </p:nvSpPr>
-        <p:spPr>
-          <a:xfrm>
-            <a:off x="6263640" y="1371600"/>
-            <a:ext cx="5349240" cy="4663440"/>
-          </a:xfrm>
-          <a:prstGeom prst="roundRect">
-            <a:avLst>
-              <a:gd name="adj" fmla="val 10000"/>
-            </a:avLst>
-          </a:prstGeom>
-          <a:solidFill>
-            <a:srgbClr val="F6F8FB"/>
-          </a:solidFill>
-          <a:ln w="15875">
-            <a:solidFill>
-              <a:srgbClr val="D5DEE8"/>
-            </a:solidFill>
-          </a:ln>
-        </p:spPr>
-        <p:style>
-          <a:lnRef idx="1">
-            <a:schemeClr val="accent1"/>
-          </a:lnRef>
-          <a:fillRef idx="3">
-            <a:schemeClr val="accent1"/>
-          </a:fillRef>
-          <a:effectRef idx="2">
-            <a:schemeClr val="accent1"/>
-          </a:effectRef>
-          <a:fontRef idx="minor">
-            <a:schemeClr val="lt1"/>
-          </a:fontRef>
-        </p:style>
-        <p:txBody>
-          <a:bodyPr rtlCol="0" anchor="ctr"/>
-          <a:lstStyle/>
-          <a:p>
-            <a:pPr algn="ctr"/>
+            <a:endParaRPr/>
           </a:p>
         </p:txBody>
       </p:sp>
@@ -6138,2744 +5497,6 @@
                 <a:latin typeface="Calibri"/>
               </a:rPr>
               <a:t>•  Con el contorno ya puedes medir tamaño, o buscar una forma.</a:t>
-            </a:r>
-          </a:p>
-        </p:txBody>
-      </p:sp>
-    </p:spTree>
-  </p:cSld>
-  <p:clrMapOvr>
-    <a:masterClrMapping/>
-  </p:clrMapOvr>
-</p:sld>
-</file>
-
-<file path=ppt/slides/slide15.xml><?xml version="1.0" encoding="utf-8"?>
-<p:sld xmlns:a="http://schemas.openxmlformats.org/drawingml/2006/main" xmlns:p="http://schemas.openxmlformats.org/presentationml/2006/main" xmlns:r="http://schemas.openxmlformats.org/officeDocument/2006/relationships">
-  <p:cSld>
-    <p:spTree>
-      <p:nvGrpSpPr>
-        <p:cNvPr id="1" name=""/>
-        <p:cNvGrpSpPr/>
-        <p:nvPr/>
-      </p:nvGrpSpPr>
-      <p:grpSpPr/>
-      <p:sp>
-        <p:nvSpPr>
-          <p:cNvPr id="2" name="Rectangle 1"/>
-          <p:cNvSpPr/>
-          <p:nvPr/>
-        </p:nvSpPr>
-        <p:spPr>
-          <a:xfrm>
-            <a:off x="0" y="0"/>
-            <a:ext cx="12191999" cy="6858000"/>
-          </a:xfrm>
-          <a:prstGeom prst="rect">
-            <a:avLst/>
-          </a:prstGeom>
-          <a:solidFill>
-            <a:srgbClr val="FFFFFF"/>
-          </a:solidFill>
-          <a:ln>
-            <a:noFill/>
-          </a:ln>
-        </p:spPr>
-        <p:style>
-          <a:lnRef idx="1">
-            <a:schemeClr val="accent1"/>
-          </a:lnRef>
-          <a:fillRef idx="3">
-            <a:schemeClr val="accent1"/>
-          </a:fillRef>
-          <a:effectRef idx="2">
-            <a:schemeClr val="accent1"/>
-          </a:effectRef>
-          <a:fontRef idx="minor">
-            <a:schemeClr val="lt1"/>
-          </a:fontRef>
-        </p:style>
-        <p:txBody>
-          <a:bodyPr rtlCol="0" anchor="ctr"/>
-          <a:lstStyle/>
-          <a:p>
-            <a:pPr algn="ctr"/>
-          </a:p>
-        </p:txBody>
-      </p:sp>
-      <p:sp>
-        <p:nvSpPr>
-          <p:cNvPr id="3" name="Rectangle 2"/>
-          <p:cNvSpPr/>
-          <p:nvPr/>
-        </p:nvSpPr>
-        <p:spPr>
-          <a:xfrm>
-            <a:off x="0" y="0"/>
-            <a:ext cx="109728" cy="6858000"/>
-          </a:xfrm>
-          <a:prstGeom prst="rect">
-            <a:avLst/>
-          </a:prstGeom>
-          <a:solidFill>
-            <a:srgbClr val="E8B93A"/>
-          </a:solidFill>
-          <a:ln>
-            <a:noFill/>
-          </a:ln>
-        </p:spPr>
-        <p:style>
-          <a:lnRef idx="1">
-            <a:schemeClr val="accent1"/>
-          </a:lnRef>
-          <a:fillRef idx="3">
-            <a:schemeClr val="accent1"/>
-          </a:fillRef>
-          <a:effectRef idx="2">
-            <a:schemeClr val="accent1"/>
-          </a:effectRef>
-          <a:fontRef idx="minor">
-            <a:schemeClr val="lt1"/>
-          </a:fontRef>
-        </p:style>
-        <p:txBody>
-          <a:bodyPr rtlCol="0" anchor="ctr"/>
-          <a:lstStyle/>
-          <a:p>
-            <a:pPr algn="ctr"/>
-          </a:p>
-        </p:txBody>
-      </p:sp>
-      <p:sp>
-        <p:nvSpPr>
-          <p:cNvPr id="4" name="Rectangle 3"/>
-          <p:cNvSpPr/>
-          <p:nvPr/>
-        </p:nvSpPr>
-        <p:spPr>
-          <a:xfrm>
-            <a:off x="0" y="6510528"/>
-            <a:ext cx="12191999" cy="347472"/>
-          </a:xfrm>
-          <a:prstGeom prst="rect">
-            <a:avLst/>
-          </a:prstGeom>
-          <a:solidFill>
-            <a:srgbClr val="0F2C59"/>
-          </a:solidFill>
-          <a:ln>
-            <a:noFill/>
-          </a:ln>
-        </p:spPr>
-        <p:style>
-          <a:lnRef idx="1">
-            <a:schemeClr val="accent1"/>
-          </a:lnRef>
-          <a:fillRef idx="3">
-            <a:schemeClr val="accent1"/>
-          </a:fillRef>
-          <a:effectRef idx="2">
-            <a:schemeClr val="accent1"/>
-          </a:effectRef>
-          <a:fontRef idx="minor">
-            <a:schemeClr val="lt1"/>
-          </a:fontRef>
-        </p:style>
-        <p:txBody>
-          <a:bodyPr rtlCol="0" anchor="ctr"/>
-          <a:lstStyle/>
-          <a:p>
-            <a:pPr algn="ctr"/>
-          </a:p>
-        </p:txBody>
-      </p:sp>
-      <p:sp>
-        <p:nvSpPr>
-          <p:cNvPr id="5" name="TextBox 4"/>
-          <p:cNvSpPr txBox="1"/>
-          <p:nvPr/>
-        </p:nvSpPr>
-        <p:spPr>
-          <a:xfrm>
-            <a:off x="457200" y="6528816"/>
-            <a:ext cx="9144000" cy="292608"/>
-          </a:xfrm>
-          <a:prstGeom prst="rect">
-            <a:avLst/>
-          </a:prstGeom>
-          <a:noFill/>
-        </p:spPr>
-        <p:txBody>
-          <a:bodyPr wrap="square" anchor="ctr">
-            <a:spAutoFit/>
-          </a:bodyPr>
-          <a:lstStyle/>
-          <a:p>
-            <a:pPr algn="l"/>
-            <a:r>
-              <a:rPr sz="1100" b="0">
-                <a:solidFill>
-                  <a:srgbClr val="FFFFFF"/>
-                </a:solidFill>
-                <a:latin typeface="Calibri"/>
-              </a:rPr>
-              <a:t>Curso de Inteligencia Artificial  ·  Visión computacional</a:t>
-            </a:r>
-          </a:p>
-        </p:txBody>
-      </p:sp>
-      <p:sp>
-        <p:nvSpPr>
-          <p:cNvPr id="6" name="TextBox 5"/>
-          <p:cNvSpPr txBox="1"/>
-          <p:nvPr/>
-        </p:nvSpPr>
-        <p:spPr>
-          <a:xfrm>
-            <a:off x="10378440" y="6528816"/>
-            <a:ext cx="1371600" cy="292608"/>
-          </a:xfrm>
-          <a:prstGeom prst="rect">
-            <a:avLst/>
-          </a:prstGeom>
-          <a:noFill/>
-        </p:spPr>
-        <p:txBody>
-          <a:bodyPr wrap="square" anchor="ctr">
-            <a:spAutoFit/>
-          </a:bodyPr>
-          <a:lstStyle/>
-          <a:p>
-            <a:pPr algn="r"/>
-            <a:r>
-              <a:rPr sz="1100" b="0">
-                <a:solidFill>
-                  <a:srgbClr val="FFFFFF"/>
-                </a:solidFill>
-                <a:latin typeface="Calibri"/>
-              </a:rPr>
-              <a:t>15 / 18</a:t>
-            </a:r>
-          </a:p>
-        </p:txBody>
-      </p:sp>
-      <p:sp>
-        <p:nvSpPr>
-          <p:cNvPr id="7" name="TextBox 6"/>
-          <p:cNvSpPr txBox="1"/>
-          <p:nvPr/>
-        </p:nvSpPr>
-        <p:spPr>
-          <a:xfrm>
-            <a:off x="502920" y="256032"/>
-            <a:ext cx="11155680" cy="502920"/>
-          </a:xfrm>
-          <a:prstGeom prst="rect">
-            <a:avLst/>
-          </a:prstGeom>
-          <a:noFill/>
-        </p:spPr>
-        <p:txBody>
-          <a:bodyPr wrap="square" anchor="ctr">
-            <a:spAutoFit/>
-          </a:bodyPr>
-          <a:lstStyle/>
-          <a:p>
-            <a:pPr algn="l"/>
-            <a:r>
-              <a:rPr sz="2800" b="1">
-                <a:solidFill>
-                  <a:srgbClr val="0F2C59"/>
-                </a:solidFill>
-                <a:latin typeface="Calibri"/>
-              </a:rPr>
-              <a:t>Reconocer, todavía sin redes</a:t>
-            </a:r>
-          </a:p>
-        </p:txBody>
-      </p:sp>
-      <p:sp>
-        <p:nvSpPr>
-          <p:cNvPr id="8" name="Rectangle 7"/>
-          <p:cNvSpPr/>
-          <p:nvPr/>
-        </p:nvSpPr>
-        <p:spPr>
-          <a:xfrm>
-            <a:off x="502920" y="804672"/>
-            <a:ext cx="1280160" cy="54864"/>
-          </a:xfrm>
-          <a:prstGeom prst="rect">
-            <a:avLst/>
-          </a:prstGeom>
-          <a:solidFill>
-            <a:srgbClr val="E8B93A"/>
-          </a:solidFill>
-          <a:ln>
-            <a:noFill/>
-          </a:ln>
-        </p:spPr>
-        <p:style>
-          <a:lnRef idx="1">
-            <a:schemeClr val="accent1"/>
-          </a:lnRef>
-          <a:fillRef idx="3">
-            <a:schemeClr val="accent1"/>
-          </a:fillRef>
-          <a:effectRef idx="2">
-            <a:schemeClr val="accent1"/>
-          </a:effectRef>
-          <a:fontRef idx="minor">
-            <a:schemeClr val="lt1"/>
-          </a:fontRef>
-        </p:style>
-        <p:txBody>
-          <a:bodyPr rtlCol="0" anchor="ctr"/>
-          <a:lstStyle/>
-          <a:p>
-            <a:pPr algn="ctr"/>
-          </a:p>
-        </p:txBody>
-      </p:sp>
-      <p:sp>
-        <p:nvSpPr>
-          <p:cNvPr id="9" name="TextBox 8"/>
-          <p:cNvSpPr txBox="1"/>
-          <p:nvPr/>
-        </p:nvSpPr>
-        <p:spPr>
-          <a:xfrm>
-            <a:off x="502920" y="932688"/>
-            <a:ext cx="11155680" cy="365760"/>
-          </a:xfrm>
-          <a:prstGeom prst="rect">
-            <a:avLst/>
-          </a:prstGeom>
-          <a:noFill/>
-        </p:spPr>
-        <p:txBody>
-          <a:bodyPr wrap="square" anchor="ctr">
-            <a:spAutoFit/>
-          </a:bodyPr>
-          <a:lstStyle/>
-          <a:p>
-            <a:pPr algn="l"/>
-            <a:r>
-              <a:rPr sz="1600" b="0">
-                <a:solidFill>
-                  <a:srgbClr val="5D6D7E"/>
-                </a:solidFill>
-                <a:latin typeface="Calibri"/>
-              </a:rPr>
-              <a:t>Una vez tienes bordes o una plantilla, puedes comparar. Frágil, pero es el puente</a:t>
-            </a:r>
-          </a:p>
-        </p:txBody>
-      </p:sp>
-      <p:sp>
-        <p:nvSpPr>
-          <p:cNvPr id="10" name="Rounded Rectangle 9"/>
-          <p:cNvSpPr/>
-          <p:nvPr/>
-        </p:nvSpPr>
-        <p:spPr>
-          <a:xfrm>
-            <a:off x="502920" y="1417320"/>
-            <a:ext cx="3611880" cy="4617720"/>
-          </a:xfrm>
-          <a:prstGeom prst="roundRect">
-            <a:avLst>
-              <a:gd name="adj" fmla="val 10000"/>
-            </a:avLst>
-          </a:prstGeom>
-          <a:solidFill>
-            <a:srgbClr val="F6F8FB"/>
-          </a:solidFill>
-          <a:ln w="15875">
-            <a:solidFill>
-              <a:srgbClr val="D5DEE8"/>
-            </a:solidFill>
-          </a:ln>
-        </p:spPr>
-        <p:style>
-          <a:lnRef idx="1">
-            <a:schemeClr val="accent1"/>
-          </a:lnRef>
-          <a:fillRef idx="3">
-            <a:schemeClr val="accent1"/>
-          </a:fillRef>
-          <a:effectRef idx="2">
-            <a:schemeClr val="accent1"/>
-          </a:effectRef>
-          <a:fontRef idx="minor">
-            <a:schemeClr val="lt1"/>
-          </a:fontRef>
-        </p:style>
-        <p:txBody>
-          <a:bodyPr rtlCol="0" anchor="ctr"/>
-          <a:lstStyle/>
-          <a:p>
-            <a:pPr algn="ctr"/>
-          </a:p>
-        </p:txBody>
-      </p:sp>
-      <p:sp>
-        <p:nvSpPr>
-          <p:cNvPr id="11" name="TextBox 10"/>
-          <p:cNvSpPr txBox="1"/>
-          <p:nvPr/>
-        </p:nvSpPr>
-        <p:spPr>
-          <a:xfrm>
-            <a:off x="731520" y="1645920"/>
-            <a:ext cx="3154680" cy="822960"/>
-          </a:xfrm>
-          <a:prstGeom prst="rect">
-            <a:avLst/>
-          </a:prstGeom>
-          <a:noFill/>
-        </p:spPr>
-        <p:txBody>
-          <a:bodyPr wrap="square" anchor="t">
-            <a:spAutoFit/>
-          </a:bodyPr>
-          <a:lstStyle/>
-          <a:p>
-            <a:pPr algn="l"/>
-            <a:r>
-              <a:rPr sz="2000" b="1">
-                <a:solidFill>
-                  <a:srgbClr val="0F2C59"/>
-                </a:solidFill>
-                <a:latin typeface="Calibri"/>
-              </a:rPr>
-              <a:t>Plantilla</a:t>
-            </a:r>
-          </a:p>
-        </p:txBody>
-      </p:sp>
-      <p:sp>
-        <p:nvSpPr>
-          <p:cNvPr id="12" name="TextBox 11"/>
-          <p:cNvSpPr txBox="1"/>
-          <p:nvPr/>
-        </p:nvSpPr>
-        <p:spPr>
-          <a:xfrm>
-            <a:off x="731520" y="2606040"/>
-            <a:ext cx="3154680" cy="3108960"/>
-          </a:xfrm>
-          <a:prstGeom prst="rect">
-            <a:avLst/>
-          </a:prstGeom>
-          <a:noFill/>
-        </p:spPr>
-        <p:txBody>
-          <a:bodyPr wrap="square" anchor="t">
-            <a:spAutoFit/>
-          </a:bodyPr>
-          <a:lstStyle/>
-          <a:p>
-            <a:pPr algn="l"/>
-            <a:r>
-              <a:rPr sz="1600" b="0">
-                <a:solidFill>
-                  <a:srgbClr val="2C3E50"/>
-                </a:solidFill>
-                <a:latin typeface="Calibri"/>
-              </a:rPr>
-              <a:t>Deslizas un recorte de lo que buscas y mides parecido (correlación). Falla si cambia la escala, la luz o el ángulo.</a:t>
-            </a:r>
-          </a:p>
-        </p:txBody>
-      </p:sp>
-      <p:sp>
-        <p:nvSpPr>
-          <p:cNvPr id="13" name="Rounded Rectangle 12"/>
-          <p:cNvSpPr/>
-          <p:nvPr/>
-        </p:nvSpPr>
-        <p:spPr>
-          <a:xfrm>
-            <a:off x="4343400" y="1417320"/>
-            <a:ext cx="3611880" cy="4617720"/>
-          </a:xfrm>
-          <a:prstGeom prst="roundRect">
-            <a:avLst>
-              <a:gd name="adj" fmla="val 10000"/>
-            </a:avLst>
-          </a:prstGeom>
-          <a:solidFill>
-            <a:srgbClr val="F6F8FB"/>
-          </a:solidFill>
-          <a:ln w="15875">
-            <a:solidFill>
-              <a:srgbClr val="D5DEE8"/>
-            </a:solidFill>
-          </a:ln>
-        </p:spPr>
-        <p:style>
-          <a:lnRef idx="1">
-            <a:schemeClr val="accent1"/>
-          </a:lnRef>
-          <a:fillRef idx="3">
-            <a:schemeClr val="accent1"/>
-          </a:fillRef>
-          <a:effectRef idx="2">
-            <a:schemeClr val="accent1"/>
-          </a:effectRef>
-          <a:fontRef idx="minor">
-            <a:schemeClr val="lt1"/>
-          </a:fontRef>
-        </p:style>
-        <p:txBody>
-          <a:bodyPr rtlCol="0" anchor="ctr"/>
-          <a:lstStyle/>
-          <a:p>
-            <a:pPr algn="ctr"/>
-          </a:p>
-        </p:txBody>
-      </p:sp>
-      <p:sp>
-        <p:nvSpPr>
-          <p:cNvPr id="14" name="TextBox 13"/>
-          <p:cNvSpPr txBox="1"/>
-          <p:nvPr/>
-        </p:nvSpPr>
-        <p:spPr>
-          <a:xfrm>
-            <a:off x="4572000" y="1645920"/>
-            <a:ext cx="3154680" cy="822960"/>
-          </a:xfrm>
-          <a:prstGeom prst="rect">
-            <a:avLst/>
-          </a:prstGeom>
-          <a:noFill/>
-        </p:spPr>
-        <p:txBody>
-          <a:bodyPr wrap="square" anchor="t">
-            <a:spAutoFit/>
-          </a:bodyPr>
-          <a:lstStyle/>
-          <a:p>
-            <a:pPr algn="l"/>
-            <a:r>
-              <a:rPr sz="2000" b="1">
-                <a:solidFill>
-                  <a:srgbClr val="0F2C59"/>
-                </a:solidFill>
-                <a:latin typeface="Calibri"/>
-              </a:rPr>
-              <a:t>Forma del contorno</a:t>
-            </a:r>
-          </a:p>
-        </p:txBody>
-      </p:sp>
-      <p:sp>
-        <p:nvSpPr>
-          <p:cNvPr id="15" name="TextBox 14"/>
-          <p:cNvSpPr txBox="1"/>
-          <p:nvPr/>
-        </p:nvSpPr>
-        <p:spPr>
-          <a:xfrm>
-            <a:off x="4572000" y="2606040"/>
-            <a:ext cx="3154680" cy="3108960"/>
-          </a:xfrm>
-          <a:prstGeom prst="rect">
-            <a:avLst/>
-          </a:prstGeom>
-          <a:noFill/>
-        </p:spPr>
-        <p:txBody>
-          <a:bodyPr wrap="square" anchor="t">
-            <a:spAutoFit/>
-          </a:bodyPr>
-          <a:lstStyle/>
-          <a:p>
-            <a:pPr algn="l"/>
-            <a:r>
-              <a:rPr sz="1600" b="0">
-                <a:solidFill>
-                  <a:srgbClr val="2C3E50"/>
-                </a:solidFill>
-                <a:latin typeface="Calibri"/>
-              </a:rPr>
-              <a:t>Tras el umbral: ¿es un blob redondo o un rectángulo? Momentos, cajas, huecos. Sirve en piezas industriales fijas.</a:t>
-            </a:r>
-          </a:p>
-        </p:txBody>
-      </p:sp>
-      <p:sp>
-        <p:nvSpPr>
-          <p:cNvPr id="16" name="Rounded Rectangle 15"/>
-          <p:cNvSpPr/>
-          <p:nvPr/>
-        </p:nvSpPr>
-        <p:spPr>
-          <a:xfrm>
-            <a:off x="8183880" y="1417320"/>
-            <a:ext cx="3611880" cy="4617720"/>
-          </a:xfrm>
-          <a:prstGeom prst="roundRect">
-            <a:avLst>
-              <a:gd name="adj" fmla="val 10000"/>
-            </a:avLst>
-          </a:prstGeom>
-          <a:solidFill>
-            <a:srgbClr val="F6F8FB"/>
-          </a:solidFill>
-          <a:ln w="15875">
-            <a:solidFill>
-              <a:srgbClr val="D5DEE8"/>
-            </a:solidFill>
-          </a:ln>
-        </p:spPr>
-        <p:style>
-          <a:lnRef idx="1">
-            <a:schemeClr val="accent1"/>
-          </a:lnRef>
-          <a:fillRef idx="3">
-            <a:schemeClr val="accent1"/>
-          </a:fillRef>
-          <a:effectRef idx="2">
-            <a:schemeClr val="accent1"/>
-          </a:effectRef>
-          <a:fontRef idx="minor">
-            <a:schemeClr val="lt1"/>
-          </a:fontRef>
-        </p:style>
-        <p:txBody>
-          <a:bodyPr rtlCol="0" anchor="ctr"/>
-          <a:lstStyle/>
-          <a:p>
-            <a:pPr algn="ctr"/>
-          </a:p>
-        </p:txBody>
-      </p:sp>
-      <p:sp>
-        <p:nvSpPr>
-          <p:cNvPr id="17" name="TextBox 16"/>
-          <p:cNvSpPr txBox="1"/>
-          <p:nvPr/>
-        </p:nvSpPr>
-        <p:spPr>
-          <a:xfrm>
-            <a:off x="8412480" y="1645920"/>
-            <a:ext cx="3154680" cy="822960"/>
-          </a:xfrm>
-          <a:prstGeom prst="rect">
-            <a:avLst/>
-          </a:prstGeom>
-          <a:noFill/>
-        </p:spPr>
-        <p:txBody>
-          <a:bodyPr wrap="square" anchor="t">
-            <a:spAutoFit/>
-          </a:bodyPr>
-          <a:lstStyle/>
-          <a:p>
-            <a:pPr algn="l"/>
-            <a:r>
-              <a:rPr sz="2000" b="1">
-                <a:solidFill>
-                  <a:srgbClr val="0F2C59"/>
-                </a:solidFill>
-                <a:latin typeface="Calibri"/>
-              </a:rPr>
-              <a:t>Muchas vistas</a:t>
-            </a:r>
-          </a:p>
-        </p:txBody>
-      </p:sp>
-      <p:sp>
-        <p:nvSpPr>
-          <p:cNvPr id="18" name="TextBox 17"/>
-          <p:cNvSpPr txBox="1"/>
-          <p:nvPr/>
-        </p:nvSpPr>
-        <p:spPr>
-          <a:xfrm>
-            <a:off x="8412480" y="2606040"/>
-            <a:ext cx="3154680" cy="3108960"/>
-          </a:xfrm>
-          <a:prstGeom prst="rect">
-            <a:avLst/>
-          </a:prstGeom>
-          <a:noFill/>
-        </p:spPr>
-        <p:txBody>
-          <a:bodyPr wrap="square" anchor="t">
-            <a:spAutoFit/>
-          </a:bodyPr>
-          <a:lstStyle/>
-          <a:p>
-            <a:pPr algn="l"/>
-            <a:r>
-              <a:rPr sz="1600" b="0">
-                <a:solidFill>
-                  <a:srgbClr val="2C3E50"/>
-                </a:solidFill>
-                <a:latin typeface="Calibri"/>
-              </a:rPr>
-              <a:t>El mismo objeto cambia de I. Por eso una receta fija de kernels no cierra el problema de «¿es un gato?».</a:t>
-            </a:r>
-          </a:p>
-        </p:txBody>
-      </p:sp>
-    </p:spTree>
-  </p:cSld>
-  <p:clrMapOvr>
-    <a:masterClrMapping/>
-  </p:clrMapOvr>
-</p:sld>
-</file>
-
-<file path=ppt/slides/slide16.xml><?xml version="1.0" encoding="utf-8"?>
-<p:sld xmlns:a="http://schemas.openxmlformats.org/drawingml/2006/main" xmlns:p="http://schemas.openxmlformats.org/presentationml/2006/main" xmlns:r="http://schemas.openxmlformats.org/officeDocument/2006/relationships">
-  <p:cSld>
-    <p:spTree>
-      <p:nvGrpSpPr>
-        <p:cNvPr id="1" name=""/>
-        <p:cNvGrpSpPr/>
-        <p:nvPr/>
-      </p:nvGrpSpPr>
-      <p:grpSpPr/>
-      <p:sp>
-        <p:nvSpPr>
-          <p:cNvPr id="2" name="Rectangle 1"/>
-          <p:cNvSpPr/>
-          <p:nvPr/>
-        </p:nvSpPr>
-        <p:spPr>
-          <a:xfrm>
-            <a:off x="0" y="0"/>
-            <a:ext cx="12191999" cy="6858000"/>
-          </a:xfrm>
-          <a:prstGeom prst="rect">
-            <a:avLst/>
-          </a:prstGeom>
-          <a:solidFill>
-            <a:srgbClr val="FFFFFF"/>
-          </a:solidFill>
-          <a:ln>
-            <a:noFill/>
-          </a:ln>
-        </p:spPr>
-        <p:style>
-          <a:lnRef idx="1">
-            <a:schemeClr val="accent1"/>
-          </a:lnRef>
-          <a:fillRef idx="3">
-            <a:schemeClr val="accent1"/>
-          </a:fillRef>
-          <a:effectRef idx="2">
-            <a:schemeClr val="accent1"/>
-          </a:effectRef>
-          <a:fontRef idx="minor">
-            <a:schemeClr val="lt1"/>
-          </a:fontRef>
-        </p:style>
-        <p:txBody>
-          <a:bodyPr rtlCol="0" anchor="ctr"/>
-          <a:lstStyle/>
-          <a:p>
-            <a:pPr algn="ctr"/>
-          </a:p>
-        </p:txBody>
-      </p:sp>
-      <p:sp>
-        <p:nvSpPr>
-          <p:cNvPr id="3" name="Rectangle 2"/>
-          <p:cNvSpPr/>
-          <p:nvPr/>
-        </p:nvSpPr>
-        <p:spPr>
-          <a:xfrm>
-            <a:off x="0" y="0"/>
-            <a:ext cx="109728" cy="6858000"/>
-          </a:xfrm>
-          <a:prstGeom prst="rect">
-            <a:avLst/>
-          </a:prstGeom>
-          <a:solidFill>
-            <a:srgbClr val="E8B93A"/>
-          </a:solidFill>
-          <a:ln>
-            <a:noFill/>
-          </a:ln>
-        </p:spPr>
-        <p:style>
-          <a:lnRef idx="1">
-            <a:schemeClr val="accent1"/>
-          </a:lnRef>
-          <a:fillRef idx="3">
-            <a:schemeClr val="accent1"/>
-          </a:fillRef>
-          <a:effectRef idx="2">
-            <a:schemeClr val="accent1"/>
-          </a:effectRef>
-          <a:fontRef idx="minor">
-            <a:schemeClr val="lt1"/>
-          </a:fontRef>
-        </p:style>
-        <p:txBody>
-          <a:bodyPr rtlCol="0" anchor="ctr"/>
-          <a:lstStyle/>
-          <a:p>
-            <a:pPr algn="ctr"/>
-          </a:p>
-        </p:txBody>
-      </p:sp>
-      <p:sp>
-        <p:nvSpPr>
-          <p:cNvPr id="4" name="Rectangle 3"/>
-          <p:cNvSpPr/>
-          <p:nvPr/>
-        </p:nvSpPr>
-        <p:spPr>
-          <a:xfrm>
-            <a:off x="0" y="6510528"/>
-            <a:ext cx="12191999" cy="347472"/>
-          </a:xfrm>
-          <a:prstGeom prst="rect">
-            <a:avLst/>
-          </a:prstGeom>
-          <a:solidFill>
-            <a:srgbClr val="0F2C59"/>
-          </a:solidFill>
-          <a:ln>
-            <a:noFill/>
-          </a:ln>
-        </p:spPr>
-        <p:style>
-          <a:lnRef idx="1">
-            <a:schemeClr val="accent1"/>
-          </a:lnRef>
-          <a:fillRef idx="3">
-            <a:schemeClr val="accent1"/>
-          </a:fillRef>
-          <a:effectRef idx="2">
-            <a:schemeClr val="accent1"/>
-          </a:effectRef>
-          <a:fontRef idx="minor">
-            <a:schemeClr val="lt1"/>
-          </a:fontRef>
-        </p:style>
-        <p:txBody>
-          <a:bodyPr rtlCol="0" anchor="ctr"/>
-          <a:lstStyle/>
-          <a:p>
-            <a:pPr algn="ctr"/>
-          </a:p>
-        </p:txBody>
-      </p:sp>
-      <p:sp>
-        <p:nvSpPr>
-          <p:cNvPr id="5" name="TextBox 4"/>
-          <p:cNvSpPr txBox="1"/>
-          <p:nvPr/>
-        </p:nvSpPr>
-        <p:spPr>
-          <a:xfrm>
-            <a:off x="457200" y="6528816"/>
-            <a:ext cx="9144000" cy="292608"/>
-          </a:xfrm>
-          <a:prstGeom prst="rect">
-            <a:avLst/>
-          </a:prstGeom>
-          <a:noFill/>
-        </p:spPr>
-        <p:txBody>
-          <a:bodyPr wrap="square" anchor="ctr">
-            <a:spAutoFit/>
-          </a:bodyPr>
-          <a:lstStyle/>
-          <a:p>
-            <a:pPr algn="l"/>
-            <a:r>
-              <a:rPr sz="1100" b="0">
-                <a:solidFill>
-                  <a:srgbClr val="FFFFFF"/>
-                </a:solidFill>
-                <a:latin typeface="Calibri"/>
-              </a:rPr>
-              <a:t>Curso de Inteligencia Artificial  ·  Visión computacional</a:t>
-            </a:r>
-          </a:p>
-        </p:txBody>
-      </p:sp>
-      <p:sp>
-        <p:nvSpPr>
-          <p:cNvPr id="6" name="TextBox 5"/>
-          <p:cNvSpPr txBox="1"/>
-          <p:nvPr/>
-        </p:nvSpPr>
-        <p:spPr>
-          <a:xfrm>
-            <a:off x="10378440" y="6528816"/>
-            <a:ext cx="1371600" cy="292608"/>
-          </a:xfrm>
-          <a:prstGeom prst="rect">
-            <a:avLst/>
-          </a:prstGeom>
-          <a:noFill/>
-        </p:spPr>
-        <p:txBody>
-          <a:bodyPr wrap="square" anchor="ctr">
-            <a:spAutoFit/>
-          </a:bodyPr>
-          <a:lstStyle/>
-          <a:p>
-            <a:pPr algn="r"/>
-            <a:r>
-              <a:rPr sz="1100" b="0">
-                <a:solidFill>
-                  <a:srgbClr val="FFFFFF"/>
-                </a:solidFill>
-                <a:latin typeface="Calibri"/>
-              </a:rPr>
-              <a:t>16 / 18</a:t>
-            </a:r>
-          </a:p>
-        </p:txBody>
-      </p:sp>
-      <p:sp>
-        <p:nvSpPr>
-          <p:cNvPr id="7" name="TextBox 6"/>
-          <p:cNvSpPr txBox="1"/>
-          <p:nvPr/>
-        </p:nvSpPr>
-        <p:spPr>
-          <a:xfrm>
-            <a:off x="502920" y="256032"/>
-            <a:ext cx="11155680" cy="502920"/>
-          </a:xfrm>
-          <a:prstGeom prst="rect">
-            <a:avLst/>
-          </a:prstGeom>
-          <a:noFill/>
-        </p:spPr>
-        <p:txBody>
-          <a:bodyPr wrap="square" anchor="ctr">
-            <a:spAutoFit/>
-          </a:bodyPr>
-          <a:lstStyle/>
-          <a:p>
-            <a:pPr algn="l"/>
-            <a:r>
-              <a:rPr sz="2800" b="1">
-                <a:solidFill>
-                  <a:srgbClr val="0F2C59"/>
-                </a:solidFill>
-                <a:latin typeface="Calibri"/>
-              </a:rPr>
-              <a:t>Hoy: la misma convolución, K aprendida</a:t>
-            </a:r>
-          </a:p>
-        </p:txBody>
-      </p:sp>
-      <p:sp>
-        <p:nvSpPr>
-          <p:cNvPr id="8" name="Rectangle 7"/>
-          <p:cNvSpPr/>
-          <p:nvPr/>
-        </p:nvSpPr>
-        <p:spPr>
-          <a:xfrm>
-            <a:off x="502920" y="804672"/>
-            <a:ext cx="1280160" cy="54864"/>
-          </a:xfrm>
-          <a:prstGeom prst="rect">
-            <a:avLst/>
-          </a:prstGeom>
-          <a:solidFill>
-            <a:srgbClr val="E8B93A"/>
-          </a:solidFill>
-          <a:ln>
-            <a:noFill/>
-          </a:ln>
-        </p:spPr>
-        <p:style>
-          <a:lnRef idx="1">
-            <a:schemeClr val="accent1"/>
-          </a:lnRef>
-          <a:fillRef idx="3">
-            <a:schemeClr val="accent1"/>
-          </a:fillRef>
-          <a:effectRef idx="2">
-            <a:schemeClr val="accent1"/>
-          </a:effectRef>
-          <a:fontRef idx="minor">
-            <a:schemeClr val="lt1"/>
-          </a:fontRef>
-        </p:style>
-        <p:txBody>
-          <a:bodyPr rtlCol="0" anchor="ctr"/>
-          <a:lstStyle/>
-          <a:p>
-            <a:pPr algn="ctr"/>
-          </a:p>
-        </p:txBody>
-      </p:sp>
-      <p:sp>
-        <p:nvSpPr>
-          <p:cNvPr id="9" name="TextBox 8"/>
-          <p:cNvSpPr txBox="1"/>
-          <p:nvPr/>
-        </p:nvSpPr>
-        <p:spPr>
-          <a:xfrm>
-            <a:off x="502920" y="932688"/>
-            <a:ext cx="11155680" cy="365760"/>
-          </a:xfrm>
-          <a:prstGeom prst="rect">
-            <a:avLst/>
-          </a:prstGeom>
-          <a:noFill/>
-        </p:spPr>
-        <p:txBody>
-          <a:bodyPr wrap="square" anchor="ctr">
-            <a:spAutoFit/>
-          </a:bodyPr>
-          <a:lstStyle/>
-          <a:p>
-            <a:pPr algn="l"/>
-            <a:r>
-              <a:rPr sz="1600" b="0">
-                <a:solidFill>
-                  <a:srgbClr val="5D6D7E"/>
-                </a:solidFill>
-                <a:latin typeface="Calibri"/>
-              </a:rPr>
-              <a:t>Una red convolucional no inventa otro primitivo: apila filtros y ajusta K con ejemplos (x, y)</a:t>
-            </a:r>
-          </a:p>
-        </p:txBody>
-      </p:sp>
-      <p:sp>
-        <p:nvSpPr>
-          <p:cNvPr id="10" name="Rounded Rectangle 9"/>
-          <p:cNvSpPr/>
-          <p:nvPr/>
-        </p:nvSpPr>
-        <p:spPr>
-          <a:xfrm>
-            <a:off x="502920" y="1371600"/>
-            <a:ext cx="11155680" cy="2011680"/>
-          </a:xfrm>
-          <a:prstGeom prst="roundRect">
-            <a:avLst>
-              <a:gd name="adj" fmla="val 10000"/>
-            </a:avLst>
-          </a:prstGeom>
-          <a:solidFill>
-            <a:srgbClr val="F6F8FB"/>
-          </a:solidFill>
-          <a:ln w="15875">
-            <a:solidFill>
-              <a:srgbClr val="D5DEE8"/>
-            </a:solidFill>
-          </a:ln>
-        </p:spPr>
-        <p:style>
-          <a:lnRef idx="1">
-            <a:schemeClr val="accent1"/>
-          </a:lnRef>
-          <a:fillRef idx="3">
-            <a:schemeClr val="accent1"/>
-          </a:fillRef>
-          <a:effectRef idx="2">
-            <a:schemeClr val="accent1"/>
-          </a:effectRef>
-          <a:fontRef idx="minor">
-            <a:schemeClr val="lt1"/>
-          </a:fontRef>
-        </p:style>
-        <p:txBody>
-          <a:bodyPr rtlCol="0" anchor="ctr"/>
-          <a:lstStyle/>
-          <a:p>
-            <a:pPr algn="ctr"/>
-          </a:p>
-        </p:txBody>
-      </p:sp>
-      <p:sp>
-        <p:nvSpPr>
-          <p:cNvPr id="11" name="TextBox 10"/>
-          <p:cNvSpPr txBox="1"/>
-          <p:nvPr/>
-        </p:nvSpPr>
-        <p:spPr>
-          <a:xfrm>
-            <a:off x="777240" y="1600200"/>
-            <a:ext cx="10515600" cy="1554480"/>
-          </a:xfrm>
-          <a:prstGeom prst="rect">
-            <a:avLst/>
-          </a:prstGeom>
-          <a:noFill/>
-        </p:spPr>
-        <p:txBody>
-          <a:bodyPr wrap="square" anchor="ctr">
-            <a:spAutoFit/>
-          </a:bodyPr>
-          <a:lstStyle/>
-          <a:p>
-            <a:pPr algn="ctr"/>
-            <a:r>
-              <a:rPr sz="2000" b="1">
-                <a:solidFill>
-                  <a:srgbClr val="0F2C59"/>
-                </a:solidFill>
-                <a:latin typeface="Calibri"/>
-              </a:rPr>
-              <a:t>Filtro de media / Sobel: tú eliges K.    Red: K sale del descenso por gradiente, como en el MLP.</a:t>
-            </a:r>
-          </a:p>
-        </p:txBody>
-      </p:sp>
-      <p:sp>
-        <p:nvSpPr>
-          <p:cNvPr id="12" name="Rounded Rectangle 11"/>
-          <p:cNvSpPr/>
-          <p:nvPr/>
-        </p:nvSpPr>
-        <p:spPr>
-          <a:xfrm>
-            <a:off x="502920" y="3611880"/>
-            <a:ext cx="3611880" cy="2423160"/>
-          </a:xfrm>
-          <a:prstGeom prst="roundRect">
-            <a:avLst>
-              <a:gd name="adj" fmla="val 10000"/>
-            </a:avLst>
-          </a:prstGeom>
-          <a:solidFill>
-            <a:srgbClr val="F6F8FB"/>
-          </a:solidFill>
-          <a:ln w="15875">
-            <a:solidFill>
-              <a:srgbClr val="D5DEE8"/>
-            </a:solidFill>
-          </a:ln>
-        </p:spPr>
-        <p:style>
-          <a:lnRef idx="1">
-            <a:schemeClr val="accent1"/>
-          </a:lnRef>
-          <a:fillRef idx="3">
-            <a:schemeClr val="accent1"/>
-          </a:fillRef>
-          <a:effectRef idx="2">
-            <a:schemeClr val="accent1"/>
-          </a:effectRef>
-          <a:fontRef idx="minor">
-            <a:schemeClr val="lt1"/>
-          </a:fontRef>
-        </p:style>
-        <p:txBody>
-          <a:bodyPr rtlCol="0" anchor="ctr"/>
-          <a:lstStyle/>
-          <a:p>
-            <a:pPr algn="ctr"/>
-          </a:p>
-        </p:txBody>
-      </p:sp>
-      <p:sp>
-        <p:nvSpPr>
-          <p:cNvPr id="13" name="TextBox 12"/>
-          <p:cNvSpPr txBox="1"/>
-          <p:nvPr/>
-        </p:nvSpPr>
-        <p:spPr>
-          <a:xfrm>
-            <a:off x="704088" y="3794760"/>
-            <a:ext cx="3200400" cy="457200"/>
-          </a:xfrm>
-          <a:prstGeom prst="rect">
-            <a:avLst/>
-          </a:prstGeom>
-          <a:noFill/>
-        </p:spPr>
-        <p:txBody>
-          <a:bodyPr wrap="square" anchor="t">
-            <a:spAutoFit/>
-          </a:bodyPr>
-          <a:lstStyle/>
-          <a:p>
-            <a:pPr algn="l"/>
-            <a:r>
-              <a:rPr sz="1600" b="1">
-                <a:solidFill>
-                  <a:srgbClr val="0F2C59"/>
-                </a:solidFill>
-                <a:latin typeface="Calibri"/>
-              </a:rPr>
-              <a:t>Lo que ya sabes</a:t>
-            </a:r>
-          </a:p>
-        </p:txBody>
-      </p:sp>
-      <p:sp>
-        <p:nvSpPr>
-          <p:cNvPr id="14" name="TextBox 13"/>
-          <p:cNvSpPr txBox="1"/>
-          <p:nvPr/>
-        </p:nvSpPr>
-        <p:spPr>
-          <a:xfrm>
-            <a:off x="704088" y="4297680"/>
-            <a:ext cx="3200400" cy="1508760"/>
-          </a:xfrm>
-          <a:prstGeom prst="rect">
-            <a:avLst/>
-          </a:prstGeom>
-          <a:noFill/>
-        </p:spPr>
-        <p:txBody>
-          <a:bodyPr wrap="square" anchor="t">
-            <a:spAutoFit/>
-          </a:bodyPr>
-          <a:lstStyle/>
-          <a:p>
-            <a:pPr algn="l"/>
-            <a:r>
-              <a:rPr sz="1400" b="0">
-                <a:solidFill>
-                  <a:srgbClr val="2C3E50"/>
-                </a:solidFill>
-                <a:latin typeface="Calibri"/>
-              </a:rPr>
-              <a:t>Convolución y luego una no linealidad, como en el MLP. Varias capas: primero bordes, después partes, después objetos.</a:t>
-            </a:r>
-          </a:p>
-        </p:txBody>
-      </p:sp>
-      <p:sp>
-        <p:nvSpPr>
-          <p:cNvPr id="15" name="Rounded Rectangle 14"/>
-          <p:cNvSpPr/>
-          <p:nvPr/>
-        </p:nvSpPr>
-        <p:spPr>
-          <a:xfrm>
-            <a:off x="4343400" y="3611880"/>
-            <a:ext cx="3611880" cy="2423160"/>
-          </a:xfrm>
-          <a:prstGeom prst="roundRect">
-            <a:avLst>
-              <a:gd name="adj" fmla="val 10000"/>
-            </a:avLst>
-          </a:prstGeom>
-          <a:solidFill>
-            <a:srgbClr val="F6F8FB"/>
-          </a:solidFill>
-          <a:ln w="15875">
-            <a:solidFill>
-              <a:srgbClr val="D5DEE8"/>
-            </a:solidFill>
-          </a:ln>
-        </p:spPr>
-        <p:style>
-          <a:lnRef idx="1">
-            <a:schemeClr val="accent1"/>
-          </a:lnRef>
-          <a:fillRef idx="3">
-            <a:schemeClr val="accent1"/>
-          </a:fillRef>
-          <a:effectRef idx="2">
-            <a:schemeClr val="accent1"/>
-          </a:effectRef>
-          <a:fontRef idx="minor">
-            <a:schemeClr val="lt1"/>
-          </a:fontRef>
-        </p:style>
-        <p:txBody>
-          <a:bodyPr rtlCol="0" anchor="ctr"/>
-          <a:lstStyle/>
-          <a:p>
-            <a:pPr algn="ctr"/>
-          </a:p>
-        </p:txBody>
-      </p:sp>
-      <p:sp>
-        <p:nvSpPr>
-          <p:cNvPr id="16" name="TextBox 15"/>
-          <p:cNvSpPr txBox="1"/>
-          <p:nvPr/>
-        </p:nvSpPr>
-        <p:spPr>
-          <a:xfrm>
-            <a:off x="4544568" y="3794760"/>
-            <a:ext cx="3200400" cy="457200"/>
-          </a:xfrm>
-          <a:prstGeom prst="rect">
-            <a:avLst/>
-          </a:prstGeom>
-          <a:noFill/>
-        </p:spPr>
-        <p:txBody>
-          <a:bodyPr wrap="square" anchor="t">
-            <a:spAutoFit/>
-          </a:bodyPr>
-          <a:lstStyle/>
-          <a:p>
-            <a:pPr algn="l"/>
-            <a:r>
-              <a:rPr sz="1600" b="1">
-                <a:solidFill>
-                  <a:srgbClr val="0F2C59"/>
-                </a:solidFill>
-                <a:latin typeface="Calibri"/>
-              </a:rPr>
-              <a:t>Lo que no hace falta hoy</a:t>
-            </a:r>
-          </a:p>
-        </p:txBody>
-      </p:sp>
-      <p:sp>
-        <p:nvSpPr>
-          <p:cNvPr id="17" name="TextBox 16"/>
-          <p:cNvSpPr txBox="1"/>
-          <p:nvPr/>
-        </p:nvSpPr>
-        <p:spPr>
-          <a:xfrm>
-            <a:off x="4544568" y="4297680"/>
-            <a:ext cx="3200400" cy="1508760"/>
-          </a:xfrm>
-          <a:prstGeom prst="rect">
-            <a:avLst/>
-          </a:prstGeom>
-          <a:noFill/>
-        </p:spPr>
-        <p:txBody>
-          <a:bodyPr wrap="square" anchor="t">
-            <a:spAutoFit/>
-          </a:bodyPr>
-          <a:lstStyle/>
-          <a:p>
-            <a:pPr algn="l"/>
-            <a:r>
-              <a:rPr sz="1400" b="0">
-                <a:solidFill>
-                  <a:srgbClr val="2C3E50"/>
-                </a:solidFill>
-                <a:latin typeface="Calibri"/>
-              </a:rPr>
-              <a:t>ImageNet, ResNet, transformers visuales. Primero que un 3×3 sobre un escalón te dé 36.</a:t>
-            </a:r>
-          </a:p>
-        </p:txBody>
-      </p:sp>
-      <p:sp>
-        <p:nvSpPr>
-          <p:cNvPr id="18" name="Rounded Rectangle 17"/>
-          <p:cNvSpPr/>
-          <p:nvPr/>
-        </p:nvSpPr>
-        <p:spPr>
-          <a:xfrm>
-            <a:off x="8183880" y="3611880"/>
-            <a:ext cx="3611880" cy="2423160"/>
-          </a:xfrm>
-          <a:prstGeom prst="roundRect">
-            <a:avLst>
-              <a:gd name="adj" fmla="val 10000"/>
-            </a:avLst>
-          </a:prstGeom>
-          <a:solidFill>
-            <a:srgbClr val="F6F8FB"/>
-          </a:solidFill>
-          <a:ln w="15875">
-            <a:solidFill>
-              <a:srgbClr val="D5DEE8"/>
-            </a:solidFill>
-          </a:ln>
-        </p:spPr>
-        <p:style>
-          <a:lnRef idx="1">
-            <a:schemeClr val="accent1"/>
-          </a:lnRef>
-          <a:fillRef idx="3">
-            <a:schemeClr val="accent1"/>
-          </a:fillRef>
-          <a:effectRef idx="2">
-            <a:schemeClr val="accent1"/>
-          </a:effectRef>
-          <a:fontRef idx="minor">
-            <a:schemeClr val="lt1"/>
-          </a:fontRef>
-        </p:style>
-        <p:txBody>
-          <a:bodyPr rtlCol="0" anchor="ctr"/>
-          <a:lstStyle/>
-          <a:p>
-            <a:pPr algn="ctr"/>
-          </a:p>
-        </p:txBody>
-      </p:sp>
-      <p:sp>
-        <p:nvSpPr>
-          <p:cNvPr id="19" name="TextBox 18"/>
-          <p:cNvSpPr txBox="1"/>
-          <p:nvPr/>
-        </p:nvSpPr>
-        <p:spPr>
-          <a:xfrm>
-            <a:off x="8385048" y="3794760"/>
-            <a:ext cx="3200400" cy="457200"/>
-          </a:xfrm>
-          <a:prstGeom prst="rect">
-            <a:avLst/>
-          </a:prstGeom>
-          <a:noFill/>
-        </p:spPr>
-        <p:txBody>
-          <a:bodyPr wrap="square" anchor="t">
-            <a:spAutoFit/>
-          </a:bodyPr>
-          <a:lstStyle/>
-          <a:p>
-            <a:pPr algn="l"/>
-            <a:r>
-              <a:rPr sz="1600" b="1">
-                <a:solidFill>
-                  <a:srgbClr val="0F2C59"/>
-                </a:solidFill>
-                <a:latin typeface="Calibri"/>
-              </a:rPr>
-              <a:t>Práctica tabular</a:t>
-            </a:r>
-          </a:p>
-        </p:txBody>
-      </p:sp>
-      <p:sp>
-        <p:nvSpPr>
-          <p:cNvPr id="20" name="TextBox 19"/>
-          <p:cNvSpPr txBox="1"/>
-          <p:nvPr/>
-        </p:nvSpPr>
-        <p:spPr>
-          <a:xfrm>
-            <a:off x="8385048" y="4297680"/>
-            <a:ext cx="3200400" cy="1508760"/>
-          </a:xfrm>
-          <a:prstGeom prst="rect">
-            <a:avLst/>
-          </a:prstGeom>
-          <a:noFill/>
-        </p:spPr>
-        <p:txBody>
-          <a:bodyPr wrap="square" anchor="t">
-            <a:spAutoFit/>
-          </a:bodyPr>
-          <a:lstStyle/>
-          <a:p>
-            <a:pPr algn="l"/>
-            <a:r>
-              <a:rPr sz="1400" b="0">
-                <a:solidFill>
-                  <a:srgbClr val="2C3E50"/>
-                </a:solidFill>
-                <a:latin typeface="Calibri"/>
-              </a:rPr>
-              <a:t>Para un laboratorio: OpenCV filter2D / Sobel, o convolución a mano en una matriz pequeña, como aquí.</a:t>
-            </a:r>
-          </a:p>
-        </p:txBody>
-      </p:sp>
-    </p:spTree>
-  </p:cSld>
-  <p:clrMapOvr>
-    <a:masterClrMapping/>
-  </p:clrMapOvr>
-</p:sld>
-</file>
-
-<file path=ppt/slides/slide17.xml><?xml version="1.0" encoding="utf-8"?>
-<p:sld xmlns:a="http://schemas.openxmlformats.org/drawingml/2006/main" xmlns:p="http://schemas.openxmlformats.org/presentationml/2006/main" xmlns:r="http://schemas.openxmlformats.org/officeDocument/2006/relationships">
-  <p:cSld>
-    <p:spTree>
-      <p:nvGrpSpPr>
-        <p:cNvPr id="1" name=""/>
-        <p:cNvGrpSpPr/>
-        <p:nvPr/>
-      </p:nvGrpSpPr>
-      <p:grpSpPr/>
-      <p:sp>
-        <p:nvSpPr>
-          <p:cNvPr id="2" name="Rectangle 1"/>
-          <p:cNvSpPr/>
-          <p:nvPr/>
-        </p:nvSpPr>
-        <p:spPr>
-          <a:xfrm>
-            <a:off x="0" y="0"/>
-            <a:ext cx="12191999" cy="6858000"/>
-          </a:xfrm>
-          <a:prstGeom prst="rect">
-            <a:avLst/>
-          </a:prstGeom>
-          <a:solidFill>
-            <a:srgbClr val="FFFFFF"/>
-          </a:solidFill>
-          <a:ln>
-            <a:noFill/>
-          </a:ln>
-        </p:spPr>
-        <p:style>
-          <a:lnRef idx="1">
-            <a:schemeClr val="accent1"/>
-          </a:lnRef>
-          <a:fillRef idx="3">
-            <a:schemeClr val="accent1"/>
-          </a:fillRef>
-          <a:effectRef idx="2">
-            <a:schemeClr val="accent1"/>
-          </a:effectRef>
-          <a:fontRef idx="minor">
-            <a:schemeClr val="lt1"/>
-          </a:fontRef>
-        </p:style>
-        <p:txBody>
-          <a:bodyPr rtlCol="0" anchor="ctr"/>
-          <a:lstStyle/>
-          <a:p>
-            <a:pPr algn="ctr"/>
-          </a:p>
-        </p:txBody>
-      </p:sp>
-      <p:sp>
-        <p:nvSpPr>
-          <p:cNvPr id="3" name="Rectangle 2"/>
-          <p:cNvSpPr/>
-          <p:nvPr/>
-        </p:nvSpPr>
-        <p:spPr>
-          <a:xfrm>
-            <a:off x="0" y="0"/>
-            <a:ext cx="109728" cy="6858000"/>
-          </a:xfrm>
-          <a:prstGeom prst="rect">
-            <a:avLst/>
-          </a:prstGeom>
-          <a:solidFill>
-            <a:srgbClr val="E8B93A"/>
-          </a:solidFill>
-          <a:ln>
-            <a:noFill/>
-          </a:ln>
-        </p:spPr>
-        <p:style>
-          <a:lnRef idx="1">
-            <a:schemeClr val="accent1"/>
-          </a:lnRef>
-          <a:fillRef idx="3">
-            <a:schemeClr val="accent1"/>
-          </a:fillRef>
-          <a:effectRef idx="2">
-            <a:schemeClr val="accent1"/>
-          </a:effectRef>
-          <a:fontRef idx="minor">
-            <a:schemeClr val="lt1"/>
-          </a:fontRef>
-        </p:style>
-        <p:txBody>
-          <a:bodyPr rtlCol="0" anchor="ctr"/>
-          <a:lstStyle/>
-          <a:p>
-            <a:pPr algn="ctr"/>
-          </a:p>
-        </p:txBody>
-      </p:sp>
-      <p:sp>
-        <p:nvSpPr>
-          <p:cNvPr id="4" name="Rectangle 3"/>
-          <p:cNvSpPr/>
-          <p:nvPr/>
-        </p:nvSpPr>
-        <p:spPr>
-          <a:xfrm>
-            <a:off x="0" y="6510528"/>
-            <a:ext cx="12191999" cy="347472"/>
-          </a:xfrm>
-          <a:prstGeom prst="rect">
-            <a:avLst/>
-          </a:prstGeom>
-          <a:solidFill>
-            <a:srgbClr val="0F2C59"/>
-          </a:solidFill>
-          <a:ln>
-            <a:noFill/>
-          </a:ln>
-        </p:spPr>
-        <p:style>
-          <a:lnRef idx="1">
-            <a:schemeClr val="accent1"/>
-          </a:lnRef>
-          <a:fillRef idx="3">
-            <a:schemeClr val="accent1"/>
-          </a:fillRef>
-          <a:effectRef idx="2">
-            <a:schemeClr val="accent1"/>
-          </a:effectRef>
-          <a:fontRef idx="minor">
-            <a:schemeClr val="lt1"/>
-          </a:fontRef>
-        </p:style>
-        <p:txBody>
-          <a:bodyPr rtlCol="0" anchor="ctr"/>
-          <a:lstStyle/>
-          <a:p>
-            <a:pPr algn="ctr"/>
-          </a:p>
-        </p:txBody>
-      </p:sp>
-      <p:sp>
-        <p:nvSpPr>
-          <p:cNvPr id="5" name="TextBox 4"/>
-          <p:cNvSpPr txBox="1"/>
-          <p:nvPr/>
-        </p:nvSpPr>
-        <p:spPr>
-          <a:xfrm>
-            <a:off x="457200" y="6528816"/>
-            <a:ext cx="9144000" cy="292608"/>
-          </a:xfrm>
-          <a:prstGeom prst="rect">
-            <a:avLst/>
-          </a:prstGeom>
-          <a:noFill/>
-        </p:spPr>
-        <p:txBody>
-          <a:bodyPr wrap="square" anchor="ctr">
-            <a:spAutoFit/>
-          </a:bodyPr>
-          <a:lstStyle/>
-          <a:p>
-            <a:pPr algn="l"/>
-            <a:r>
-              <a:rPr sz="1100" b="0">
-                <a:solidFill>
-                  <a:srgbClr val="FFFFFF"/>
-                </a:solidFill>
-                <a:latin typeface="Calibri"/>
-              </a:rPr>
-              <a:t>Curso de Inteligencia Artificial  ·  Visión computacional</a:t>
-            </a:r>
-          </a:p>
-        </p:txBody>
-      </p:sp>
-      <p:sp>
-        <p:nvSpPr>
-          <p:cNvPr id="6" name="TextBox 5"/>
-          <p:cNvSpPr txBox="1"/>
-          <p:nvPr/>
-        </p:nvSpPr>
-        <p:spPr>
-          <a:xfrm>
-            <a:off x="10378440" y="6528816"/>
-            <a:ext cx="1371600" cy="292608"/>
-          </a:xfrm>
-          <a:prstGeom prst="rect">
-            <a:avLst/>
-          </a:prstGeom>
-          <a:noFill/>
-        </p:spPr>
-        <p:txBody>
-          <a:bodyPr wrap="square" anchor="ctr">
-            <a:spAutoFit/>
-          </a:bodyPr>
-          <a:lstStyle/>
-          <a:p>
-            <a:pPr algn="r"/>
-            <a:r>
-              <a:rPr sz="1100" b="0">
-                <a:solidFill>
-                  <a:srgbClr val="FFFFFF"/>
-                </a:solidFill>
-                <a:latin typeface="Calibri"/>
-              </a:rPr>
-              <a:t>17 / 18</a:t>
-            </a:r>
-          </a:p>
-        </p:txBody>
-      </p:sp>
-      <p:sp>
-        <p:nvSpPr>
-          <p:cNvPr id="7" name="TextBox 6"/>
-          <p:cNvSpPr txBox="1"/>
-          <p:nvPr/>
-        </p:nvSpPr>
-        <p:spPr>
-          <a:xfrm>
-            <a:off x="502920" y="256032"/>
-            <a:ext cx="11155680" cy="502920"/>
-          </a:xfrm>
-          <a:prstGeom prst="rect">
-            <a:avLst/>
-          </a:prstGeom>
-          <a:noFill/>
-        </p:spPr>
-        <p:txBody>
-          <a:bodyPr wrap="square" anchor="ctr">
-            <a:spAutoFit/>
-          </a:bodyPr>
-          <a:lstStyle/>
-          <a:p>
-            <a:pPr algn="l"/>
-            <a:r>
-              <a:rPr sz="2800" b="1">
-                <a:solidFill>
-                  <a:srgbClr val="0F2C59"/>
-                </a:solidFill>
-                <a:latin typeface="Calibri"/>
-              </a:rPr>
-              <a:t>Ideas para llevar</a:t>
-            </a:r>
-          </a:p>
-        </p:txBody>
-      </p:sp>
-      <p:sp>
-        <p:nvSpPr>
-          <p:cNvPr id="8" name="Rectangle 7"/>
-          <p:cNvSpPr/>
-          <p:nvPr/>
-        </p:nvSpPr>
-        <p:spPr>
-          <a:xfrm>
-            <a:off x="502920" y="804672"/>
-            <a:ext cx="1280160" cy="54864"/>
-          </a:xfrm>
-          <a:prstGeom prst="rect">
-            <a:avLst/>
-          </a:prstGeom>
-          <a:solidFill>
-            <a:srgbClr val="E8B93A"/>
-          </a:solidFill>
-          <a:ln>
-            <a:noFill/>
-          </a:ln>
-        </p:spPr>
-        <p:style>
-          <a:lnRef idx="1">
-            <a:schemeClr val="accent1"/>
-          </a:lnRef>
-          <a:fillRef idx="3">
-            <a:schemeClr val="accent1"/>
-          </a:fillRef>
-          <a:effectRef idx="2">
-            <a:schemeClr val="accent1"/>
-          </a:effectRef>
-          <a:fontRef idx="minor">
-            <a:schemeClr val="lt1"/>
-          </a:fontRef>
-        </p:style>
-        <p:txBody>
-          <a:bodyPr rtlCol="0" anchor="ctr"/>
-          <a:lstStyle/>
-          <a:p>
-            <a:pPr algn="ctr"/>
-          </a:p>
-        </p:txBody>
-      </p:sp>
-      <p:sp>
-        <p:nvSpPr>
-          <p:cNvPr id="9" name="TextBox 8"/>
-          <p:cNvSpPr txBox="1"/>
-          <p:nvPr/>
-        </p:nvSpPr>
-        <p:spPr>
-          <a:xfrm>
-            <a:off x="502920" y="932688"/>
-            <a:ext cx="11155680" cy="365760"/>
-          </a:xfrm>
-          <a:prstGeom prst="rect">
-            <a:avLst/>
-          </a:prstGeom>
-          <a:noFill/>
-        </p:spPr>
-        <p:txBody>
-          <a:bodyPr wrap="square" anchor="ctr">
-            <a:spAutoFit/>
-          </a:bodyPr>
-          <a:lstStyle/>
-          <a:p>
-            <a:pPr algn="l"/>
-            <a:r>
-              <a:rPr sz="1600" b="0">
-                <a:solidFill>
-                  <a:srgbClr val="5D6D7E"/>
-                </a:solidFill>
-                <a:latin typeface="Calibri"/>
-              </a:rPr>
-              <a:t>Ver, para una máquina, es calcular sobre una cuadrícula</a:t>
-            </a:r>
-          </a:p>
-        </p:txBody>
-      </p:sp>
-      <p:sp>
-        <p:nvSpPr>
-          <p:cNvPr id="10" name="Rounded Rectangle 9"/>
-          <p:cNvSpPr/>
-          <p:nvPr/>
-        </p:nvSpPr>
-        <p:spPr>
-          <a:xfrm>
-            <a:off x="502920" y="1417320"/>
-            <a:ext cx="5349240" cy="2148840"/>
-          </a:xfrm>
-          <a:prstGeom prst="roundRect">
-            <a:avLst>
-              <a:gd name="adj" fmla="val 10000"/>
-            </a:avLst>
-          </a:prstGeom>
-          <a:solidFill>
-            <a:srgbClr val="F6F8FB"/>
-          </a:solidFill>
-          <a:ln w="15875">
-            <a:solidFill>
-              <a:srgbClr val="D5DEE8"/>
-            </a:solidFill>
-          </a:ln>
-        </p:spPr>
-        <p:style>
-          <a:lnRef idx="1">
-            <a:schemeClr val="accent1"/>
-          </a:lnRef>
-          <a:fillRef idx="3">
-            <a:schemeClr val="accent1"/>
-          </a:fillRef>
-          <a:effectRef idx="2">
-            <a:schemeClr val="accent1"/>
-          </a:effectRef>
-          <a:fontRef idx="minor">
-            <a:schemeClr val="lt1"/>
-          </a:fontRef>
-        </p:style>
-        <p:txBody>
-          <a:bodyPr rtlCol="0" anchor="ctr"/>
-          <a:lstStyle/>
-          <a:p>
-            <a:pPr algn="ctr"/>
-          </a:p>
-        </p:txBody>
-      </p:sp>
-      <p:sp>
-        <p:nvSpPr>
-          <p:cNvPr id="11" name="TextBox 10"/>
-          <p:cNvSpPr txBox="1"/>
-          <p:nvPr/>
-        </p:nvSpPr>
-        <p:spPr>
-          <a:xfrm>
-            <a:off x="758952" y="1673352"/>
-            <a:ext cx="4846320" cy="457200"/>
-          </a:xfrm>
-          <a:prstGeom prst="rect">
-            <a:avLst/>
-          </a:prstGeom>
-          <a:noFill/>
-        </p:spPr>
-        <p:txBody>
-          <a:bodyPr wrap="square" anchor="t">
-            <a:spAutoFit/>
-          </a:bodyPr>
-          <a:lstStyle/>
-          <a:p>
-            <a:pPr algn="l"/>
-            <a:r>
-              <a:rPr sz="1800" b="1">
-                <a:solidFill>
-                  <a:srgbClr val="0F2C59"/>
-                </a:solidFill>
-                <a:latin typeface="Calibri"/>
-              </a:rPr>
-              <a:t>Píxel</a:t>
-            </a:r>
-          </a:p>
-        </p:txBody>
-      </p:sp>
-      <p:sp>
-        <p:nvSpPr>
-          <p:cNvPr id="12" name="TextBox 11"/>
-          <p:cNvSpPr txBox="1"/>
-          <p:nvPr/>
-        </p:nvSpPr>
-        <p:spPr>
-          <a:xfrm>
-            <a:off x="758952" y="2240280"/>
-            <a:ext cx="4846320" cy="1097280"/>
-          </a:xfrm>
-          <a:prstGeom prst="rect">
-            <a:avLst/>
-          </a:prstGeom>
-          <a:noFill/>
-        </p:spPr>
-        <p:txBody>
-          <a:bodyPr wrap="square" anchor="t">
-            <a:spAutoFit/>
-          </a:bodyPr>
-          <a:lstStyle/>
-          <a:p>
-            <a:pPr algn="l"/>
-            <a:r>
-              <a:rPr sz="1500" b="0">
-                <a:solidFill>
-                  <a:srgbClr val="2C3E50"/>
-                </a:solidFill>
-                <a:latin typeface="Calibri"/>
-              </a:rPr>
-              <a:t>Un número (o un triple RGB). La «E» o el círculo son patrones, no etiquetas del archivo.</a:t>
-            </a:r>
-          </a:p>
-        </p:txBody>
-      </p:sp>
-      <p:sp>
-        <p:nvSpPr>
-          <p:cNvPr id="13" name="Rounded Rectangle 12"/>
-          <p:cNvSpPr/>
-          <p:nvPr/>
-        </p:nvSpPr>
-        <p:spPr>
-          <a:xfrm>
-            <a:off x="6355080" y="1417320"/>
-            <a:ext cx="5349240" cy="2148840"/>
-          </a:xfrm>
-          <a:prstGeom prst="roundRect">
-            <a:avLst>
-              <a:gd name="adj" fmla="val 10000"/>
-            </a:avLst>
-          </a:prstGeom>
-          <a:solidFill>
-            <a:srgbClr val="F6F8FB"/>
-          </a:solidFill>
-          <a:ln w="15875">
-            <a:solidFill>
-              <a:srgbClr val="D5DEE8"/>
-            </a:solidFill>
-          </a:ln>
-        </p:spPr>
-        <p:style>
-          <a:lnRef idx="1">
-            <a:schemeClr val="accent1"/>
-          </a:lnRef>
-          <a:fillRef idx="3">
-            <a:schemeClr val="accent1"/>
-          </a:fillRef>
-          <a:effectRef idx="2">
-            <a:schemeClr val="accent1"/>
-          </a:effectRef>
-          <a:fontRef idx="minor">
-            <a:schemeClr val="lt1"/>
-          </a:fontRef>
-        </p:style>
-        <p:txBody>
-          <a:bodyPr rtlCol="0" anchor="ctr"/>
-          <a:lstStyle/>
-          <a:p>
-            <a:pPr algn="ctr"/>
-          </a:p>
-        </p:txBody>
-      </p:sp>
-      <p:sp>
-        <p:nvSpPr>
-          <p:cNvPr id="14" name="TextBox 13"/>
-          <p:cNvSpPr txBox="1"/>
-          <p:nvPr/>
-        </p:nvSpPr>
-        <p:spPr>
-          <a:xfrm>
-            <a:off x="6611112" y="1673352"/>
-            <a:ext cx="4846320" cy="457200"/>
-          </a:xfrm>
-          <a:prstGeom prst="rect">
-            <a:avLst/>
-          </a:prstGeom>
-          <a:noFill/>
-        </p:spPr>
-        <p:txBody>
-          <a:bodyPr wrap="square" anchor="t">
-            <a:spAutoFit/>
-          </a:bodyPr>
-          <a:lstStyle/>
-          <a:p>
-            <a:pPr algn="l"/>
-            <a:r>
-              <a:rPr sz="1800" b="1">
-                <a:solidFill>
-                  <a:srgbClr val="0F2C59"/>
-                </a:solidFill>
-                <a:latin typeface="Calibri"/>
-              </a:rPr>
-              <a:t>Filtro</a:t>
-            </a:r>
-          </a:p>
-        </p:txBody>
-      </p:sp>
-      <p:sp>
-        <p:nvSpPr>
-          <p:cNvPr id="15" name="TextBox 14"/>
-          <p:cNvSpPr txBox="1"/>
-          <p:nvPr/>
-        </p:nvSpPr>
-        <p:spPr>
-          <a:xfrm>
-            <a:off x="6611112" y="2240280"/>
-            <a:ext cx="4846320" cy="1097280"/>
-          </a:xfrm>
-          <a:prstGeom prst="rect">
-            <a:avLst/>
-          </a:prstGeom>
-          <a:noFill/>
-        </p:spPr>
-        <p:txBody>
-          <a:bodyPr wrap="square" anchor="t">
-            <a:spAutoFit/>
-          </a:bodyPr>
-          <a:lstStyle/>
-          <a:p>
-            <a:pPr algn="l"/>
-            <a:r>
-              <a:rPr sz="1500" b="0">
-                <a:solidFill>
-                  <a:srgbClr val="2C3E50"/>
-                </a:solidFill>
-                <a:latin typeface="Calibri"/>
-              </a:rPr>
-              <a:t>Mezcla un vecindario. La media suaviza. Eso es convolución con K constante.</a:t>
-            </a:r>
-          </a:p>
-        </p:txBody>
-      </p:sp>
-      <p:sp>
-        <p:nvSpPr>
-          <p:cNvPr id="16" name="Rounded Rectangle 15"/>
-          <p:cNvSpPr/>
-          <p:nvPr/>
-        </p:nvSpPr>
-        <p:spPr>
-          <a:xfrm>
-            <a:off x="502920" y="3840480"/>
-            <a:ext cx="5349240" cy="2148840"/>
-          </a:xfrm>
-          <a:prstGeom prst="roundRect">
-            <a:avLst>
-              <a:gd name="adj" fmla="val 10000"/>
-            </a:avLst>
-          </a:prstGeom>
-          <a:solidFill>
-            <a:srgbClr val="F6F8FB"/>
-          </a:solidFill>
-          <a:ln w="15875">
-            <a:solidFill>
-              <a:srgbClr val="D5DEE8"/>
-            </a:solidFill>
-          </a:ln>
-        </p:spPr>
-        <p:style>
-          <a:lnRef idx="1">
-            <a:schemeClr val="accent1"/>
-          </a:lnRef>
-          <a:fillRef idx="3">
-            <a:schemeClr val="accent1"/>
-          </a:fillRef>
-          <a:effectRef idx="2">
-            <a:schemeClr val="accent1"/>
-          </a:effectRef>
-          <a:fontRef idx="minor">
-            <a:schemeClr val="lt1"/>
-          </a:fontRef>
-        </p:style>
-        <p:txBody>
-          <a:bodyPr rtlCol="0" anchor="ctr"/>
-          <a:lstStyle/>
-          <a:p>
-            <a:pPr algn="ctr"/>
-          </a:p>
-        </p:txBody>
-      </p:sp>
-      <p:sp>
-        <p:nvSpPr>
-          <p:cNvPr id="17" name="TextBox 16"/>
-          <p:cNvSpPr txBox="1"/>
-          <p:nvPr/>
-        </p:nvSpPr>
-        <p:spPr>
-          <a:xfrm>
-            <a:off x="758952" y="4096512"/>
-            <a:ext cx="4846320" cy="457200"/>
-          </a:xfrm>
-          <a:prstGeom prst="rect">
-            <a:avLst/>
-          </a:prstGeom>
-          <a:noFill/>
-        </p:spPr>
-        <p:txBody>
-          <a:bodyPr wrap="square" anchor="t">
-            <a:spAutoFit/>
-          </a:bodyPr>
-          <a:lstStyle/>
-          <a:p>
-            <a:pPr algn="l"/>
-            <a:r>
-              <a:rPr sz="1800" b="1">
-                <a:solidFill>
-                  <a:srgbClr val="0F2C59"/>
-                </a:solidFill>
-                <a:latin typeface="Calibri"/>
-              </a:rPr>
-              <a:t>Borde</a:t>
-            </a:r>
-          </a:p>
-        </p:txBody>
-      </p:sp>
-      <p:sp>
-        <p:nvSpPr>
-          <p:cNvPr id="18" name="TextBox 17"/>
-          <p:cNvSpPr txBox="1"/>
-          <p:nvPr/>
-        </p:nvSpPr>
-        <p:spPr>
-          <a:xfrm>
-            <a:off x="758952" y="4663440"/>
-            <a:ext cx="4846320" cy="1097280"/>
-          </a:xfrm>
-          <a:prstGeom prst="rect">
-            <a:avLst/>
-          </a:prstGeom>
-          <a:noFill/>
-        </p:spPr>
-        <p:txBody>
-          <a:bodyPr wrap="square" anchor="t">
-            <a:spAutoFit/>
-          </a:bodyPr>
-          <a:lstStyle/>
-          <a:p>
-            <a:pPr algn="l"/>
-            <a:r>
-              <a:rPr sz="1500" b="0">
-                <a:solidFill>
-                  <a:srgbClr val="2C3E50"/>
-                </a:solidFill>
-                <a:latin typeface="Calibri"/>
-              </a:rPr>
-              <a:t>Salto de I. Sobel es una K que aproxima la derivada. Luego un umbral da el contorno.</a:t>
-            </a:r>
-          </a:p>
-        </p:txBody>
-      </p:sp>
-      <p:sp>
-        <p:nvSpPr>
-          <p:cNvPr id="19" name="Rounded Rectangle 18"/>
-          <p:cNvSpPr/>
-          <p:nvPr/>
-        </p:nvSpPr>
-        <p:spPr>
-          <a:xfrm>
-            <a:off x="6355080" y="3840480"/>
-            <a:ext cx="5349240" cy="2148840"/>
-          </a:xfrm>
-          <a:prstGeom prst="roundRect">
-            <a:avLst>
-              <a:gd name="adj" fmla="val 10000"/>
-            </a:avLst>
-          </a:prstGeom>
-          <a:solidFill>
-            <a:srgbClr val="F6F8FB"/>
-          </a:solidFill>
-          <a:ln w="15875">
-            <a:solidFill>
-              <a:srgbClr val="D5DEE8"/>
-            </a:solidFill>
-          </a:ln>
-        </p:spPr>
-        <p:style>
-          <a:lnRef idx="1">
-            <a:schemeClr val="accent1"/>
-          </a:lnRef>
-          <a:fillRef idx="3">
-            <a:schemeClr val="accent1"/>
-          </a:fillRef>
-          <a:effectRef idx="2">
-            <a:schemeClr val="accent1"/>
-          </a:effectRef>
-          <a:fontRef idx="minor">
-            <a:schemeClr val="lt1"/>
-          </a:fontRef>
-        </p:style>
-        <p:txBody>
-          <a:bodyPr rtlCol="0" anchor="ctr"/>
-          <a:lstStyle/>
-          <a:p>
-            <a:pPr algn="ctr"/>
-          </a:p>
-        </p:txBody>
-      </p:sp>
-      <p:sp>
-        <p:nvSpPr>
-          <p:cNvPr id="20" name="TextBox 19"/>
-          <p:cNvSpPr txBox="1"/>
-          <p:nvPr/>
-        </p:nvSpPr>
-        <p:spPr>
-          <a:xfrm>
-            <a:off x="6611112" y="4096512"/>
-            <a:ext cx="4846320" cy="457200"/>
-          </a:xfrm>
-          <a:prstGeom prst="rect">
-            <a:avLst/>
-          </a:prstGeom>
-          <a:noFill/>
-        </p:spPr>
-        <p:txBody>
-          <a:bodyPr wrap="square" anchor="t">
-            <a:spAutoFit/>
-          </a:bodyPr>
-          <a:lstStyle/>
-          <a:p>
-            <a:pPr algn="l"/>
-            <a:r>
-              <a:rPr sz="1800" b="1">
-                <a:solidFill>
-                  <a:srgbClr val="0F2C59"/>
-                </a:solidFill>
-                <a:latin typeface="Calibri"/>
-              </a:rPr>
-              <a:t>Hoy</a:t>
-            </a:r>
-          </a:p>
-        </p:txBody>
-      </p:sp>
-      <p:sp>
-        <p:nvSpPr>
-          <p:cNvPr id="21" name="TextBox 20"/>
-          <p:cNvSpPr txBox="1"/>
-          <p:nvPr/>
-        </p:nvSpPr>
-        <p:spPr>
-          <a:xfrm>
-            <a:off x="6611112" y="4663440"/>
-            <a:ext cx="4846320" cy="1097280"/>
-          </a:xfrm>
-          <a:prstGeom prst="rect">
-            <a:avLst/>
-          </a:prstGeom>
-          <a:noFill/>
-        </p:spPr>
-        <p:txBody>
-          <a:bodyPr wrap="square" anchor="t">
-            <a:spAutoFit/>
-          </a:bodyPr>
-          <a:lstStyle/>
-          <a:p>
-            <a:pPr algn="l"/>
-            <a:r>
-              <a:rPr sz="1500" b="0">
-                <a:solidFill>
-                  <a:srgbClr val="2C3E50"/>
-                </a:solidFill>
-                <a:latin typeface="Calibri"/>
-              </a:rPr>
-              <a:t>Las redes convolucionales aprenden esas K. El álgebra es la de las diapositivas 8–13.</a:t>
-            </a:r>
-          </a:p>
-        </p:txBody>
-      </p:sp>
-    </p:spTree>
-  </p:cSld>
-  <p:clrMapOvr>
-    <a:masterClrMapping/>
-  </p:clrMapOvr>
-</p:sld>
-</file>
-
-<file path=ppt/slides/slide18.xml><?xml version="1.0" encoding="utf-8"?>
-<p:sld xmlns:a="http://schemas.openxmlformats.org/drawingml/2006/main" xmlns:p="http://schemas.openxmlformats.org/presentationml/2006/main" xmlns:r="http://schemas.openxmlformats.org/officeDocument/2006/relationships">
-  <p:cSld>
-    <p:spTree>
-      <p:nvGrpSpPr>
-        <p:cNvPr id="1" name=""/>
-        <p:cNvGrpSpPr/>
-        <p:nvPr/>
-      </p:nvGrpSpPr>
-      <p:grpSpPr/>
-      <p:sp>
-        <p:nvSpPr>
-          <p:cNvPr id="2" name="Rectangle 1"/>
-          <p:cNvSpPr/>
-          <p:nvPr/>
-        </p:nvSpPr>
-        <p:spPr>
-          <a:xfrm>
-            <a:off x="0" y="0"/>
-            <a:ext cx="12191999" cy="6858000"/>
-          </a:xfrm>
-          <a:prstGeom prst="rect">
-            <a:avLst/>
-          </a:prstGeom>
-          <a:solidFill>
-            <a:srgbClr val="FFFFFF"/>
-          </a:solidFill>
-          <a:ln>
-            <a:noFill/>
-          </a:ln>
-        </p:spPr>
-        <p:style>
-          <a:lnRef idx="1">
-            <a:schemeClr val="accent1"/>
-          </a:lnRef>
-          <a:fillRef idx="3">
-            <a:schemeClr val="accent1"/>
-          </a:fillRef>
-          <a:effectRef idx="2">
-            <a:schemeClr val="accent1"/>
-          </a:effectRef>
-          <a:fontRef idx="minor">
-            <a:schemeClr val="lt1"/>
-          </a:fontRef>
-        </p:style>
-        <p:txBody>
-          <a:bodyPr rtlCol="0" anchor="ctr"/>
-          <a:lstStyle/>
-          <a:p>
-            <a:pPr algn="ctr"/>
-          </a:p>
-        </p:txBody>
-      </p:sp>
-      <p:sp>
-        <p:nvSpPr>
-          <p:cNvPr id="3" name="Rectangle 2"/>
-          <p:cNvSpPr/>
-          <p:nvPr/>
-        </p:nvSpPr>
-        <p:spPr>
-          <a:xfrm>
-            <a:off x="0" y="0"/>
-            <a:ext cx="109728" cy="6858000"/>
-          </a:xfrm>
-          <a:prstGeom prst="rect">
-            <a:avLst/>
-          </a:prstGeom>
-          <a:solidFill>
-            <a:srgbClr val="E8B93A"/>
-          </a:solidFill>
-          <a:ln>
-            <a:noFill/>
-          </a:ln>
-        </p:spPr>
-        <p:style>
-          <a:lnRef idx="1">
-            <a:schemeClr val="accent1"/>
-          </a:lnRef>
-          <a:fillRef idx="3">
-            <a:schemeClr val="accent1"/>
-          </a:fillRef>
-          <a:effectRef idx="2">
-            <a:schemeClr val="accent1"/>
-          </a:effectRef>
-          <a:fontRef idx="minor">
-            <a:schemeClr val="lt1"/>
-          </a:fontRef>
-        </p:style>
-        <p:txBody>
-          <a:bodyPr rtlCol="0" anchor="ctr"/>
-          <a:lstStyle/>
-          <a:p>
-            <a:pPr algn="ctr"/>
-          </a:p>
-        </p:txBody>
-      </p:sp>
-      <p:sp>
-        <p:nvSpPr>
-          <p:cNvPr id="4" name="Rectangle 3"/>
-          <p:cNvSpPr/>
-          <p:nvPr/>
-        </p:nvSpPr>
-        <p:spPr>
-          <a:xfrm>
-            <a:off x="0" y="6510528"/>
-            <a:ext cx="12191999" cy="347472"/>
-          </a:xfrm>
-          <a:prstGeom prst="rect">
-            <a:avLst/>
-          </a:prstGeom>
-          <a:solidFill>
-            <a:srgbClr val="0F2C59"/>
-          </a:solidFill>
-          <a:ln>
-            <a:noFill/>
-          </a:ln>
-        </p:spPr>
-        <p:style>
-          <a:lnRef idx="1">
-            <a:schemeClr val="accent1"/>
-          </a:lnRef>
-          <a:fillRef idx="3">
-            <a:schemeClr val="accent1"/>
-          </a:fillRef>
-          <a:effectRef idx="2">
-            <a:schemeClr val="accent1"/>
-          </a:effectRef>
-          <a:fontRef idx="minor">
-            <a:schemeClr val="lt1"/>
-          </a:fontRef>
-        </p:style>
-        <p:txBody>
-          <a:bodyPr rtlCol="0" anchor="ctr"/>
-          <a:lstStyle/>
-          <a:p>
-            <a:pPr algn="ctr"/>
-          </a:p>
-        </p:txBody>
-      </p:sp>
-      <p:sp>
-        <p:nvSpPr>
-          <p:cNvPr id="5" name="TextBox 4"/>
-          <p:cNvSpPr txBox="1"/>
-          <p:nvPr/>
-        </p:nvSpPr>
-        <p:spPr>
-          <a:xfrm>
-            <a:off x="457200" y="6528816"/>
-            <a:ext cx="9144000" cy="292608"/>
-          </a:xfrm>
-          <a:prstGeom prst="rect">
-            <a:avLst/>
-          </a:prstGeom>
-          <a:noFill/>
-        </p:spPr>
-        <p:txBody>
-          <a:bodyPr wrap="square" anchor="ctr">
-            <a:spAutoFit/>
-          </a:bodyPr>
-          <a:lstStyle/>
-          <a:p>
-            <a:pPr algn="l"/>
-            <a:r>
-              <a:rPr sz="1100" b="0">
-                <a:solidFill>
-                  <a:srgbClr val="FFFFFF"/>
-                </a:solidFill>
-                <a:latin typeface="Calibri"/>
-              </a:rPr>
-              <a:t>Curso de Inteligencia Artificial  ·  Visión computacional</a:t>
-            </a:r>
-          </a:p>
-        </p:txBody>
-      </p:sp>
-      <p:sp>
-        <p:nvSpPr>
-          <p:cNvPr id="6" name="TextBox 5"/>
-          <p:cNvSpPr txBox="1"/>
-          <p:nvPr/>
-        </p:nvSpPr>
-        <p:spPr>
-          <a:xfrm>
-            <a:off x="10378440" y="6528816"/>
-            <a:ext cx="1371600" cy="292608"/>
-          </a:xfrm>
-          <a:prstGeom prst="rect">
-            <a:avLst/>
-          </a:prstGeom>
-          <a:noFill/>
-        </p:spPr>
-        <p:txBody>
-          <a:bodyPr wrap="square" anchor="ctr">
-            <a:spAutoFit/>
-          </a:bodyPr>
-          <a:lstStyle/>
-          <a:p>
-            <a:pPr algn="r"/>
-            <a:r>
-              <a:rPr sz="1100" b="0">
-                <a:solidFill>
-                  <a:srgbClr val="FFFFFF"/>
-                </a:solidFill>
-                <a:latin typeface="Calibri"/>
-              </a:rPr>
-              <a:t>18 / 18</a:t>
-            </a:r>
-          </a:p>
-        </p:txBody>
-      </p:sp>
-      <p:sp>
-        <p:nvSpPr>
-          <p:cNvPr id="7" name="TextBox 6"/>
-          <p:cNvSpPr txBox="1"/>
-          <p:nvPr/>
-        </p:nvSpPr>
-        <p:spPr>
-          <a:xfrm>
-            <a:off x="502920" y="256032"/>
-            <a:ext cx="11155680" cy="502920"/>
-          </a:xfrm>
-          <a:prstGeom prst="rect">
-            <a:avLst/>
-          </a:prstGeom>
-          <a:noFill/>
-        </p:spPr>
-        <p:txBody>
-          <a:bodyPr wrap="square" anchor="ctr">
-            <a:spAutoFit/>
-          </a:bodyPr>
-          <a:lstStyle/>
-          <a:p>
-            <a:pPr algn="l"/>
-            <a:r>
-              <a:rPr sz="2800" b="1">
-                <a:solidFill>
-                  <a:srgbClr val="0F2C59"/>
-                </a:solidFill>
-                <a:latin typeface="Calibri"/>
-              </a:rPr>
-              <a:t>Antes de decir que «el programa ya ve»</a:t>
-            </a:r>
-          </a:p>
-        </p:txBody>
-      </p:sp>
-      <p:sp>
-        <p:nvSpPr>
-          <p:cNvPr id="8" name="Rectangle 7"/>
-          <p:cNvSpPr/>
-          <p:nvPr/>
-        </p:nvSpPr>
-        <p:spPr>
-          <a:xfrm>
-            <a:off x="502920" y="804672"/>
-            <a:ext cx="1280160" cy="54864"/>
-          </a:xfrm>
-          <a:prstGeom prst="rect">
-            <a:avLst/>
-          </a:prstGeom>
-          <a:solidFill>
-            <a:srgbClr val="E8B93A"/>
-          </a:solidFill>
-          <a:ln>
-            <a:noFill/>
-          </a:ln>
-        </p:spPr>
-        <p:style>
-          <a:lnRef idx="1">
-            <a:schemeClr val="accent1"/>
-          </a:lnRef>
-          <a:fillRef idx="3">
-            <a:schemeClr val="accent1"/>
-          </a:fillRef>
-          <a:effectRef idx="2">
-            <a:schemeClr val="accent1"/>
-          </a:effectRef>
-          <a:fontRef idx="minor">
-            <a:schemeClr val="lt1"/>
-          </a:fontRef>
-        </p:style>
-        <p:txBody>
-          <a:bodyPr rtlCol="0" anchor="ctr"/>
-          <a:lstStyle/>
-          <a:p>
-            <a:pPr algn="ctr"/>
-          </a:p>
-        </p:txBody>
-      </p:sp>
-      <p:sp>
-        <p:nvSpPr>
-          <p:cNvPr id="9" name="TextBox 8"/>
-          <p:cNvSpPr txBox="1"/>
-          <p:nvPr/>
-        </p:nvSpPr>
-        <p:spPr>
-          <a:xfrm>
-            <a:off x="502920" y="932688"/>
-            <a:ext cx="11155680" cy="365760"/>
-          </a:xfrm>
-          <a:prstGeom prst="rect">
-            <a:avLst/>
-          </a:prstGeom>
-          <a:noFill/>
-        </p:spPr>
-        <p:txBody>
-          <a:bodyPr wrap="square" anchor="ctr">
-            <a:spAutoFit/>
-          </a:bodyPr>
-          <a:lstStyle/>
-          <a:p>
-            <a:pPr algn="l"/>
-            <a:r>
-              <a:rPr sz="1600" b="0">
-                <a:solidFill>
-                  <a:srgbClr val="5D6D7E"/>
-                </a:solidFill>
-                <a:latin typeface="Calibri"/>
-              </a:rPr>
-              <a:t>Una lista corta. Si varias son no, aún estás en píxeles, no en objetos</a:t>
-            </a:r>
-          </a:p>
-        </p:txBody>
-      </p:sp>
-      <p:sp>
-        <p:nvSpPr>
-          <p:cNvPr id="10" name="Rounded Rectangle 9"/>
-          <p:cNvSpPr/>
-          <p:nvPr/>
-        </p:nvSpPr>
-        <p:spPr>
-          <a:xfrm>
-            <a:off x="502920" y="1417320"/>
-            <a:ext cx="11155680" cy="4617720"/>
-          </a:xfrm>
-          <a:prstGeom prst="roundRect">
-            <a:avLst>
-              <a:gd name="adj" fmla="val 10000"/>
-            </a:avLst>
-          </a:prstGeom>
-          <a:solidFill>
-            <a:srgbClr val="F6F8FB"/>
-          </a:solidFill>
-          <a:ln w="15875">
-            <a:solidFill>
-              <a:srgbClr val="D5DEE8"/>
-            </a:solidFill>
-          </a:ln>
-        </p:spPr>
-        <p:style>
-          <a:lnRef idx="1">
-            <a:schemeClr val="accent1"/>
-          </a:lnRef>
-          <a:fillRef idx="3">
-            <a:schemeClr val="accent1"/>
-          </a:fillRef>
-          <a:effectRef idx="2">
-            <a:schemeClr val="accent1"/>
-          </a:effectRef>
-          <a:fontRef idx="minor">
-            <a:schemeClr val="lt1"/>
-          </a:fontRef>
-        </p:style>
-        <p:txBody>
-          <a:bodyPr rtlCol="0" anchor="ctr"/>
-          <a:lstStyle/>
-          <a:p>
-            <a:pPr algn="ctr"/>
-          </a:p>
-        </p:txBody>
-      </p:sp>
-      <p:sp>
-        <p:nvSpPr>
-          <p:cNvPr id="11" name="TextBox 10"/>
-          <p:cNvSpPr txBox="1"/>
-          <p:nvPr/>
-        </p:nvSpPr>
-        <p:spPr>
-          <a:xfrm>
-            <a:off x="822960" y="1691640"/>
-            <a:ext cx="10515600" cy="4114800"/>
-          </a:xfrm>
-          <a:prstGeom prst="rect">
-            <a:avLst/>
-          </a:prstGeom>
-          <a:noFill/>
-        </p:spPr>
-        <p:txBody>
-          <a:bodyPr wrap="square" anchor="t">
-            <a:spAutoFit/>
-          </a:bodyPr>
-          <a:lstStyle/>
-          <a:p>
-            <a:pPr>
-              <a:spcAft>
-                <a:spcPts val="1100"/>
-              </a:spcAft>
-            </a:pPr>
-            <a:r>
-              <a:rPr sz="1700" b="0">
-                <a:solidFill>
-                  <a:srgbClr val="2C3E50"/>
-                </a:solidFill>
-                <a:latin typeface="Calibri"/>
-              </a:rPr>
-              <a:t>•  ¿Puedes escribir I[i, j] de un parche 5×5 y aplicar un 3×3 a mano?</a:t>
-            </a:r>
-          </a:p>
-          <a:p>
-            <a:pPr>
-              <a:spcAft>
-                <a:spcPts val="1100"/>
-              </a:spcAft>
-            </a:pPr>
-            <a:r>
-              <a:rPr sz="1700" b="0">
-                <a:solidFill>
-                  <a:srgbClr val="2C3E50"/>
-                </a:solidFill>
-                <a:latin typeface="Calibri"/>
-              </a:rPr>
-              <a:t>•  ¿El filtro que usas es el mismo en toda la imagen (convolución) o un umbral global disfrazado?</a:t>
-            </a:r>
-          </a:p>
-          <a:p>
-            <a:pPr>
-              <a:spcAft>
-                <a:spcPts val="1100"/>
-              </a:spcAft>
-            </a:pPr>
-            <a:r>
-              <a:rPr sz="1700" b="0">
-                <a:solidFill>
-                  <a:srgbClr val="2C3E50"/>
-                </a:solidFill>
-                <a:latin typeface="Calibri"/>
-              </a:rPr>
-              <a:t>•  ¿El borde que dibujas cambia si subes o bajas la luz? Entonces el umbral no es un objeto.</a:t>
-            </a:r>
-          </a:p>
-          <a:p>
-            <a:pPr>
-              <a:spcAft>
-                <a:spcPts val="1100"/>
-              </a:spcAft>
-            </a:pPr>
-            <a:r>
-              <a:rPr sz="1700" b="0">
-                <a:solidFill>
-                  <a:srgbClr val="2C3E50"/>
-                </a:solidFill>
-                <a:latin typeface="Calibri"/>
-              </a:rPr>
-              <a:t>•  ¿Separaste R, G, B o pasaste a gris de forma explícita?</a:t>
-            </a:r>
-          </a:p>
-          <a:p>
-            <a:pPr>
-              <a:spcAft>
-                <a:spcPts val="1100"/>
-              </a:spcAft>
-            </a:pPr>
-            <a:r>
-              <a:rPr sz="1700" b="0">
-                <a:solidFill>
-                  <a:srgbClr val="2C3E50"/>
-                </a:solidFill>
-                <a:latin typeface="Calibri"/>
-              </a:rPr>
-              <a:t>•  Si usas una red: ¿podrías decir cuál es el kernel 3×3 análogo a Sobel en la primera capa?</a:t>
-            </a:r>
-          </a:p>
-          <a:p>
-            <a:pPr>
-              <a:spcAft>
-                <a:spcPts val="1100"/>
-              </a:spcAft>
-            </a:pPr>
-            <a:r>
-              <a:rPr sz="1700" b="0">
-                <a:solidFill>
-                  <a:srgbClr val="2C3E50"/>
-                </a:solidFill>
-                <a:latin typeface="Calibri"/>
-              </a:rPr>
-              <a:t>•  Oclusión, escala y rotación rompen plantillas. No es un bug de tu código: es el problema.</a:t>
             </a:r>
           </a:p>
         </p:txBody>
@@ -8889,7 +5510,7 @@
 </file>
 
 <file path=ppt/slides/slide2.xml><?xml version="1.0" encoding="utf-8"?>
-<p:sld xmlns:a="http://schemas.openxmlformats.org/drawingml/2006/main" xmlns:p="http://schemas.openxmlformats.org/presentationml/2006/main" xmlns:r="http://schemas.openxmlformats.org/officeDocument/2006/relationships">
+<p:sld xmlns:a="http://schemas.openxmlformats.org/drawingml/2006/main" xmlns:r="http://schemas.openxmlformats.org/officeDocument/2006/relationships" xmlns:p="http://schemas.openxmlformats.org/presentationml/2006/main">
   <p:cSld>
     <p:spTree>
       <p:nvGrpSpPr>
@@ -8897,7 +5518,14 @@
         <p:cNvGrpSpPr/>
         <p:nvPr/>
       </p:nvGrpSpPr>
-      <p:grpSpPr/>
+      <p:grpSpPr>
+        <a:xfrm>
+          <a:off x="0" y="0"/>
+          <a:ext cx="0" cy="0"/>
+          <a:chOff x="0" y="0"/>
+          <a:chExt cx="0" cy="0"/>
+        </a:xfrm>
+      </p:grpSpPr>
       <p:sp>
         <p:nvSpPr>
           <p:cNvPr id="2" name="Rectangle 1"/>
@@ -8938,6 +5566,7 @@
           <a:lstStyle/>
           <a:p>
             <a:pPr algn="ctr"/>
+            <a:endParaRPr/>
           </a:p>
         </p:txBody>
       </p:sp>
@@ -8981,6 +5610,7 @@
           <a:lstStyle/>
           <a:p>
             <a:pPr algn="ctr"/>
+            <a:endParaRPr/>
           </a:p>
         </p:txBody>
       </p:sp>
@@ -9024,6 +5654,7 @@
           <a:lstStyle/>
           <a:p>
             <a:pPr algn="ctr"/>
+            <a:endParaRPr/>
           </a:p>
         </p:txBody>
       </p:sp>
@@ -9070,8 +5701,8 @@
         </p:nvSpPr>
         <p:spPr>
           <a:xfrm>
-            <a:off x="10378440" y="6528816"/>
-            <a:ext cx="1371600" cy="292608"/>
+            <a:off x="10378440" y="6544315"/>
+            <a:ext cx="1371600" cy="261610"/>
           </a:xfrm>
           <a:prstGeom prst="rect">
             <a:avLst/>
@@ -9086,14 +5717,29 @@
           <a:p>
             <a:pPr algn="r"/>
             <a:r>
-              <a:rPr sz="1100" b="0">
+              <a:rPr sz="1100" b="0" dirty="0">
                 <a:solidFill>
                   <a:srgbClr val="FFFFFF"/>
                 </a:solidFill>
                 <a:latin typeface="Calibri"/>
               </a:rPr>
-              <a:t>2 / 18</a:t>
-            </a:r>
+              <a:t>2 / </a:t>
+            </a:r>
+            <a:r>
+              <a:rPr lang="es-419" sz="1100" dirty="0">
+                <a:solidFill>
+                  <a:srgbClr val="FFFFFF"/>
+                </a:solidFill>
+                <a:latin typeface="Calibri"/>
+              </a:rPr>
+              <a:t>13</a:t>
+            </a:r>
+            <a:endParaRPr sz="1100" b="0" dirty="0">
+              <a:solidFill>
+                <a:srgbClr val="FFFFFF"/>
+              </a:solidFill>
+              <a:latin typeface="Calibri"/>
+            </a:endParaRPr>
           </a:p>
         </p:txBody>
       </p:sp>
@@ -9172,6 +5818,7 @@
           <a:lstStyle/>
           <a:p>
             <a:pPr algn="ctr"/>
+            <a:endParaRPr/>
           </a:p>
         </p:txBody>
       </p:sp>
@@ -9219,6 +5866,7 @@
           <a:lstStyle/>
           <a:p>
             <a:pPr algn="ctr"/>
+            <a:endParaRPr/>
           </a:p>
         </p:txBody>
       </p:sp>
@@ -9371,6 +6019,7 @@
           <a:lstStyle/>
           <a:p>
             <a:pPr algn="ctr"/>
+            <a:endParaRPr/>
           </a:p>
         </p:txBody>
       </p:sp>
@@ -9523,6 +6172,7 @@
           <a:lstStyle/>
           <a:p>
             <a:pPr algn="ctr"/>
+            <a:endParaRPr/>
           </a:p>
         </p:txBody>
       </p:sp>
@@ -9627,158 +6277,6 @@
                 <a:latin typeface="Calibri"/>
               </a:rPr>
               <a:t>Un borde es un salto de intensidad. Sobel estima ese salto.</a:t>
-            </a:r>
-          </a:p>
-        </p:txBody>
-      </p:sp>
-      <p:sp>
-        <p:nvSpPr>
-          <p:cNvPr id="21" name="Rounded Rectangle 20"/>
-          <p:cNvSpPr/>
-          <p:nvPr/>
-        </p:nvSpPr>
-        <p:spPr>
-          <a:xfrm>
-            <a:off x="6355080" y="3840480"/>
-            <a:ext cx="5349240" cy="2148840"/>
-          </a:xfrm>
-          <a:prstGeom prst="roundRect">
-            <a:avLst>
-              <a:gd name="adj" fmla="val 10000"/>
-            </a:avLst>
-          </a:prstGeom>
-          <a:solidFill>
-            <a:srgbClr val="F6F8FB"/>
-          </a:solidFill>
-          <a:ln w="15875">
-            <a:solidFill>
-              <a:srgbClr val="D5DEE8"/>
-            </a:solidFill>
-          </a:ln>
-        </p:spPr>
-        <p:style>
-          <a:lnRef idx="1">
-            <a:schemeClr val="accent1"/>
-          </a:lnRef>
-          <a:fillRef idx="3">
-            <a:schemeClr val="accent1"/>
-          </a:fillRef>
-          <a:effectRef idx="2">
-            <a:schemeClr val="accent1"/>
-          </a:effectRef>
-          <a:fontRef idx="minor">
-            <a:schemeClr val="lt1"/>
-          </a:fontRef>
-        </p:style>
-        <p:txBody>
-          <a:bodyPr rtlCol="0" anchor="ctr"/>
-          <a:lstStyle/>
-          <a:p>
-            <a:pPr algn="ctr"/>
-          </a:p>
-        </p:txBody>
-      </p:sp>
-      <p:sp>
-        <p:nvSpPr>
-          <p:cNvPr id="22" name="TextBox 21"/>
-          <p:cNvSpPr txBox="1"/>
-          <p:nvPr/>
-        </p:nvSpPr>
-        <p:spPr>
-          <a:xfrm>
-            <a:off x="6556248" y="4005072"/>
-            <a:ext cx="4946904" cy="292608"/>
-          </a:xfrm>
-          <a:prstGeom prst="rect">
-            <a:avLst/>
-          </a:prstGeom>
-          <a:noFill/>
-        </p:spPr>
-        <p:txBody>
-          <a:bodyPr wrap="square" anchor="t">
-            <a:spAutoFit/>
-          </a:bodyPr>
-          <a:lstStyle/>
-          <a:p>
-            <a:pPr algn="l"/>
-            <a:r>
-              <a:rPr sz="1300" b="1">
-                <a:solidFill>
-                  <a:srgbClr val="1B6CA8"/>
-                </a:solidFill>
-                <a:latin typeface="Calibri"/>
-              </a:rPr>
-              <a:t>04</a:t>
-            </a:r>
-          </a:p>
-        </p:txBody>
-      </p:sp>
-      <p:sp>
-        <p:nvSpPr>
-          <p:cNvPr id="23" name="TextBox 22"/>
-          <p:cNvSpPr txBox="1"/>
-          <p:nvPr/>
-        </p:nvSpPr>
-        <p:spPr>
-          <a:xfrm>
-            <a:off x="6556248" y="4279392"/>
-            <a:ext cx="4946904" cy="502920"/>
-          </a:xfrm>
-          <a:prstGeom prst="rect">
-            <a:avLst/>
-          </a:prstGeom>
-          <a:noFill/>
-        </p:spPr>
-        <p:txBody>
-          <a:bodyPr wrap="square" anchor="t">
-            <a:spAutoFit/>
-          </a:bodyPr>
-          <a:lstStyle/>
-          <a:p>
-            <a:pPr algn="l"/>
-            <a:r>
-              <a:rPr sz="1800" b="1">
-                <a:solidFill>
-                  <a:srgbClr val="0F2C59"/>
-                </a:solidFill>
-                <a:latin typeface="Calibri"/>
-              </a:rPr>
-              <a:t>Después</a:t>
-            </a:r>
-          </a:p>
-        </p:txBody>
-      </p:sp>
-      <p:sp>
-        <p:nvSpPr>
-          <p:cNvPr id="24" name="TextBox 23"/>
-          <p:cNvSpPr txBox="1"/>
-          <p:nvPr/>
-        </p:nvSpPr>
-        <p:spPr>
-          <a:xfrm>
-            <a:off x="6556248" y="4828032"/>
-            <a:ext cx="4946904" cy="978408"/>
-          </a:xfrm>
-          <a:prstGeom prst="rect">
-            <a:avLst/>
-          </a:prstGeom>
-          <a:noFill/>
-        </p:spPr>
-        <p:txBody>
-          <a:bodyPr wrap="square" anchor="t">
-            <a:spAutoFit/>
-          </a:bodyPr>
-          <a:lstStyle/>
-          <a:p>
-            <a:pPr algn="l"/>
-            <a:r>
-              <a:rPr sz="1400" b="0">
-                <a:solidFill>
-                  <a:srgbClr val="2C3E50"/>
-                </a:solidFill>
-                <a:latin typeface="Calibri"/>
-              </a:rPr>
-              <a:t>Umbral, formas, y —hoy— kernels que se aprenden de ejemplos.</a:t>
             </a:r>
           </a:p>
         </p:txBody>
@@ -9792,7 +6290,7 @@
 </file>
 
 <file path=ppt/slides/slide3.xml><?xml version="1.0" encoding="utf-8"?>
-<p:sld xmlns:a="http://schemas.openxmlformats.org/drawingml/2006/main" xmlns:p="http://schemas.openxmlformats.org/presentationml/2006/main" xmlns:r="http://schemas.openxmlformats.org/officeDocument/2006/relationships">
+<p:sld xmlns:a="http://schemas.openxmlformats.org/drawingml/2006/main" xmlns:r="http://schemas.openxmlformats.org/officeDocument/2006/relationships" xmlns:p="http://schemas.openxmlformats.org/presentationml/2006/main">
   <p:cSld>
     <p:spTree>
       <p:nvGrpSpPr>
@@ -9800,7 +6298,14 @@
         <p:cNvGrpSpPr/>
         <p:nvPr/>
       </p:nvGrpSpPr>
-      <p:grpSpPr/>
+      <p:grpSpPr>
+        <a:xfrm>
+          <a:off x="0" y="0"/>
+          <a:ext cx="0" cy="0"/>
+          <a:chOff x="0" y="0"/>
+          <a:chExt cx="0" cy="0"/>
+        </a:xfrm>
+      </p:grpSpPr>
       <p:sp>
         <p:nvSpPr>
           <p:cNvPr id="2" name="Rectangle 1"/>
@@ -9841,6 +6346,7 @@
           <a:lstStyle/>
           <a:p>
             <a:pPr algn="ctr"/>
+            <a:endParaRPr/>
           </a:p>
         </p:txBody>
       </p:sp>
@@ -9884,6 +6390,7 @@
           <a:lstStyle/>
           <a:p>
             <a:pPr algn="ctr"/>
+            <a:endParaRPr/>
           </a:p>
         </p:txBody>
       </p:sp>
@@ -9927,6 +6434,7 @@
           <a:lstStyle/>
           <a:p>
             <a:pPr algn="ctr"/>
+            <a:endParaRPr/>
           </a:p>
         </p:txBody>
       </p:sp>
@@ -9973,8 +6481,8 @@
         </p:nvSpPr>
         <p:spPr>
           <a:xfrm>
-            <a:off x="10378440" y="6528816"/>
-            <a:ext cx="1371600" cy="292608"/>
+            <a:off x="10378440" y="6544315"/>
+            <a:ext cx="1371600" cy="261610"/>
           </a:xfrm>
           <a:prstGeom prst="rect">
             <a:avLst/>
@@ -9989,14 +6497,29 @@
           <a:p>
             <a:pPr algn="r"/>
             <a:r>
-              <a:rPr sz="1100" b="0">
+              <a:rPr sz="1100" b="0" dirty="0">
                 <a:solidFill>
                   <a:srgbClr val="FFFFFF"/>
                 </a:solidFill>
                 <a:latin typeface="Calibri"/>
               </a:rPr>
-              <a:t>3 / 18</a:t>
-            </a:r>
+              <a:t>3 / 1</a:t>
+            </a:r>
+            <a:r>
+              <a:rPr lang="es-419" sz="1100" b="0" dirty="0">
+                <a:solidFill>
+                  <a:srgbClr val="FFFFFF"/>
+                </a:solidFill>
+                <a:latin typeface="Calibri"/>
+              </a:rPr>
+              <a:t>3</a:t>
+            </a:r>
+            <a:endParaRPr sz="1100" b="0" dirty="0">
+              <a:solidFill>
+                <a:srgbClr val="FFFFFF"/>
+              </a:solidFill>
+              <a:latin typeface="Calibri"/>
+            </a:endParaRPr>
           </a:p>
         </p:txBody>
       </p:sp>
@@ -10075,6 +6598,7 @@
           <a:lstStyle/>
           <a:p>
             <a:pPr algn="ctr"/>
+            <a:endParaRPr/>
           </a:p>
         </p:txBody>
       </p:sp>
@@ -10157,6 +6681,7 @@
           <a:lstStyle/>
           <a:p>
             <a:pPr algn="ctr"/>
+            <a:endParaRPr/>
           </a:p>
         </p:txBody>
       </p:sp>
@@ -10296,7 +6821,7 @@
 </file>
 
 <file path=ppt/slides/slide4.xml><?xml version="1.0" encoding="utf-8"?>
-<p:sld xmlns:a="http://schemas.openxmlformats.org/drawingml/2006/main" xmlns:p="http://schemas.openxmlformats.org/presentationml/2006/main" xmlns:r="http://schemas.openxmlformats.org/officeDocument/2006/relationships">
+<p:sld xmlns:a="http://schemas.openxmlformats.org/drawingml/2006/main" xmlns:r="http://schemas.openxmlformats.org/officeDocument/2006/relationships" xmlns:p="http://schemas.openxmlformats.org/presentationml/2006/main">
   <p:cSld>
     <p:spTree>
       <p:nvGrpSpPr>
@@ -10304,7 +6829,14 @@
         <p:cNvGrpSpPr/>
         <p:nvPr/>
       </p:nvGrpSpPr>
-      <p:grpSpPr/>
+      <p:grpSpPr>
+        <a:xfrm>
+          <a:off x="0" y="0"/>
+          <a:ext cx="0" cy="0"/>
+          <a:chOff x="0" y="0"/>
+          <a:chExt cx="0" cy="0"/>
+        </a:xfrm>
+      </p:grpSpPr>
       <p:sp>
         <p:nvSpPr>
           <p:cNvPr id="2" name="Rectangle 1"/>
@@ -10345,6 +6877,7 @@
           <a:lstStyle/>
           <a:p>
             <a:pPr algn="ctr"/>
+            <a:endParaRPr/>
           </a:p>
         </p:txBody>
       </p:sp>
@@ -10388,6 +6921,7 @@
           <a:lstStyle/>
           <a:p>
             <a:pPr algn="ctr"/>
+            <a:endParaRPr/>
           </a:p>
         </p:txBody>
       </p:sp>
@@ -10431,6 +6965,7 @@
           <a:lstStyle/>
           <a:p>
             <a:pPr algn="ctr"/>
+            <a:endParaRPr/>
           </a:p>
         </p:txBody>
       </p:sp>
@@ -10477,8 +7012,8 @@
         </p:nvSpPr>
         <p:spPr>
           <a:xfrm>
-            <a:off x="10378440" y="6528816"/>
-            <a:ext cx="1371600" cy="292608"/>
+            <a:off x="10378440" y="6544315"/>
+            <a:ext cx="1371600" cy="261610"/>
           </a:xfrm>
           <a:prstGeom prst="rect">
             <a:avLst/>
@@ -10493,14 +7028,29 @@
           <a:p>
             <a:pPr algn="r"/>
             <a:r>
-              <a:rPr sz="1100" b="0">
+              <a:rPr sz="1100" b="0" dirty="0">
                 <a:solidFill>
                   <a:srgbClr val="FFFFFF"/>
                 </a:solidFill>
                 <a:latin typeface="Calibri"/>
               </a:rPr>
-              <a:t>4 / 18</a:t>
-            </a:r>
+              <a:t>4 / 1</a:t>
+            </a:r>
+            <a:r>
+              <a:rPr lang="es-419" sz="1100" b="0" dirty="0">
+                <a:solidFill>
+                  <a:srgbClr val="FFFFFF"/>
+                </a:solidFill>
+                <a:latin typeface="Calibri"/>
+              </a:rPr>
+              <a:t>3</a:t>
+            </a:r>
+            <a:endParaRPr sz="1100" b="0" dirty="0">
+              <a:solidFill>
+                <a:srgbClr val="FFFFFF"/>
+              </a:solidFill>
+              <a:latin typeface="Calibri"/>
+            </a:endParaRPr>
           </a:p>
         </p:txBody>
       </p:sp>
@@ -10579,6 +7129,7 @@
           <a:lstStyle/>
           <a:p>
             <a:pPr algn="ctr"/>
+            <a:endParaRPr/>
           </a:p>
         </p:txBody>
       </p:sp>
@@ -10685,6 +7236,7 @@
           <a:lstStyle/>
           <a:p>
             <a:pPr algn="ctr"/>
+            <a:endParaRPr/>
           </a:p>
         </p:txBody>
       </p:sp>
@@ -10800,7 +7352,7 @@
 </file>
 
 <file path=ppt/slides/slide5.xml><?xml version="1.0" encoding="utf-8"?>
-<p:sld xmlns:a="http://schemas.openxmlformats.org/drawingml/2006/main" xmlns:p="http://schemas.openxmlformats.org/presentationml/2006/main" xmlns:r="http://schemas.openxmlformats.org/officeDocument/2006/relationships">
+<p:sld xmlns:a="http://schemas.openxmlformats.org/drawingml/2006/main" xmlns:r="http://schemas.openxmlformats.org/officeDocument/2006/relationships" xmlns:p="http://schemas.openxmlformats.org/presentationml/2006/main">
   <p:cSld>
     <p:spTree>
       <p:nvGrpSpPr>
@@ -10808,7 +7360,14 @@
         <p:cNvGrpSpPr/>
         <p:nvPr/>
       </p:nvGrpSpPr>
-      <p:grpSpPr/>
+      <p:grpSpPr>
+        <a:xfrm>
+          <a:off x="0" y="0"/>
+          <a:ext cx="0" cy="0"/>
+          <a:chOff x="0" y="0"/>
+          <a:chExt cx="0" cy="0"/>
+        </a:xfrm>
+      </p:grpSpPr>
       <p:sp>
         <p:nvSpPr>
           <p:cNvPr id="2" name="Rectangle 1"/>
@@ -10849,6 +7408,7 @@
           <a:lstStyle/>
           <a:p>
             <a:pPr algn="ctr"/>
+            <a:endParaRPr/>
           </a:p>
         </p:txBody>
       </p:sp>
@@ -10892,6 +7452,7 @@
           <a:lstStyle/>
           <a:p>
             <a:pPr algn="ctr"/>
+            <a:endParaRPr/>
           </a:p>
         </p:txBody>
       </p:sp>
@@ -10935,6 +7496,7 @@
           <a:lstStyle/>
           <a:p>
             <a:pPr algn="ctr"/>
+            <a:endParaRPr/>
           </a:p>
         </p:txBody>
       </p:sp>
@@ -10981,8 +7543,8 @@
         </p:nvSpPr>
         <p:spPr>
           <a:xfrm>
-            <a:off x="10378440" y="6528816"/>
-            <a:ext cx="1371600" cy="292608"/>
+            <a:off x="10378440" y="6544315"/>
+            <a:ext cx="1371600" cy="261610"/>
           </a:xfrm>
           <a:prstGeom prst="rect">
             <a:avLst/>
@@ -10997,14 +7559,29 @@
           <a:p>
             <a:pPr algn="r"/>
             <a:r>
-              <a:rPr sz="1100" b="0">
+              <a:rPr sz="1100" b="0" dirty="0">
                 <a:solidFill>
                   <a:srgbClr val="FFFFFF"/>
                 </a:solidFill>
                 <a:latin typeface="Calibri"/>
               </a:rPr>
-              <a:t>5 / 18</a:t>
-            </a:r>
+              <a:t>5 / 1</a:t>
+            </a:r>
+            <a:r>
+              <a:rPr lang="es-419" sz="1100" b="0" dirty="0">
+                <a:solidFill>
+                  <a:srgbClr val="FFFFFF"/>
+                </a:solidFill>
+                <a:latin typeface="Calibri"/>
+              </a:rPr>
+              <a:t>3</a:t>
+            </a:r>
+            <a:endParaRPr sz="1100" b="0" dirty="0">
+              <a:solidFill>
+                <a:srgbClr val="FFFFFF"/>
+              </a:solidFill>
+              <a:latin typeface="Calibri"/>
+            </a:endParaRPr>
           </a:p>
         </p:txBody>
       </p:sp>
@@ -11083,6 +7660,7 @@
           <a:lstStyle/>
           <a:p>
             <a:pPr algn="ctr"/>
+            <a:endParaRPr/>
           </a:p>
         </p:txBody>
       </p:sp>
@@ -11110,20 +7688,499 @@
           <a:p>
             <a:pPr algn="l"/>
             <a:r>
-              <a:rPr sz="1600" b="0">
+              <a:rPr b="0" dirty="0">
                 <a:solidFill>
                   <a:srgbClr val="5D6D7E"/>
                 </a:solidFill>
                 <a:latin typeface="Calibri"/>
               </a:rPr>
-              <a:t>R, G, B son intensidades en tres sensores. El color que ves es la mezcla</a:t>
+              <a:t>R, G, B son </a:t>
+            </a:r>
+            <a:r>
+              <a:rPr b="0" dirty="0" err="1">
+                <a:solidFill>
+                  <a:srgbClr val="5D6D7E"/>
+                </a:solidFill>
+                <a:latin typeface="Calibri"/>
+              </a:rPr>
+              <a:t>intensidades</a:t>
+            </a:r>
+            <a:r>
+              <a:rPr b="0" dirty="0">
+                <a:solidFill>
+                  <a:srgbClr val="5D6D7E"/>
+                </a:solidFill>
+                <a:latin typeface="Calibri"/>
+              </a:rPr>
+              <a:t> </a:t>
+            </a:r>
+            <a:r>
+              <a:rPr b="0" dirty="0" err="1">
+                <a:solidFill>
+                  <a:srgbClr val="5D6D7E"/>
+                </a:solidFill>
+                <a:latin typeface="Calibri"/>
+              </a:rPr>
+              <a:t>en</a:t>
+            </a:r>
+            <a:r>
+              <a:rPr b="0" dirty="0">
+                <a:solidFill>
+                  <a:srgbClr val="5D6D7E"/>
+                </a:solidFill>
+                <a:latin typeface="Calibri"/>
+              </a:rPr>
+              <a:t> </a:t>
+            </a:r>
+            <a:r>
+              <a:rPr b="0" dirty="0" err="1">
+                <a:solidFill>
+                  <a:srgbClr val="5D6D7E"/>
+                </a:solidFill>
+                <a:latin typeface="Calibri"/>
+              </a:rPr>
+              <a:t>tres</a:t>
+            </a:r>
+            <a:r>
+              <a:rPr b="0" dirty="0">
+                <a:solidFill>
+                  <a:srgbClr val="5D6D7E"/>
+                </a:solidFill>
+                <a:latin typeface="Calibri"/>
+              </a:rPr>
+              <a:t> </a:t>
+            </a:r>
+            <a:r>
+              <a:rPr b="0" dirty="0" err="1">
+                <a:solidFill>
+                  <a:srgbClr val="5D6D7E"/>
+                </a:solidFill>
+                <a:latin typeface="Calibri"/>
+              </a:rPr>
+              <a:t>sensores</a:t>
+            </a:r>
+            <a:r>
+              <a:rPr b="0" dirty="0">
+                <a:solidFill>
+                  <a:srgbClr val="5D6D7E"/>
+                </a:solidFill>
+                <a:latin typeface="Calibri"/>
+              </a:rPr>
+              <a:t>. El color </a:t>
+            </a:r>
+            <a:r>
+              <a:rPr b="0" dirty="0" err="1">
+                <a:solidFill>
+                  <a:srgbClr val="5D6D7E"/>
+                </a:solidFill>
+                <a:latin typeface="Calibri"/>
+              </a:rPr>
+              <a:t>que</a:t>
+            </a:r>
+            <a:r>
+              <a:rPr b="0" dirty="0">
+                <a:solidFill>
+                  <a:srgbClr val="5D6D7E"/>
+                </a:solidFill>
+                <a:latin typeface="Calibri"/>
+              </a:rPr>
+              <a:t> </a:t>
+            </a:r>
+            <a:r>
+              <a:rPr b="0" dirty="0" err="1">
+                <a:solidFill>
+                  <a:srgbClr val="5D6D7E"/>
+                </a:solidFill>
+                <a:latin typeface="Calibri"/>
+              </a:rPr>
+              <a:t>ves</a:t>
+            </a:r>
+            <a:r>
+              <a:rPr b="0" dirty="0">
+                <a:solidFill>
+                  <a:srgbClr val="5D6D7E"/>
+                </a:solidFill>
+                <a:latin typeface="Calibri"/>
+              </a:rPr>
+              <a:t> es la </a:t>
+            </a:r>
+            <a:r>
+              <a:rPr b="0" dirty="0" err="1">
+                <a:solidFill>
+                  <a:srgbClr val="5D6D7E"/>
+                </a:solidFill>
+                <a:latin typeface="Calibri"/>
+              </a:rPr>
+              <a:t>mezcla</a:t>
+            </a:r>
+            <a:endParaRPr b="0" dirty="0">
+              <a:solidFill>
+                <a:srgbClr val="5D6D7E"/>
+              </a:solidFill>
+              <a:latin typeface="Calibri"/>
+            </a:endParaRPr>
+          </a:p>
+        </p:txBody>
+      </p:sp>
+      <p:sp>
+        <p:nvSpPr>
+          <p:cNvPr id="11" name="TextBox 10"/>
+          <p:cNvSpPr txBox="1"/>
+          <p:nvPr/>
+        </p:nvSpPr>
+        <p:spPr>
+          <a:xfrm>
+            <a:off x="502920" y="2444578"/>
+            <a:ext cx="3516187" cy="3046988"/>
+          </a:xfrm>
+          <a:prstGeom prst="rect">
+            <a:avLst/>
+          </a:prstGeom>
+          <a:noFill/>
+        </p:spPr>
+        <p:txBody>
+          <a:bodyPr wrap="square" anchor="ctr">
+            <a:spAutoFit/>
+          </a:bodyPr>
+          <a:lstStyle/>
+          <a:p>
+            <a:pPr algn="l"/>
+            <a:r>
+              <a:rPr sz="2400" b="0" dirty="0">
+                <a:solidFill>
+                  <a:srgbClr val="2C3E50"/>
+                </a:solidFill>
+                <a:latin typeface="Calibri"/>
+              </a:rPr>
+              <a:t>Un </a:t>
+            </a:r>
+            <a:r>
+              <a:rPr sz="2400" b="0" dirty="0" err="1">
+                <a:solidFill>
+                  <a:srgbClr val="2C3E50"/>
+                </a:solidFill>
+                <a:latin typeface="Calibri"/>
+              </a:rPr>
+              <a:t>píxel</a:t>
+            </a:r>
+            <a:r>
+              <a:rPr sz="2400" b="0" dirty="0">
+                <a:solidFill>
+                  <a:srgbClr val="2C3E50"/>
+                </a:solidFill>
+                <a:latin typeface="Calibri"/>
+              </a:rPr>
+              <a:t> </a:t>
+            </a:r>
+            <a:r>
+              <a:rPr sz="2400" b="0" dirty="0" err="1">
+                <a:solidFill>
+                  <a:srgbClr val="2C3E50"/>
+                </a:solidFill>
+                <a:latin typeface="Calibri"/>
+              </a:rPr>
+              <a:t>en</a:t>
+            </a:r>
+            <a:r>
+              <a:rPr sz="2400" b="0" dirty="0">
+                <a:solidFill>
+                  <a:srgbClr val="2C3E50"/>
+                </a:solidFill>
+                <a:latin typeface="Calibri"/>
+              </a:rPr>
+              <a:t> color es un</a:t>
+            </a:r>
+            <a:r>
+              <a:rPr lang="es-419" sz="2400" b="0" dirty="0">
+                <a:solidFill>
+                  <a:srgbClr val="2C3E50"/>
+                </a:solidFill>
+                <a:latin typeface="Calibri"/>
+              </a:rPr>
+              <a:t>a</a:t>
+            </a:r>
+            <a:r>
+              <a:rPr sz="2400" b="0" dirty="0">
+                <a:solidFill>
+                  <a:srgbClr val="2C3E50"/>
+                </a:solidFill>
+                <a:latin typeface="Calibri"/>
+              </a:rPr>
+              <a:t> triple</a:t>
+            </a:r>
+            <a:r>
+              <a:rPr lang="es-419" sz="2400" b="0" dirty="0">
+                <a:solidFill>
+                  <a:srgbClr val="2C3E50"/>
+                </a:solidFill>
+                <a:latin typeface="Calibri"/>
+              </a:rPr>
+              <a:t>ta</a:t>
+            </a:r>
+            <a:r>
+              <a:rPr sz="2400" b="0" dirty="0">
+                <a:solidFill>
+                  <a:srgbClr val="2C3E50"/>
+                </a:solidFill>
+                <a:latin typeface="Calibri"/>
+              </a:rPr>
+              <a:t> (R, G, B), no un solo </a:t>
+            </a:r>
+            <a:r>
+              <a:rPr sz="2400" b="0" dirty="0" err="1">
+                <a:solidFill>
+                  <a:srgbClr val="2C3E50"/>
+                </a:solidFill>
+                <a:latin typeface="Calibri"/>
+              </a:rPr>
+              <a:t>número</a:t>
+            </a:r>
+            <a:r>
+              <a:rPr sz="2400" b="0" dirty="0">
+                <a:solidFill>
+                  <a:srgbClr val="2C3E50"/>
+                </a:solidFill>
+                <a:latin typeface="Calibri"/>
+              </a:rPr>
+              <a:t>. </a:t>
+            </a:r>
+            <a:endParaRPr lang="es-419" sz="2400" b="0" dirty="0">
+              <a:solidFill>
+                <a:srgbClr val="2C3E50"/>
+              </a:solidFill>
+              <a:latin typeface="Calibri"/>
+            </a:endParaRPr>
+          </a:p>
+          <a:p>
+            <a:pPr algn="l"/>
+            <a:endParaRPr lang="es-MX" sz="2400" dirty="0">
+              <a:solidFill>
+                <a:srgbClr val="2C3E50"/>
+              </a:solidFill>
+              <a:latin typeface="Calibri"/>
+            </a:endParaRPr>
+          </a:p>
+          <a:p>
+            <a:pPr algn="l"/>
+            <a:r>
+              <a:rPr sz="2400" b="0" dirty="0">
+                <a:solidFill>
+                  <a:srgbClr val="2C3E50"/>
+                </a:solidFill>
+                <a:latin typeface="Calibri"/>
+              </a:rPr>
+              <a:t>Casi </a:t>
+            </a:r>
+            <a:r>
+              <a:rPr sz="2400" b="0" dirty="0" err="1">
+                <a:solidFill>
+                  <a:srgbClr val="2C3E50"/>
+                </a:solidFill>
+                <a:latin typeface="Calibri"/>
+              </a:rPr>
+              <a:t>todos</a:t>
+            </a:r>
+            <a:r>
+              <a:rPr sz="2400" b="0" dirty="0">
+                <a:solidFill>
+                  <a:srgbClr val="2C3E50"/>
+                </a:solidFill>
+                <a:latin typeface="Calibri"/>
+              </a:rPr>
+              <a:t> </a:t>
+            </a:r>
+            <a:r>
+              <a:rPr sz="2400" b="0" dirty="0" err="1">
+                <a:solidFill>
+                  <a:srgbClr val="2C3E50"/>
+                </a:solidFill>
+                <a:latin typeface="Calibri"/>
+              </a:rPr>
+              <a:t>los</a:t>
+            </a:r>
+            <a:r>
+              <a:rPr sz="2400" b="0" dirty="0">
+                <a:solidFill>
+                  <a:srgbClr val="2C3E50"/>
+                </a:solidFill>
+                <a:latin typeface="Calibri"/>
+              </a:rPr>
+              <a:t> </a:t>
+            </a:r>
+            <a:r>
+              <a:rPr sz="2400" b="0" dirty="0" err="1">
+                <a:solidFill>
+                  <a:srgbClr val="2C3E50"/>
+                </a:solidFill>
+                <a:latin typeface="Calibri"/>
+              </a:rPr>
+              <a:t>filtros</a:t>
+            </a:r>
+            <a:r>
+              <a:rPr sz="2400" b="0" dirty="0">
+                <a:solidFill>
+                  <a:srgbClr val="2C3E50"/>
+                </a:solidFill>
+                <a:latin typeface="Calibri"/>
+              </a:rPr>
+              <a:t> se </a:t>
+            </a:r>
+            <a:r>
+              <a:rPr sz="2400" b="0" dirty="0" err="1">
+                <a:solidFill>
+                  <a:srgbClr val="2C3E50"/>
+                </a:solidFill>
+                <a:latin typeface="Calibri"/>
+              </a:rPr>
+              <a:t>aplican</a:t>
+            </a:r>
+            <a:r>
+              <a:rPr sz="2400" b="0" dirty="0">
+                <a:solidFill>
+                  <a:srgbClr val="2C3E50"/>
+                </a:solidFill>
+                <a:latin typeface="Calibri"/>
+              </a:rPr>
+              <a:t> </a:t>
+            </a:r>
+            <a:r>
+              <a:rPr sz="2400" b="0" dirty="0" err="1">
+                <a:solidFill>
+                  <a:srgbClr val="2C3E50"/>
+                </a:solidFill>
+                <a:latin typeface="Calibri"/>
+              </a:rPr>
+              <a:t>por</a:t>
+            </a:r>
+            <a:r>
+              <a:rPr sz="2400" b="0" dirty="0">
+                <a:solidFill>
+                  <a:srgbClr val="2C3E50"/>
+                </a:solidFill>
+                <a:latin typeface="Calibri"/>
+              </a:rPr>
+              <a:t> canal, o a </a:t>
+            </a:r>
+            <a:r>
+              <a:rPr sz="2400" b="0" dirty="0" err="1">
+                <a:solidFill>
+                  <a:srgbClr val="2C3E50"/>
+                </a:solidFill>
+                <a:latin typeface="Calibri"/>
+              </a:rPr>
+              <a:t>una</a:t>
+            </a:r>
+            <a:r>
+              <a:rPr sz="2400" b="0" dirty="0">
+                <a:solidFill>
+                  <a:srgbClr val="2C3E50"/>
+                </a:solidFill>
+                <a:latin typeface="Calibri"/>
+              </a:rPr>
+              <a:t> </a:t>
+            </a:r>
+            <a:r>
+              <a:rPr sz="2400" b="0" dirty="0" err="1">
+                <a:solidFill>
+                  <a:srgbClr val="2C3E50"/>
+                </a:solidFill>
+                <a:latin typeface="Calibri"/>
+              </a:rPr>
+              <a:t>versión</a:t>
+            </a:r>
+            <a:r>
+              <a:rPr sz="2400" b="0" dirty="0">
+                <a:solidFill>
+                  <a:srgbClr val="2C3E50"/>
+                </a:solidFill>
+                <a:latin typeface="Calibri"/>
+              </a:rPr>
+              <a:t> </a:t>
+            </a:r>
+            <a:r>
+              <a:rPr sz="2400" b="0" dirty="0" err="1">
+                <a:solidFill>
+                  <a:srgbClr val="2C3E50"/>
+                </a:solidFill>
+                <a:latin typeface="Calibri"/>
+              </a:rPr>
+              <a:t>en</a:t>
+            </a:r>
+            <a:r>
+              <a:rPr sz="2400" b="0" dirty="0">
+                <a:solidFill>
+                  <a:srgbClr val="2C3E50"/>
+                </a:solidFill>
+                <a:latin typeface="Calibri"/>
+              </a:rPr>
+              <a:t> gris (</a:t>
+            </a:r>
+            <a:r>
+              <a:rPr sz="2400" b="0" dirty="0" err="1">
+                <a:solidFill>
+                  <a:srgbClr val="2C3E50"/>
+                </a:solidFill>
+                <a:latin typeface="Calibri"/>
+              </a:rPr>
+              <a:t>promedio</a:t>
+            </a:r>
+            <a:r>
+              <a:rPr sz="2400" b="0" dirty="0">
+                <a:solidFill>
+                  <a:srgbClr val="2C3E50"/>
+                </a:solidFill>
+                <a:latin typeface="Calibri"/>
+              </a:rPr>
+              <a:t> de </a:t>
+            </a:r>
+            <a:r>
+              <a:rPr sz="2400" b="0" dirty="0" err="1">
+                <a:solidFill>
+                  <a:srgbClr val="2C3E50"/>
+                </a:solidFill>
+                <a:latin typeface="Calibri"/>
+              </a:rPr>
+              <a:t>los</a:t>
+            </a:r>
+            <a:r>
+              <a:rPr sz="2400" b="0" dirty="0">
+                <a:solidFill>
+                  <a:srgbClr val="2C3E50"/>
+                </a:solidFill>
+                <a:latin typeface="Calibri"/>
+              </a:rPr>
+              <a:t> </a:t>
+            </a:r>
+            <a:r>
+              <a:rPr sz="2400" b="0" dirty="0" err="1">
+                <a:solidFill>
+                  <a:srgbClr val="2C3E50"/>
+                </a:solidFill>
+                <a:latin typeface="Calibri"/>
+              </a:rPr>
+              <a:t>tres</a:t>
+            </a:r>
+            <a:r>
+              <a:rPr sz="2400" b="0" dirty="0">
+                <a:solidFill>
+                  <a:srgbClr val="2C3E50"/>
+                </a:solidFill>
+                <a:latin typeface="Calibri"/>
+              </a:rPr>
+              <a:t>).</a:t>
             </a:r>
           </a:p>
         </p:txBody>
       </p:sp>
       <p:pic>
         <p:nvPicPr>
-          <p:cNvPr id="10" name="Picture 9" descr="rgb.png"/>
+          <p:cNvPr id="13" name="Imagen 12">
+            <a:extLst>
+              <a:ext uri="{FF2B5EF4-FFF2-40B4-BE49-F238E27FC236}">
+                <a16:creationId xmlns:a16="http://schemas.microsoft.com/office/drawing/2014/main" id="{D8BBBA62-1E96-6030-8FB6-1E409E948302}"/>
+              </a:ext>
+            </a:extLst>
+          </p:cNvPr>
           <p:cNvPicPr>
             <a:picLocks noChangeAspect="1"/>
           </p:cNvPicPr>
@@ -11137,49 +8194,14 @@
         </p:blipFill>
         <p:spPr>
           <a:xfrm>
-            <a:off x="502920" y="1353312"/>
-            <a:ext cx="11155680" cy="3245289"/>
+            <a:off x="4760433" y="1684835"/>
+            <a:ext cx="4549168" cy="4558266"/>
           </a:xfrm>
           <a:prstGeom prst="rect">
             <a:avLst/>
           </a:prstGeom>
         </p:spPr>
       </p:pic>
-      <p:sp>
-        <p:nvSpPr>
-          <p:cNvPr id="11" name="TextBox 10"/>
-          <p:cNvSpPr txBox="1"/>
-          <p:nvPr/>
-        </p:nvSpPr>
-        <p:spPr>
-          <a:xfrm>
-            <a:off x="502920" y="4892040"/>
-            <a:ext cx="11155680" cy="1417320"/>
-          </a:xfrm>
-          <a:prstGeom prst="rect">
-            <a:avLst/>
-          </a:prstGeom>
-          <a:noFill/>
-        </p:spPr>
-        <p:txBody>
-          <a:bodyPr wrap="square" anchor="ctr">
-            <a:spAutoFit/>
-          </a:bodyPr>
-          <a:lstStyle/>
-          <a:p>
-            <a:pPr algn="l"/>
-            <a:r>
-              <a:rPr sz="1500" b="0">
-                <a:solidFill>
-                  <a:srgbClr val="2C3E50"/>
-                </a:solidFill>
-                <a:latin typeface="Calibri"/>
-              </a:rPr>
-              <a:t>Un píxel en color es un triple (R, G, B), no un solo número. Casi todos los filtros de esta clase se aplican por canal, o a una versión en gris (promedio de los tres).</a:t>
-            </a:r>
-          </a:p>
-        </p:txBody>
-      </p:sp>
     </p:spTree>
   </p:cSld>
   <p:clrMapOvr>
@@ -11189,7 +8211,7 @@
 </file>
 
 <file path=ppt/slides/slide6.xml><?xml version="1.0" encoding="utf-8"?>
-<p:sld xmlns:a="http://schemas.openxmlformats.org/drawingml/2006/main" xmlns:p="http://schemas.openxmlformats.org/presentationml/2006/main" xmlns:r="http://schemas.openxmlformats.org/officeDocument/2006/relationships">
+<p:sld xmlns:a="http://schemas.openxmlformats.org/drawingml/2006/main" xmlns:r="http://schemas.openxmlformats.org/officeDocument/2006/relationships" xmlns:p="http://schemas.openxmlformats.org/presentationml/2006/main">
   <p:cSld>
     <p:spTree>
       <p:nvGrpSpPr>
@@ -11197,7 +8219,14 @@
         <p:cNvGrpSpPr/>
         <p:nvPr/>
       </p:nvGrpSpPr>
-      <p:grpSpPr/>
+      <p:grpSpPr>
+        <a:xfrm>
+          <a:off x="0" y="0"/>
+          <a:ext cx="0" cy="0"/>
+          <a:chOff x="0" y="0"/>
+          <a:chExt cx="0" cy="0"/>
+        </a:xfrm>
+      </p:grpSpPr>
       <p:sp>
         <p:nvSpPr>
           <p:cNvPr id="2" name="Rectangle 1"/>
@@ -11238,6 +8267,7 @@
           <a:lstStyle/>
           <a:p>
             <a:pPr algn="ctr"/>
+            <a:endParaRPr/>
           </a:p>
         </p:txBody>
       </p:sp>
@@ -11281,6 +8311,7 @@
           <a:lstStyle/>
           <a:p>
             <a:pPr algn="ctr"/>
+            <a:endParaRPr/>
           </a:p>
         </p:txBody>
       </p:sp>
@@ -11324,6 +8355,7 @@
           <a:lstStyle/>
           <a:p>
             <a:pPr algn="ctr"/>
+            <a:endParaRPr/>
           </a:p>
         </p:txBody>
       </p:sp>
@@ -11370,8 +8402,8 @@
         </p:nvSpPr>
         <p:spPr>
           <a:xfrm>
-            <a:off x="10378440" y="6528816"/>
-            <a:ext cx="1371600" cy="292608"/>
+            <a:off x="10378440" y="6544315"/>
+            <a:ext cx="1371600" cy="261610"/>
           </a:xfrm>
           <a:prstGeom prst="rect">
             <a:avLst/>
@@ -11386,14 +8418,29 @@
           <a:p>
             <a:pPr algn="r"/>
             <a:r>
-              <a:rPr sz="1100" b="0">
+              <a:rPr sz="1100" b="0" dirty="0">
                 <a:solidFill>
                   <a:srgbClr val="FFFFFF"/>
                 </a:solidFill>
                 <a:latin typeface="Calibri"/>
               </a:rPr>
-              <a:t>6 / 18</a:t>
-            </a:r>
+              <a:t>6 / 1</a:t>
+            </a:r>
+            <a:r>
+              <a:rPr lang="es-419" sz="1100" b="0" dirty="0">
+                <a:solidFill>
+                  <a:srgbClr val="FFFFFF"/>
+                </a:solidFill>
+                <a:latin typeface="Calibri"/>
+              </a:rPr>
+              <a:t>3</a:t>
+            </a:r>
+            <a:endParaRPr sz="1100" b="0" dirty="0">
+              <a:solidFill>
+                <a:srgbClr val="FFFFFF"/>
+              </a:solidFill>
+              <a:latin typeface="Calibri"/>
+            </a:endParaRPr>
           </a:p>
         </p:txBody>
       </p:sp>
@@ -11472,6 +8519,7 @@
           <a:lstStyle/>
           <a:p>
             <a:pPr algn="ctr"/>
+            <a:endParaRPr/>
           </a:p>
         </p:txBody>
       </p:sp>
@@ -11499,20 +8547,697 @@
           <a:p>
             <a:pPr algn="l"/>
             <a:r>
-              <a:rPr sz="1600" b="0">
+              <a:rPr b="0" dirty="0">
                 <a:solidFill>
                   <a:srgbClr val="5D6D7E"/>
                 </a:solidFill>
                 <a:latin typeface="Calibri"/>
               </a:rPr>
-              <a:t>Sin modelo de cámara complicado: un agujero, rayos en línea recta, un sensor que cuenta fotones</a:t>
+              <a:t>Sin </a:t>
+            </a:r>
+            <a:r>
+              <a:rPr b="0" dirty="0" err="1">
+                <a:solidFill>
+                  <a:srgbClr val="5D6D7E"/>
+                </a:solidFill>
+                <a:latin typeface="Calibri"/>
+              </a:rPr>
+              <a:t>modelo</a:t>
+            </a:r>
+            <a:r>
+              <a:rPr b="0" dirty="0">
+                <a:solidFill>
+                  <a:srgbClr val="5D6D7E"/>
+                </a:solidFill>
+                <a:latin typeface="Calibri"/>
+              </a:rPr>
+              <a:t> de </a:t>
+            </a:r>
+            <a:r>
+              <a:rPr b="0" dirty="0" err="1">
+                <a:solidFill>
+                  <a:srgbClr val="5D6D7E"/>
+                </a:solidFill>
+                <a:latin typeface="Calibri"/>
+              </a:rPr>
+              <a:t>cámara</a:t>
+            </a:r>
+            <a:r>
+              <a:rPr b="0" dirty="0">
+                <a:solidFill>
+                  <a:srgbClr val="5D6D7E"/>
+                </a:solidFill>
+                <a:latin typeface="Calibri"/>
+              </a:rPr>
+              <a:t> </a:t>
+            </a:r>
+            <a:r>
+              <a:rPr b="0" dirty="0" err="1">
+                <a:solidFill>
+                  <a:srgbClr val="5D6D7E"/>
+                </a:solidFill>
+                <a:latin typeface="Calibri"/>
+              </a:rPr>
+              <a:t>complicado</a:t>
+            </a:r>
+            <a:r>
+              <a:rPr b="0" dirty="0">
+                <a:solidFill>
+                  <a:srgbClr val="5D6D7E"/>
+                </a:solidFill>
+                <a:latin typeface="Calibri"/>
+              </a:rPr>
+              <a:t>: un </a:t>
+            </a:r>
+            <a:r>
+              <a:rPr b="0" dirty="0" err="1">
+                <a:solidFill>
+                  <a:srgbClr val="5D6D7E"/>
+                </a:solidFill>
+                <a:latin typeface="Calibri"/>
+              </a:rPr>
+              <a:t>agujero</a:t>
+            </a:r>
+            <a:r>
+              <a:rPr b="0" dirty="0">
+                <a:solidFill>
+                  <a:srgbClr val="5D6D7E"/>
+                </a:solidFill>
+                <a:latin typeface="Calibri"/>
+              </a:rPr>
+              <a:t>, </a:t>
+            </a:r>
+            <a:r>
+              <a:rPr b="0" dirty="0" err="1">
+                <a:solidFill>
+                  <a:srgbClr val="5D6D7E"/>
+                </a:solidFill>
+                <a:latin typeface="Calibri"/>
+              </a:rPr>
+              <a:t>rayos</a:t>
+            </a:r>
+            <a:r>
+              <a:rPr b="0" dirty="0">
+                <a:solidFill>
+                  <a:srgbClr val="5D6D7E"/>
+                </a:solidFill>
+                <a:latin typeface="Calibri"/>
+              </a:rPr>
+              <a:t> </a:t>
+            </a:r>
+            <a:r>
+              <a:rPr b="0" dirty="0" err="1">
+                <a:solidFill>
+                  <a:srgbClr val="5D6D7E"/>
+                </a:solidFill>
+                <a:latin typeface="Calibri"/>
+              </a:rPr>
+              <a:t>en</a:t>
+            </a:r>
+            <a:r>
+              <a:rPr b="0" dirty="0">
+                <a:solidFill>
+                  <a:srgbClr val="5D6D7E"/>
+                </a:solidFill>
+                <a:latin typeface="Calibri"/>
+              </a:rPr>
+              <a:t> </a:t>
+            </a:r>
+            <a:r>
+              <a:rPr b="0" dirty="0" err="1">
+                <a:solidFill>
+                  <a:srgbClr val="5D6D7E"/>
+                </a:solidFill>
+                <a:latin typeface="Calibri"/>
+              </a:rPr>
+              <a:t>línea</a:t>
+            </a:r>
+            <a:r>
+              <a:rPr b="0" dirty="0">
+                <a:solidFill>
+                  <a:srgbClr val="5D6D7E"/>
+                </a:solidFill>
+                <a:latin typeface="Calibri"/>
+              </a:rPr>
+              <a:t> recta, un sensor </a:t>
+            </a:r>
+            <a:r>
+              <a:rPr b="0" dirty="0" err="1">
+                <a:solidFill>
+                  <a:srgbClr val="5D6D7E"/>
+                </a:solidFill>
+                <a:latin typeface="Calibri"/>
+              </a:rPr>
+              <a:t>que</a:t>
+            </a:r>
+            <a:r>
+              <a:rPr b="0" dirty="0">
+                <a:solidFill>
+                  <a:srgbClr val="5D6D7E"/>
+                </a:solidFill>
+                <a:latin typeface="Calibri"/>
+              </a:rPr>
+              <a:t> </a:t>
+            </a:r>
+            <a:r>
+              <a:rPr b="0" dirty="0" err="1">
+                <a:solidFill>
+                  <a:srgbClr val="5D6D7E"/>
+                </a:solidFill>
+                <a:latin typeface="Calibri"/>
+              </a:rPr>
+              <a:t>cuenta</a:t>
+            </a:r>
+            <a:r>
+              <a:rPr b="0" dirty="0">
+                <a:solidFill>
+                  <a:srgbClr val="5D6D7E"/>
+                </a:solidFill>
+                <a:latin typeface="Calibri"/>
+              </a:rPr>
+              <a:t> </a:t>
+            </a:r>
+            <a:r>
+              <a:rPr b="0" dirty="0" err="1">
+                <a:solidFill>
+                  <a:srgbClr val="5D6D7E"/>
+                </a:solidFill>
+                <a:latin typeface="Calibri"/>
+              </a:rPr>
+              <a:t>fotones</a:t>
+            </a:r>
+            <a:endParaRPr b="0" dirty="0">
+              <a:solidFill>
+                <a:srgbClr val="5D6D7E"/>
+              </a:solidFill>
+              <a:latin typeface="Calibri"/>
+            </a:endParaRPr>
+          </a:p>
+        </p:txBody>
+      </p:sp>
+      <p:sp>
+        <p:nvSpPr>
+          <p:cNvPr id="11" name="TextBox 10"/>
+          <p:cNvSpPr txBox="1"/>
+          <p:nvPr/>
+        </p:nvSpPr>
+        <p:spPr>
+          <a:xfrm>
+            <a:off x="502920" y="2172802"/>
+            <a:ext cx="3303536" cy="3477875"/>
+          </a:xfrm>
+          <a:prstGeom prst="rect">
+            <a:avLst/>
+          </a:prstGeom>
+          <a:noFill/>
+        </p:spPr>
+        <p:txBody>
+          <a:bodyPr wrap="square" anchor="ctr">
+            <a:spAutoFit/>
+          </a:bodyPr>
+          <a:lstStyle/>
+          <a:p>
+            <a:pPr algn="l"/>
+            <a:r>
+              <a:rPr sz="2000" b="0" dirty="0">
+                <a:solidFill>
+                  <a:srgbClr val="2C3E50"/>
+                </a:solidFill>
+                <a:latin typeface="Calibri"/>
+              </a:rPr>
+              <a:t>El sensor es </a:t>
+            </a:r>
+            <a:r>
+              <a:rPr sz="2000" b="0" dirty="0" err="1">
+                <a:solidFill>
+                  <a:srgbClr val="2C3E50"/>
+                </a:solidFill>
+                <a:latin typeface="Calibri"/>
+              </a:rPr>
+              <a:t>otra</a:t>
+            </a:r>
+            <a:r>
+              <a:rPr sz="2000" b="0" dirty="0">
+                <a:solidFill>
+                  <a:srgbClr val="2C3E50"/>
+                </a:solidFill>
+                <a:latin typeface="Calibri"/>
+              </a:rPr>
+              <a:t> </a:t>
+            </a:r>
+            <a:r>
+              <a:rPr sz="2000" b="0" dirty="0" err="1">
+                <a:solidFill>
+                  <a:srgbClr val="2C3E50"/>
+                </a:solidFill>
+                <a:latin typeface="Calibri"/>
+              </a:rPr>
+              <a:t>cuadrícula</a:t>
+            </a:r>
+            <a:r>
+              <a:rPr sz="2000" b="0" dirty="0">
+                <a:solidFill>
+                  <a:srgbClr val="2C3E50"/>
+                </a:solidFill>
+                <a:latin typeface="Calibri"/>
+              </a:rPr>
+              <a:t>: </a:t>
+            </a:r>
+            <a:r>
+              <a:rPr sz="2000" b="0" dirty="0" err="1">
+                <a:solidFill>
+                  <a:srgbClr val="2C3E50"/>
+                </a:solidFill>
+                <a:latin typeface="Calibri"/>
+              </a:rPr>
+              <a:t>cada</a:t>
+            </a:r>
+            <a:r>
+              <a:rPr sz="2000" b="0" dirty="0">
+                <a:solidFill>
+                  <a:srgbClr val="2C3E50"/>
+                </a:solidFill>
+                <a:latin typeface="Calibri"/>
+              </a:rPr>
+              <a:t> </a:t>
+            </a:r>
+            <a:r>
+              <a:rPr sz="2000" b="0" dirty="0" err="1">
+                <a:solidFill>
+                  <a:srgbClr val="2C3E50"/>
+                </a:solidFill>
+                <a:latin typeface="Calibri"/>
+              </a:rPr>
+              <a:t>celda</a:t>
+            </a:r>
+            <a:r>
+              <a:rPr sz="2000" b="0" dirty="0">
+                <a:solidFill>
+                  <a:srgbClr val="2C3E50"/>
+                </a:solidFill>
+                <a:latin typeface="Calibri"/>
+              </a:rPr>
+              <a:t> </a:t>
+            </a:r>
+            <a:r>
+              <a:rPr sz="2000" b="0" dirty="0" err="1">
+                <a:solidFill>
+                  <a:srgbClr val="2C3E50"/>
+                </a:solidFill>
+                <a:latin typeface="Calibri"/>
+              </a:rPr>
+              <a:t>acumula</a:t>
+            </a:r>
+            <a:r>
+              <a:rPr sz="2000" b="0" dirty="0">
+                <a:solidFill>
+                  <a:srgbClr val="2C3E50"/>
+                </a:solidFill>
+                <a:latin typeface="Calibri"/>
+              </a:rPr>
+              <a:t> luz un </a:t>
+            </a:r>
+            <a:r>
+              <a:rPr sz="2000" b="0" dirty="0" err="1">
+                <a:solidFill>
+                  <a:srgbClr val="2C3E50"/>
+                </a:solidFill>
+                <a:latin typeface="Calibri"/>
+              </a:rPr>
+              <a:t>tiempo</a:t>
+            </a:r>
+            <a:r>
+              <a:rPr sz="2000" b="0" dirty="0">
+                <a:solidFill>
+                  <a:srgbClr val="2C3E50"/>
+                </a:solidFill>
+                <a:latin typeface="Calibri"/>
+              </a:rPr>
+              <a:t> (</a:t>
+            </a:r>
+            <a:r>
+              <a:rPr sz="2000" b="0" dirty="0" err="1">
+                <a:solidFill>
+                  <a:srgbClr val="2C3E50"/>
+                </a:solidFill>
+                <a:latin typeface="Calibri"/>
+              </a:rPr>
+              <a:t>exposición</a:t>
+            </a:r>
+            <a:r>
+              <a:rPr sz="2000" b="0" dirty="0">
+                <a:solidFill>
+                  <a:srgbClr val="2C3E50"/>
+                </a:solidFill>
+                <a:latin typeface="Calibri"/>
+              </a:rPr>
+              <a:t>). Si hay </a:t>
+            </a:r>
+            <a:r>
+              <a:rPr sz="2000" b="0" dirty="0" err="1">
+                <a:solidFill>
+                  <a:srgbClr val="2C3E50"/>
+                </a:solidFill>
+                <a:latin typeface="Calibri"/>
+              </a:rPr>
+              <a:t>poca</a:t>
+            </a:r>
+            <a:r>
+              <a:rPr sz="2000" b="0" dirty="0">
+                <a:solidFill>
+                  <a:srgbClr val="2C3E50"/>
+                </a:solidFill>
+                <a:latin typeface="Calibri"/>
+              </a:rPr>
+              <a:t> luz, </a:t>
+            </a:r>
+            <a:r>
+              <a:rPr sz="2000" b="0" dirty="0" err="1">
+                <a:solidFill>
+                  <a:srgbClr val="2C3E50"/>
+                </a:solidFill>
+                <a:latin typeface="Calibri"/>
+              </a:rPr>
+              <a:t>los</a:t>
+            </a:r>
+            <a:r>
+              <a:rPr sz="2000" b="0" dirty="0">
+                <a:solidFill>
+                  <a:srgbClr val="2C3E50"/>
+                </a:solidFill>
+                <a:latin typeface="Calibri"/>
+              </a:rPr>
+              <a:t> </a:t>
+            </a:r>
+            <a:r>
+              <a:rPr sz="2000" b="0" dirty="0" err="1">
+                <a:solidFill>
+                  <a:srgbClr val="2C3E50"/>
+                </a:solidFill>
+                <a:latin typeface="Calibri"/>
+              </a:rPr>
+              <a:t>números</a:t>
+            </a:r>
+            <a:r>
+              <a:rPr sz="2000" b="0" dirty="0">
+                <a:solidFill>
+                  <a:srgbClr val="2C3E50"/>
+                </a:solidFill>
+                <a:latin typeface="Calibri"/>
+              </a:rPr>
+              <a:t> son chicos y </a:t>
+            </a:r>
+            <a:r>
+              <a:rPr sz="2000" b="0" dirty="0" err="1">
+                <a:solidFill>
+                  <a:srgbClr val="2C3E50"/>
+                </a:solidFill>
+                <a:latin typeface="Calibri"/>
+              </a:rPr>
+              <a:t>ruidosos</a:t>
+            </a:r>
+            <a:r>
+              <a:rPr sz="2000" b="0" dirty="0">
+                <a:solidFill>
+                  <a:srgbClr val="2C3E50"/>
+                </a:solidFill>
+                <a:latin typeface="Calibri"/>
+              </a:rPr>
+              <a:t>.</a:t>
+            </a:r>
+            <a:endParaRPr lang="es-419" sz="2000" b="0" dirty="0">
+              <a:solidFill>
+                <a:srgbClr val="2C3E50"/>
+              </a:solidFill>
+              <a:latin typeface="Calibri"/>
+            </a:endParaRPr>
+          </a:p>
+          <a:p>
+            <a:pPr algn="l"/>
+            <a:endParaRPr lang="es-MX" sz="2000" dirty="0">
+              <a:solidFill>
+                <a:srgbClr val="2C3E50"/>
+              </a:solidFill>
+              <a:latin typeface="Calibri"/>
+            </a:endParaRPr>
+          </a:p>
+          <a:p>
+            <a:pPr algn="l"/>
+            <a:r>
+              <a:rPr sz="2000" b="0" dirty="0">
+                <a:solidFill>
+                  <a:srgbClr val="2C3E50"/>
+                </a:solidFill>
+                <a:latin typeface="Calibri"/>
+              </a:rPr>
+              <a:t>La </a:t>
+            </a:r>
+            <a:r>
+              <a:rPr sz="2000" b="0" dirty="0" err="1">
+                <a:solidFill>
+                  <a:srgbClr val="2C3E50"/>
+                </a:solidFill>
+                <a:latin typeface="Calibri"/>
+              </a:rPr>
+              <a:t>geometría</a:t>
+            </a:r>
+            <a:r>
+              <a:rPr sz="2000" b="0" dirty="0">
+                <a:solidFill>
+                  <a:srgbClr val="2C3E50"/>
+                </a:solidFill>
+                <a:latin typeface="Calibri"/>
+              </a:rPr>
+              <a:t> (</a:t>
+            </a:r>
+            <a:r>
+              <a:rPr sz="2000" b="0" dirty="0" err="1">
+                <a:solidFill>
+                  <a:srgbClr val="2C3E50"/>
+                </a:solidFill>
+                <a:latin typeface="Calibri"/>
+              </a:rPr>
+              <a:t>quién</a:t>
+            </a:r>
+            <a:r>
+              <a:rPr sz="2000" b="0" dirty="0">
+                <a:solidFill>
+                  <a:srgbClr val="2C3E50"/>
+                </a:solidFill>
+                <a:latin typeface="Calibri"/>
+              </a:rPr>
+              <a:t> tapa a </a:t>
+            </a:r>
+            <a:r>
+              <a:rPr sz="2000" b="0" dirty="0" err="1">
+                <a:solidFill>
+                  <a:srgbClr val="2C3E50"/>
+                </a:solidFill>
+                <a:latin typeface="Calibri"/>
+              </a:rPr>
+              <a:t>quién</a:t>
+            </a:r>
+            <a:r>
+              <a:rPr sz="2000" b="0" dirty="0">
+                <a:solidFill>
+                  <a:srgbClr val="2C3E50"/>
+                </a:solidFill>
+                <a:latin typeface="Calibri"/>
+              </a:rPr>
+              <a:t>, </a:t>
+            </a:r>
+            <a:r>
+              <a:rPr sz="2000" b="0" dirty="0" err="1">
+                <a:solidFill>
+                  <a:srgbClr val="2C3E50"/>
+                </a:solidFill>
+                <a:latin typeface="Calibri"/>
+              </a:rPr>
+              <a:t>qué</a:t>
+            </a:r>
+            <a:r>
+              <a:rPr sz="2000" b="0" dirty="0">
+                <a:solidFill>
+                  <a:srgbClr val="2C3E50"/>
+                </a:solidFill>
+                <a:latin typeface="Calibri"/>
+              </a:rPr>
+              <a:t> tan grande se </a:t>
+            </a:r>
+            <a:r>
+              <a:rPr sz="2000" b="0" dirty="0" err="1">
+                <a:solidFill>
+                  <a:srgbClr val="2C3E50"/>
+                </a:solidFill>
+                <a:latin typeface="Calibri"/>
+              </a:rPr>
+              <a:t>ve</a:t>
+            </a:r>
+            <a:r>
+              <a:rPr sz="2000" b="0" dirty="0">
+                <a:solidFill>
+                  <a:srgbClr val="2C3E50"/>
+                </a:solidFill>
+                <a:latin typeface="Calibri"/>
+              </a:rPr>
+              <a:t>) </a:t>
+            </a:r>
+            <a:r>
+              <a:rPr sz="2000" b="0" dirty="0" err="1">
+                <a:solidFill>
+                  <a:srgbClr val="2C3E50"/>
+                </a:solidFill>
+                <a:latin typeface="Calibri"/>
+              </a:rPr>
+              <a:t>ya</a:t>
+            </a:r>
+            <a:r>
+              <a:rPr sz="2000" b="0" dirty="0">
+                <a:solidFill>
+                  <a:srgbClr val="2C3E50"/>
+                </a:solidFill>
+                <a:latin typeface="Calibri"/>
+              </a:rPr>
+              <a:t> </a:t>
+            </a:r>
+            <a:r>
+              <a:rPr sz="2000" b="0" dirty="0" err="1">
+                <a:solidFill>
+                  <a:srgbClr val="2C3E50"/>
+                </a:solidFill>
+                <a:latin typeface="Calibri"/>
+              </a:rPr>
+              <a:t>está</a:t>
+            </a:r>
+            <a:r>
+              <a:rPr sz="2000" b="0" dirty="0">
+                <a:solidFill>
+                  <a:srgbClr val="2C3E50"/>
+                </a:solidFill>
+                <a:latin typeface="Calibri"/>
+              </a:rPr>
+              <a:t> </a:t>
+            </a:r>
+            <a:r>
+              <a:rPr sz="2000" b="0" dirty="0" err="1">
+                <a:solidFill>
+                  <a:srgbClr val="2C3E50"/>
+                </a:solidFill>
+                <a:latin typeface="Calibri"/>
+              </a:rPr>
+              <a:t>en</a:t>
+            </a:r>
+            <a:r>
+              <a:rPr sz="2000" b="0" dirty="0">
+                <a:solidFill>
+                  <a:srgbClr val="2C3E50"/>
+                </a:solidFill>
+                <a:latin typeface="Calibri"/>
+              </a:rPr>
+              <a:t> I; no </a:t>
+            </a:r>
+            <a:r>
+              <a:rPr sz="2000" b="0" dirty="0" err="1">
+                <a:solidFill>
+                  <a:srgbClr val="2C3E50"/>
+                </a:solidFill>
+                <a:latin typeface="Calibri"/>
+              </a:rPr>
+              <a:t>hace</a:t>
+            </a:r>
+            <a:r>
+              <a:rPr sz="2000" b="0" dirty="0">
+                <a:solidFill>
+                  <a:srgbClr val="2C3E50"/>
+                </a:solidFill>
+                <a:latin typeface="Calibri"/>
+              </a:rPr>
+              <a:t> </a:t>
+            </a:r>
+            <a:r>
+              <a:rPr sz="2000" b="0" dirty="0" err="1">
+                <a:solidFill>
+                  <a:srgbClr val="2C3E50"/>
+                </a:solidFill>
+                <a:latin typeface="Calibri"/>
+              </a:rPr>
+              <a:t>falta</a:t>
+            </a:r>
+            <a:r>
+              <a:rPr sz="2000" b="0" dirty="0">
+                <a:solidFill>
+                  <a:srgbClr val="2C3E50"/>
+                </a:solidFill>
+                <a:latin typeface="Calibri"/>
+              </a:rPr>
+              <a:t> </a:t>
+            </a:r>
+            <a:r>
+              <a:rPr sz="2000" b="0" dirty="0" err="1">
+                <a:solidFill>
+                  <a:srgbClr val="2C3E50"/>
+                </a:solidFill>
+                <a:latin typeface="Calibri"/>
+              </a:rPr>
+              <a:t>reconstruir</a:t>
+            </a:r>
+            <a:r>
+              <a:rPr sz="2000" b="0" dirty="0">
+                <a:solidFill>
+                  <a:srgbClr val="2C3E50"/>
+                </a:solidFill>
+                <a:latin typeface="Calibri"/>
+              </a:rPr>
+              <a:t> el 3D para </a:t>
+            </a:r>
+            <a:r>
+              <a:rPr sz="2000" b="0" dirty="0" err="1">
+                <a:solidFill>
+                  <a:srgbClr val="2C3E50"/>
+                </a:solidFill>
+                <a:latin typeface="Calibri"/>
+              </a:rPr>
+              <a:t>detectar</a:t>
+            </a:r>
+            <a:r>
+              <a:rPr sz="2000" b="0" dirty="0">
+                <a:solidFill>
+                  <a:srgbClr val="2C3E50"/>
+                </a:solidFill>
+                <a:latin typeface="Calibri"/>
+              </a:rPr>
+              <a:t> un </a:t>
+            </a:r>
+            <a:r>
+              <a:rPr sz="2000" b="0" dirty="0" err="1">
+                <a:solidFill>
+                  <a:srgbClr val="2C3E50"/>
+                </a:solidFill>
+                <a:latin typeface="Calibri"/>
+              </a:rPr>
+              <a:t>borde</a:t>
+            </a:r>
+            <a:r>
+              <a:rPr sz="2000" b="0" dirty="0">
+                <a:solidFill>
+                  <a:srgbClr val="2C3E50"/>
+                </a:solidFill>
+                <a:latin typeface="Calibri"/>
+              </a:rPr>
+              <a:t>.</a:t>
             </a:r>
           </a:p>
         </p:txBody>
       </p:sp>
       <p:pic>
         <p:nvPicPr>
-          <p:cNvPr id="10" name="Picture 9" descr="pinhole.png"/>
+          <p:cNvPr id="13" name="Imagen 12">
+            <a:extLst>
+              <a:ext uri="{FF2B5EF4-FFF2-40B4-BE49-F238E27FC236}">
+                <a16:creationId xmlns:a16="http://schemas.microsoft.com/office/drawing/2014/main" id="{E66F2221-8264-5EFF-1CA1-077F4AC9E063}"/>
+              </a:ext>
+            </a:extLst>
+          </p:cNvPr>
           <p:cNvPicPr>
             <a:picLocks noChangeAspect="1"/>
           </p:cNvPicPr>
@@ -11526,8 +9251,8 @@
         </p:blipFill>
         <p:spPr>
           <a:xfrm>
-            <a:off x="777240" y="1353312"/>
-            <a:ext cx="9589551" cy="3794760"/>
+            <a:off x="5509326" y="1695681"/>
+            <a:ext cx="5752440" cy="3978703"/>
           </a:xfrm>
           <a:prstGeom prst="rect">
             <a:avLst/>
@@ -11536,14 +9261,20 @@
       </p:pic>
       <p:sp>
         <p:nvSpPr>
-          <p:cNvPr id="11" name="TextBox 10"/>
+          <p:cNvPr id="14" name="CuadroTexto 13">
+            <a:extLst>
+              <a:ext uri="{FF2B5EF4-FFF2-40B4-BE49-F238E27FC236}">
+                <a16:creationId xmlns:a16="http://schemas.microsoft.com/office/drawing/2014/main" id="{7C42AAA7-E5FC-DACB-45D5-634B7028B53D}"/>
+              </a:ext>
+            </a:extLst>
+          </p:cNvPr>
           <p:cNvSpPr txBox="1"/>
           <p:nvPr/>
         </p:nvSpPr>
         <p:spPr>
           <a:xfrm>
-            <a:off x="502920" y="5285232"/>
-            <a:ext cx="11155680" cy="1051560"/>
+            <a:off x="6080760" y="5323340"/>
+            <a:ext cx="2179674" cy="369332"/>
           </a:xfrm>
           <a:prstGeom prst="rect">
             <a:avLst/>
@@ -11551,20 +9282,14 @@
           <a:noFill/>
         </p:spPr>
         <p:txBody>
-          <a:bodyPr wrap="square" anchor="ctr">
+          <a:bodyPr wrap="square" rtlCol="0">
             <a:spAutoFit/>
           </a:bodyPr>
           <a:lstStyle/>
           <a:p>
-            <a:pPr algn="l"/>
-            <a:r>
-              <a:rPr sz="1500" b="0">
-                <a:solidFill>
-                  <a:srgbClr val="2C3E50"/>
-                </a:solidFill>
-                <a:latin typeface="Calibri"/>
-              </a:rPr>
-              <a:t>El sensor es otra cuadrícula: cada celda acumula luz un tiempo (exposición). Si hay poca luz, los números son chicos y ruidosos. La geometría (quién tapa a quién, qué tan grande se ve) ya está «horneada» en I; no hace falta reconstruir el 3D para detectar un borde.</a:t>
+            <a:r>
+              <a:rPr lang="es-MX" dirty="0"/>
+              <a:t>Cámara estenopeica</a:t>
             </a:r>
           </a:p>
         </p:txBody>
@@ -11578,7 +9303,7 @@
 </file>
 
 <file path=ppt/slides/slide7.xml><?xml version="1.0" encoding="utf-8"?>
-<p:sld xmlns:a="http://schemas.openxmlformats.org/drawingml/2006/main" xmlns:p="http://schemas.openxmlformats.org/presentationml/2006/main" xmlns:r="http://schemas.openxmlformats.org/officeDocument/2006/relationships">
+<p:sld xmlns:a="http://schemas.openxmlformats.org/drawingml/2006/main" xmlns:r="http://schemas.openxmlformats.org/officeDocument/2006/relationships" xmlns:p="http://schemas.openxmlformats.org/presentationml/2006/main">
   <p:cSld>
     <p:spTree>
       <p:nvGrpSpPr>
@@ -11586,7 +9311,14 @@
         <p:cNvGrpSpPr/>
         <p:nvPr/>
       </p:nvGrpSpPr>
-      <p:grpSpPr/>
+      <p:grpSpPr>
+        <a:xfrm>
+          <a:off x="0" y="0"/>
+          <a:ext cx="0" cy="0"/>
+          <a:chOff x="0" y="0"/>
+          <a:chExt cx="0" cy="0"/>
+        </a:xfrm>
+      </p:grpSpPr>
       <p:sp>
         <p:nvSpPr>
           <p:cNvPr id="2" name="Rectangle 1"/>
@@ -11627,6 +9359,7 @@
           <a:lstStyle/>
           <a:p>
             <a:pPr algn="ctr"/>
+            <a:endParaRPr/>
           </a:p>
         </p:txBody>
       </p:sp>
@@ -11670,6 +9403,7 @@
           <a:lstStyle/>
           <a:p>
             <a:pPr algn="ctr"/>
+            <a:endParaRPr/>
           </a:p>
         </p:txBody>
       </p:sp>
@@ -11713,6 +9447,7 @@
           <a:lstStyle/>
           <a:p>
             <a:pPr algn="ctr"/>
+            <a:endParaRPr/>
           </a:p>
         </p:txBody>
       </p:sp>
@@ -11759,8 +9494,8 @@
         </p:nvSpPr>
         <p:spPr>
           <a:xfrm>
-            <a:off x="10378440" y="6528816"/>
-            <a:ext cx="1371600" cy="292608"/>
+            <a:off x="10378440" y="6544315"/>
+            <a:ext cx="1371600" cy="261610"/>
           </a:xfrm>
           <a:prstGeom prst="rect">
             <a:avLst/>
@@ -11775,14 +9510,29 @@
           <a:p>
             <a:pPr algn="r"/>
             <a:r>
-              <a:rPr sz="1100" b="0">
+              <a:rPr sz="1100" b="0" dirty="0">
                 <a:solidFill>
                   <a:srgbClr val="FFFFFF"/>
                 </a:solidFill>
                 <a:latin typeface="Calibri"/>
               </a:rPr>
-              <a:t>7 / 18</a:t>
-            </a:r>
+              <a:t>7 / 1</a:t>
+            </a:r>
+            <a:r>
+              <a:rPr lang="es-419" sz="1100" b="0" dirty="0">
+                <a:solidFill>
+                  <a:srgbClr val="FFFFFF"/>
+                </a:solidFill>
+                <a:latin typeface="Calibri"/>
+              </a:rPr>
+              <a:t>3</a:t>
+            </a:r>
+            <a:endParaRPr sz="1100" b="0" dirty="0">
+              <a:solidFill>
+                <a:srgbClr val="FFFFFF"/>
+              </a:solidFill>
+              <a:latin typeface="Calibri"/>
+            </a:endParaRPr>
           </a:p>
         </p:txBody>
       </p:sp>
@@ -11861,6 +9611,7 @@
           <a:lstStyle/>
           <a:p>
             <a:pPr algn="ctr"/>
+            <a:endParaRPr/>
           </a:p>
         </p:txBody>
       </p:sp>
@@ -11967,6 +9718,7 @@
           <a:lstStyle/>
           <a:p>
             <a:pPr algn="ctr"/>
+            <a:endParaRPr/>
           </a:p>
         </p:txBody>
       </p:sp>
@@ -12082,7 +9834,7 @@
 </file>
 
 <file path=ppt/slides/slide8.xml><?xml version="1.0" encoding="utf-8"?>
-<p:sld xmlns:a="http://schemas.openxmlformats.org/drawingml/2006/main" xmlns:p="http://schemas.openxmlformats.org/presentationml/2006/main" xmlns:r="http://schemas.openxmlformats.org/officeDocument/2006/relationships">
+<p:sld xmlns:a="http://schemas.openxmlformats.org/drawingml/2006/main" xmlns:r="http://schemas.openxmlformats.org/officeDocument/2006/relationships" xmlns:p="http://schemas.openxmlformats.org/presentationml/2006/main">
   <p:cSld>
     <p:spTree>
       <p:nvGrpSpPr>
@@ -12090,7 +9842,14 @@
         <p:cNvGrpSpPr/>
         <p:nvPr/>
       </p:nvGrpSpPr>
-      <p:grpSpPr/>
+      <p:grpSpPr>
+        <a:xfrm>
+          <a:off x="0" y="0"/>
+          <a:ext cx="0" cy="0"/>
+          <a:chOff x="0" y="0"/>
+          <a:chExt cx="0" cy="0"/>
+        </a:xfrm>
+      </p:grpSpPr>
       <p:sp>
         <p:nvSpPr>
           <p:cNvPr id="2" name="Rectangle 1"/>
@@ -12131,6 +9890,7 @@
           <a:lstStyle/>
           <a:p>
             <a:pPr algn="ctr"/>
+            <a:endParaRPr/>
           </a:p>
         </p:txBody>
       </p:sp>
@@ -12174,6 +9934,7 @@
           <a:lstStyle/>
           <a:p>
             <a:pPr algn="ctr"/>
+            <a:endParaRPr/>
           </a:p>
         </p:txBody>
       </p:sp>
@@ -12217,6 +9978,7 @@
           <a:lstStyle/>
           <a:p>
             <a:pPr algn="ctr"/>
+            <a:endParaRPr/>
           </a:p>
         </p:txBody>
       </p:sp>
@@ -12263,8 +10025,8 @@
         </p:nvSpPr>
         <p:spPr>
           <a:xfrm>
-            <a:off x="10378440" y="6528816"/>
-            <a:ext cx="1371600" cy="292608"/>
+            <a:off x="10378440" y="6544315"/>
+            <a:ext cx="1371600" cy="261610"/>
           </a:xfrm>
           <a:prstGeom prst="rect">
             <a:avLst/>
@@ -12279,14 +10041,29 @@
           <a:p>
             <a:pPr algn="r"/>
             <a:r>
-              <a:rPr sz="1100" b="0">
+              <a:rPr sz="1100" b="0" dirty="0">
                 <a:solidFill>
                   <a:srgbClr val="FFFFFF"/>
                 </a:solidFill>
                 <a:latin typeface="Calibri"/>
               </a:rPr>
-              <a:t>8 / 18</a:t>
-            </a:r>
+              <a:t>8 / 1</a:t>
+            </a:r>
+            <a:r>
+              <a:rPr lang="es-419" sz="1100" b="0" dirty="0">
+                <a:solidFill>
+                  <a:srgbClr val="FFFFFF"/>
+                </a:solidFill>
+                <a:latin typeface="Calibri"/>
+              </a:rPr>
+              <a:t>3</a:t>
+            </a:r>
+            <a:endParaRPr sz="1100" b="0" dirty="0">
+              <a:solidFill>
+                <a:srgbClr val="FFFFFF"/>
+              </a:solidFill>
+              <a:latin typeface="Calibri"/>
+            </a:endParaRPr>
           </a:p>
         </p:txBody>
       </p:sp>
@@ -12365,6 +10142,7 @@
           <a:lstStyle/>
           <a:p>
             <a:pPr algn="ctr"/>
+            <a:endParaRPr/>
           </a:p>
         </p:txBody>
       </p:sp>
@@ -12447,6 +10225,7 @@
           <a:lstStyle/>
           <a:p>
             <a:pPr algn="ctr"/>
+            <a:endParaRPr/>
           </a:p>
         </p:txBody>
       </p:sp>
@@ -12529,6 +10308,7 @@
           <a:lstStyle/>
           <a:p>
             <a:pPr algn="ctr"/>
+            <a:endParaRPr/>
           </a:p>
         </p:txBody>
       </p:sp>
@@ -12646,6 +10426,7 @@
           <a:lstStyle/>
           <a:p>
             <a:pPr algn="ctr"/>
+            <a:endParaRPr/>
           </a:p>
         </p:txBody>
       </p:sp>
@@ -12763,6 +10544,7 @@
           <a:lstStyle/>
           <a:p>
             <a:pPr algn="ctr"/>
+            <a:endParaRPr/>
           </a:p>
         </p:txBody>
       </p:sp>
@@ -12845,7 +10627,7 @@
 </file>
 
 <file path=ppt/slides/slide9.xml><?xml version="1.0" encoding="utf-8"?>
-<p:sld xmlns:a="http://schemas.openxmlformats.org/drawingml/2006/main" xmlns:p="http://schemas.openxmlformats.org/presentationml/2006/main" xmlns:r="http://schemas.openxmlformats.org/officeDocument/2006/relationships">
+<p:sld xmlns:a="http://schemas.openxmlformats.org/drawingml/2006/main" xmlns:r="http://schemas.openxmlformats.org/officeDocument/2006/relationships" xmlns:p="http://schemas.openxmlformats.org/presentationml/2006/main">
   <p:cSld>
     <p:spTree>
       <p:nvGrpSpPr>
@@ -12853,7 +10635,14 @@
         <p:cNvGrpSpPr/>
         <p:nvPr/>
       </p:nvGrpSpPr>
-      <p:grpSpPr/>
+      <p:grpSpPr>
+        <a:xfrm>
+          <a:off x="0" y="0"/>
+          <a:ext cx="0" cy="0"/>
+          <a:chOff x="0" y="0"/>
+          <a:chExt cx="0" cy="0"/>
+        </a:xfrm>
+      </p:grpSpPr>
       <p:sp>
         <p:nvSpPr>
           <p:cNvPr id="2" name="Rectangle 1"/>
@@ -12894,6 +10683,7 @@
           <a:lstStyle/>
           <a:p>
             <a:pPr algn="ctr"/>
+            <a:endParaRPr/>
           </a:p>
         </p:txBody>
       </p:sp>
@@ -12937,6 +10727,7 @@
           <a:lstStyle/>
           <a:p>
             <a:pPr algn="ctr"/>
+            <a:endParaRPr/>
           </a:p>
         </p:txBody>
       </p:sp>
@@ -12980,6 +10771,7 @@
           <a:lstStyle/>
           <a:p>
             <a:pPr algn="ctr"/>
+            <a:endParaRPr/>
           </a:p>
         </p:txBody>
       </p:sp>
@@ -13026,8 +10818,8 @@
         </p:nvSpPr>
         <p:spPr>
           <a:xfrm>
-            <a:off x="10378440" y="6528816"/>
-            <a:ext cx="1371600" cy="292608"/>
+            <a:off x="10378440" y="6544315"/>
+            <a:ext cx="1371600" cy="261610"/>
           </a:xfrm>
           <a:prstGeom prst="rect">
             <a:avLst/>
@@ -13042,14 +10834,29 @@
           <a:p>
             <a:pPr algn="r"/>
             <a:r>
-              <a:rPr sz="1100" b="0">
+              <a:rPr sz="1100" b="0" dirty="0">
                 <a:solidFill>
                   <a:srgbClr val="FFFFFF"/>
                 </a:solidFill>
                 <a:latin typeface="Calibri"/>
               </a:rPr>
-              <a:t>9 / 18</a:t>
-            </a:r>
+              <a:t>9 / 1</a:t>
+            </a:r>
+            <a:r>
+              <a:rPr lang="es-419" sz="1100" b="0" dirty="0">
+                <a:solidFill>
+                  <a:srgbClr val="FFFFFF"/>
+                </a:solidFill>
+                <a:latin typeface="Calibri"/>
+              </a:rPr>
+              <a:t>3</a:t>
+            </a:r>
+            <a:endParaRPr sz="1100" b="0" dirty="0">
+              <a:solidFill>
+                <a:srgbClr val="FFFFFF"/>
+              </a:solidFill>
+              <a:latin typeface="Calibri"/>
+            </a:endParaRPr>
           </a:p>
         </p:txBody>
       </p:sp>
@@ -13128,6 +10935,7 @@
           <a:lstStyle/>
           <a:p>
             <a:pPr algn="ctr"/>
+            <a:endParaRPr/>
           </a:p>
         </p:txBody>
       </p:sp>
@@ -13208,6 +11016,7 @@
           <a:lstStyle/>
           <a:p>
             <a:pPr algn="ctr"/>
+            <a:endParaRPr/>
           </a:p>
         </p:txBody>
       </p:sp>
@@ -13234,15 +11043,7 @@
           <a:lstStyle/>
           <a:p>
             <a:pPr algn="ctr"/>
-            <a:r>
-              <a:rPr sz="1400" b="1">
-                <a:solidFill>
-                  <a:srgbClr val="FFFFFF"/>
-                </a:solidFill>
-                <a:latin typeface="Calibri"/>
-              </a:rPr>
-              <a:t/>
-            </a:r>
+            <a:endParaRPr/>
           </a:p>
         </p:txBody>
       </p:sp>
@@ -13288,6 +11089,7 @@
           <a:lstStyle/>
           <a:p>
             <a:pPr algn="ctr"/>
+            <a:endParaRPr/>
           </a:p>
         </p:txBody>
       </p:sp>
@@ -13368,6 +11170,7 @@
           <a:lstStyle/>
           <a:p>
             <a:pPr algn="ctr"/>
+            <a:endParaRPr/>
           </a:p>
         </p:txBody>
       </p:sp>
@@ -13448,6 +11251,7 @@
           <a:lstStyle/>
           <a:p>
             <a:pPr algn="ctr"/>
+            <a:endParaRPr/>
           </a:p>
         </p:txBody>
       </p:sp>
@@ -13528,6 +11332,7 @@
           <a:lstStyle/>
           <a:p>
             <a:pPr algn="ctr"/>
+            <a:endParaRPr/>
           </a:p>
         </p:txBody>
       </p:sp>
@@ -13608,6 +11413,7 @@
           <a:lstStyle/>
           <a:p>
             <a:pPr algn="ctr"/>
+            <a:endParaRPr/>
           </a:p>
         </p:txBody>
       </p:sp>
@@ -13688,6 +11494,7 @@
           <a:lstStyle/>
           <a:p>
             <a:pPr algn="ctr"/>
+            <a:endParaRPr/>
           </a:p>
         </p:txBody>
       </p:sp>
@@ -13768,6 +11575,7 @@
           <a:lstStyle/>
           <a:p>
             <a:pPr algn="ctr"/>
+            <a:endParaRPr/>
           </a:p>
         </p:txBody>
       </p:sp>
@@ -13848,6 +11656,7 @@
           <a:lstStyle/>
           <a:p>
             <a:pPr algn="ctr"/>
+            <a:endParaRPr/>
           </a:p>
         </p:txBody>
       </p:sp>
@@ -13928,6 +11737,7 @@
           <a:lstStyle/>
           <a:p>
             <a:pPr algn="ctr"/>
+            <a:endParaRPr/>
           </a:p>
         </p:txBody>
       </p:sp>
@@ -14008,6 +11818,7 @@
           <a:lstStyle/>
           <a:p>
             <a:pPr algn="ctr"/>
+            <a:endParaRPr/>
           </a:p>
         </p:txBody>
       </p:sp>
@@ -14088,6 +11899,7 @@
           <a:lstStyle/>
           <a:p>
             <a:pPr algn="ctr"/>
+            <a:endParaRPr/>
           </a:p>
         </p:txBody>
       </p:sp>
@@ -14168,6 +11980,7 @@
           <a:lstStyle/>
           <a:p>
             <a:pPr algn="ctr"/>
+            <a:endParaRPr/>
           </a:p>
         </p:txBody>
       </p:sp>
@@ -14248,6 +12061,7 @@
           <a:lstStyle/>
           <a:p>
             <a:pPr algn="ctr"/>
+            <a:endParaRPr/>
           </a:p>
         </p:txBody>
       </p:sp>
@@ -14328,6 +12142,7 @@
           <a:lstStyle/>
           <a:p>
             <a:pPr algn="ctr"/>
+            <a:endParaRPr/>
           </a:p>
         </p:txBody>
       </p:sp>
@@ -14408,6 +12223,7 @@
           <a:lstStyle/>
           <a:p>
             <a:pPr algn="ctr"/>
+            <a:endParaRPr/>
           </a:p>
         </p:txBody>
       </p:sp>
@@ -14488,6 +12304,7 @@
           <a:lstStyle/>
           <a:p>
             <a:pPr algn="ctr"/>
+            <a:endParaRPr/>
           </a:p>
         </p:txBody>
       </p:sp>
@@ -14568,6 +12385,7 @@
           <a:lstStyle/>
           <a:p>
             <a:pPr algn="ctr"/>
+            <a:endParaRPr/>
           </a:p>
         </p:txBody>
       </p:sp>
@@ -14648,6 +12466,7 @@
           <a:lstStyle/>
           <a:p>
             <a:pPr algn="ctr"/>
+            <a:endParaRPr/>
           </a:p>
         </p:txBody>
       </p:sp>
@@ -14728,6 +12547,7 @@
           <a:lstStyle/>
           <a:p>
             <a:pPr algn="ctr"/>
+            <a:endParaRPr/>
           </a:p>
         </p:txBody>
       </p:sp>
@@ -14808,6 +12628,7 @@
           <a:lstStyle/>
           <a:p>
             <a:pPr algn="ctr"/>
+            <a:endParaRPr/>
           </a:p>
         </p:txBody>
       </p:sp>
@@ -14888,6 +12709,7 @@
           <a:lstStyle/>
           <a:p>
             <a:pPr algn="ctr"/>
+            <a:endParaRPr/>
           </a:p>
         </p:txBody>
       </p:sp>
@@ -14968,6 +12790,7 @@
           <a:lstStyle/>
           <a:p>
             <a:pPr algn="ctr"/>
+            <a:endParaRPr/>
           </a:p>
         </p:txBody>
       </p:sp>
@@ -15048,6 +12871,7 @@
           <a:lstStyle/>
           <a:p>
             <a:pPr algn="ctr"/>
+            <a:endParaRPr/>
           </a:p>
         </p:txBody>
       </p:sp>
@@ -15128,6 +12952,7 @@
           <a:lstStyle/>
           <a:p>
             <a:pPr algn="ctr"/>
+            <a:endParaRPr/>
           </a:p>
         </p:txBody>
       </p:sp>
@@ -15208,6 +13033,7 @@
           <a:lstStyle/>
           <a:p>
             <a:pPr algn="ctr"/>
+            <a:endParaRPr/>
           </a:p>
         </p:txBody>
       </p:sp>
@@ -15288,6 +13114,7 @@
           <a:lstStyle/>
           <a:p>
             <a:pPr algn="ctr"/>
+            <a:endParaRPr/>
           </a:p>
         </p:txBody>
       </p:sp>
@@ -15368,6 +13195,7 @@
           <a:lstStyle/>
           <a:p>
             <a:pPr algn="ctr"/>
+            <a:endParaRPr/>
           </a:p>
         </p:txBody>
       </p:sp>
@@ -15448,6 +13276,7 @@
           <a:lstStyle/>
           <a:p>
             <a:pPr algn="ctr"/>
+            <a:endParaRPr/>
           </a:p>
         </p:txBody>
       </p:sp>
@@ -15528,6 +13357,7 @@
           <a:lstStyle/>
           <a:p>
             <a:pPr algn="ctr"/>
+            <a:endParaRPr/>
           </a:p>
         </p:txBody>
       </p:sp>
@@ -15608,6 +13438,7 @@
           <a:lstStyle/>
           <a:p>
             <a:pPr algn="ctr"/>
+            <a:endParaRPr/>
           </a:p>
         </p:txBody>
       </p:sp>
@@ -15688,6 +13519,7 @@
           <a:lstStyle/>
           <a:p>
             <a:pPr algn="ctr"/>
+            <a:endParaRPr/>
           </a:p>
         </p:txBody>
       </p:sp>
@@ -15768,6 +13600,7 @@
           <a:lstStyle/>
           <a:p>
             <a:pPr algn="ctr"/>
+            <a:endParaRPr/>
           </a:p>
         </p:txBody>
       </p:sp>
@@ -15848,6 +13681,7 @@
           <a:lstStyle/>
           <a:p>
             <a:pPr algn="ctr"/>
+            <a:endParaRPr/>
           </a:p>
         </p:txBody>
       </p:sp>
@@ -15928,6 +13762,7 @@
           <a:lstStyle/>
           <a:p>
             <a:pPr algn="ctr"/>
+            <a:endParaRPr/>
           </a:p>
         </p:txBody>
       </p:sp>
@@ -16008,6 +13843,7 @@
           <a:lstStyle/>
           <a:p>
             <a:pPr algn="ctr"/>
+            <a:endParaRPr/>
           </a:p>
         </p:txBody>
       </p:sp>
@@ -16158,6 +13994,7 @@
           <a:lstStyle/>
           <a:p>
             <a:pPr algn="ctr"/>
+            <a:endParaRPr/>
           </a:p>
         </p:txBody>
       </p:sp>
@@ -16238,6 +14075,7 @@
           <a:lstStyle/>
           <a:p>
             <a:pPr algn="ctr"/>
+            <a:endParaRPr/>
           </a:p>
         </p:txBody>
       </p:sp>
@@ -16318,6 +14156,7 @@
           <a:lstStyle/>
           <a:p>
             <a:pPr algn="ctr"/>
+            <a:endParaRPr/>
           </a:p>
         </p:txBody>
       </p:sp>
@@ -16398,6 +14237,7 @@
           <a:lstStyle/>
           <a:p>
             <a:pPr algn="ctr"/>
+            <a:endParaRPr/>
           </a:p>
         </p:txBody>
       </p:sp>
@@ -16478,6 +14318,7 @@
           <a:lstStyle/>
           <a:p>
             <a:pPr algn="ctr"/>
+            <a:endParaRPr/>
           </a:p>
         </p:txBody>
       </p:sp>
@@ -16558,6 +14399,7 @@
           <a:lstStyle/>
           <a:p>
             <a:pPr algn="ctr"/>
+            <a:endParaRPr/>
           </a:p>
         </p:txBody>
       </p:sp>
@@ -16638,6 +14480,7 @@
           <a:lstStyle/>
           <a:p>
             <a:pPr algn="ctr"/>
+            <a:endParaRPr/>
           </a:p>
         </p:txBody>
       </p:sp>
@@ -16718,6 +14561,7 @@
           <a:lstStyle/>
           <a:p>
             <a:pPr algn="ctr"/>
+            <a:endParaRPr/>
           </a:p>
         </p:txBody>
       </p:sp>
@@ -16798,6 +14642,7 @@
           <a:lstStyle/>
           <a:p>
             <a:pPr algn="ctr"/>
+            <a:endParaRPr/>
           </a:p>
         </p:txBody>
       </p:sp>
@@ -16915,6 +14760,7 @@
           <a:lstStyle/>
           <a:p>
             <a:pPr algn="ctr"/>
+            <a:endParaRPr/>
           </a:p>
         </p:txBody>
       </p:sp>
